--- a/proposal/PharmaColdOps-Proposal-Presentation-Final.pptx
+++ b/proposal/PharmaColdOps-Proposal-Presentation-Final.pptx
@@ -1515,7 +1515,7 @@
                 <a:ea typeface="DM Sans" pitchFamily="34" charset="-122"/>
                 <a:cs typeface="DM Sans" pitchFamily="34" charset="-120"/>
               </a:rPr>
-              <a:t>Project Group 52 · Xu Wenzhe · Zhu Jianyu · Wang Lepeng · Shen Ziyi</a:t>
+              <a:t>Project Group 41 · Xu Wenzhe · Zhu Jianyu · Wang Lepeng · Shen Ziyi</a:t>
             </a:r>
             <a:endParaRPr lang="en-US" sz="1450" dirty="0"/>
           </a:p>
@@ -1549,934 +1549,7 @@
 </p:sld>
 </file>
 
-<file path=ppt/slides/slide12.xml><?xml version="1.0" encoding="utf-8"?>
-<p:sld xmlns:a="http://schemas.openxmlformats.org/drawingml/2006/main" xmlns:r="http://schemas.openxmlformats.org/officeDocument/2006/relationships" xmlns:p="http://schemas.openxmlformats.org/presentationml/2006/main">
-  <p:cSld>
-    <p:spTree>
-      <p:nvGrpSpPr>
-        <p:cNvPr id="1" name=""/>
-        <p:cNvGrpSpPr/>
-        <p:nvPr/>
-      </p:nvGrpSpPr>
-      <p:grpSpPr>
-        <a:xfrm>
-          <a:off x="0" y="0"/>
-          <a:ext cx="0" cy="0"/>
-          <a:chOff x="0" y="0"/>
-          <a:chExt cx="0" cy="0"/>
-        </a:xfrm>
-      </p:grpSpPr>
-      <p:sp>
-        <p:nvSpPr>
-          <p:cNvPr id="2" name="Text 0"/>
-          <p:cNvSpPr/>
-          <p:nvPr/>
-        </p:nvSpPr>
-        <p:spPr>
-          <a:xfrm>
-            <a:off x="661475" y="729754"/>
-            <a:ext cx="10868745" cy="590649"/>
-          </a:xfrm>
-          <a:prstGeom prst="rect">
-            <a:avLst/>
-          </a:prstGeom>
-          <a:noFill/>
-        </p:spPr>
-        <p:txBody>
-          <a:bodyPr wrap="square" lIns="0" tIns="0" rIns="0" bIns="0" rtlCol="0" anchor="t">
-            <a:normAutofit/>
-          </a:bodyPr>
-          <a:lstStyle/>
-          <a:p>
-            <a:pPr marL="0" indent="0" algn="l">
-              <a:lnSpc>
-                <a:spcPct val="104000"/>
-              </a:lnSpc>
-              <a:buNone/>
-            </a:pPr>
-            <a:r>
-              <a:rPr lang="en-US" sz="3700" dirty="0">
-                <a:solidFill>
-                  <a:srgbClr val="5C4E3D"/>
-                </a:solidFill>
-                <a:latin typeface="Libre Baskerville" panose="02000000000000000000" pitchFamily="34" charset="0"/>
-                <a:ea typeface="Libre Baskerville" panose="02000000000000000000" pitchFamily="34" charset="-122"/>
-                <a:cs typeface="Libre Baskerville" panose="02000000000000000000" pitchFamily="34" charset="-120"/>
-              </a:rPr>
-              <a:t>Risks, Team &amp; Next Steps</a:t>
-            </a:r>
-            <a:endParaRPr lang="en-US" sz="3700" dirty="0"/>
-          </a:p>
-        </p:txBody>
-      </p:sp>
-      <p:sp>
-        <p:nvSpPr>
-          <p:cNvPr id="3" name="Shape 1"/>
-          <p:cNvSpPr/>
-          <p:nvPr/>
-        </p:nvSpPr>
-        <p:spPr>
-          <a:xfrm>
-            <a:off x="525350" y="1603871"/>
-            <a:ext cx="5476043" cy="3102074"/>
-          </a:xfrm>
-          <a:prstGeom prst="roundRect">
-            <a:avLst>
-              <a:gd name="adj" fmla="val 4387"/>
-            </a:avLst>
-          </a:prstGeom>
-          <a:solidFill>
-            <a:srgbClr val="063E5F"/>
-          </a:solidFill>
-        </p:spPr>
-        <p:txBody>
-          <a:bodyPr wrap="square">
-            <a:normAutofit/>
-          </a:bodyPr>
-          <a:p/>
-        </p:txBody>
-      </p:sp>
-      <p:sp>
-        <p:nvSpPr>
-          <p:cNvPr id="4" name="Text 2"/>
-          <p:cNvSpPr/>
-          <p:nvPr/>
-        </p:nvSpPr>
-        <p:spPr>
-          <a:xfrm>
-            <a:off x="714357" y="1792883"/>
-            <a:ext cx="5098029" cy="295275"/>
-          </a:xfrm>
-          <a:prstGeom prst="rect">
-            <a:avLst/>
-          </a:prstGeom>
-          <a:noFill/>
-        </p:spPr>
-        <p:txBody>
-          <a:bodyPr wrap="square" lIns="0" tIns="0" rIns="0" bIns="0" rtlCol="0" anchor="t">
-            <a:normAutofit/>
-          </a:bodyPr>
-          <a:lstStyle/>
-          <a:p>
-            <a:pPr marL="0" indent="0" algn="l">
-              <a:lnSpc>
-                <a:spcPct val="104000"/>
-              </a:lnSpc>
-              <a:buNone/>
-            </a:pPr>
-            <a:r>
-              <a:rPr lang="en-US" sz="1850" dirty="0">
-                <a:solidFill>
-                  <a:srgbClr val="FFFFFF"/>
-                </a:solidFill>
-                <a:latin typeface="Libre Baskerville" panose="02000000000000000000" pitchFamily="34" charset="0"/>
-                <a:ea typeface="Libre Baskerville" panose="02000000000000000000" pitchFamily="34" charset="-122"/>
-                <a:cs typeface="Libre Baskerville" panose="02000000000000000000" pitchFamily="34" charset="-120"/>
-              </a:rPr>
-              <a:t>Risk Mitigations</a:t>
-            </a:r>
-            <a:endParaRPr lang="en-US" sz="1850" dirty="0"/>
-          </a:p>
-        </p:txBody>
-      </p:sp>
-      <p:pic>
-        <p:nvPicPr>
-          <p:cNvPr id="5" name="Image 0" descr="preencoded.png"/>
-          <p:cNvPicPr>
-            <a:picLocks noChangeAspect="1"/>
-          </p:cNvPicPr>
-          <p:nvPr/>
-        </p:nvPicPr>
-        <p:blipFill>
-          <a:blip r:embed="rId1">
-            <a:extLst>
-              <a:ext uri="{96DAC541-7B7A-43D3-8B79-37D633B846F1}">
-                <asvg:svgBlip xmlns:asvg="http://schemas.microsoft.com/office/drawing/2016/SVG/main" r:embed="rId2"/>
-              </a:ext>
-            </a:extLst>
-          </a:blip>
-          <a:stretch>
-            <a:fillRect/>
-          </a:stretch>
-        </p:blipFill>
-        <p:spPr>
-          <a:xfrm>
-            <a:off x="785198" y="2310209"/>
-            <a:ext cx="283461" cy="283468"/>
-          </a:xfrm>
-          <a:prstGeom prst="rect">
-            <a:avLst/>
-          </a:prstGeom>
-        </p:spPr>
-      </p:pic>
-      <p:sp>
-        <p:nvSpPr>
-          <p:cNvPr id="6" name="Text 3"/>
-          <p:cNvSpPr/>
-          <p:nvPr/>
-        </p:nvSpPr>
-        <p:spPr>
-          <a:xfrm>
-            <a:off x="1328605" y="2300784"/>
-            <a:ext cx="1816650" cy="1209675"/>
-          </a:xfrm>
-          <a:prstGeom prst="rect">
-            <a:avLst/>
-          </a:prstGeom>
-          <a:noFill/>
-        </p:spPr>
-        <p:txBody>
-          <a:bodyPr wrap="square" lIns="0" tIns="0" rIns="0" bIns="0" rtlCol="0" anchor="t">
-            <a:normAutofit/>
-          </a:bodyPr>
-          <a:lstStyle/>
-          <a:p>
-            <a:pPr marL="0" indent="0" algn="l">
-              <a:lnSpc>
-                <a:spcPct val="133000"/>
-              </a:lnSpc>
-              <a:buNone/>
-            </a:pPr>
-            <a:r>
-              <a:rPr lang="en-US" sz="1450" b="1" dirty="0">
-                <a:solidFill>
-                  <a:srgbClr val="FFFFFF"/>
-                </a:solidFill>
-                <a:latin typeface="DM Sans Bold" pitchFamily="34" charset="0"/>
-                <a:ea typeface="DM Sans Bold" pitchFamily="34" charset="-122"/>
-                <a:cs typeface="DM Sans Bold" pitchFamily="34" charset="-120"/>
-              </a:rPr>
-              <a:t>Annotator agreement</a:t>
-            </a:r>
-            <a:r>
-              <a:rPr lang="en-US" sz="1450" dirty="0">
-                <a:solidFill>
-                  <a:srgbClr val="FFFFFF"/>
-                </a:solidFill>
-                <a:latin typeface="DM Sans" pitchFamily="34" charset="0"/>
-                <a:ea typeface="DM Sans" pitchFamily="34" charset="-122"/>
-                <a:cs typeface="DM Sans" pitchFamily="34" charset="-120"/>
-              </a:rPr>
-              <a:t> κ = 0.6434 vs our 0.80 target → report it</a:t>
-            </a:r>
-            <a:endParaRPr lang="en-US" sz="1450" dirty="0"/>
-          </a:p>
-        </p:txBody>
-      </p:sp>
-      <p:pic>
-        <p:nvPicPr>
-          <p:cNvPr id="7" name="Image 1" descr="preencoded.png"/>
-          <p:cNvPicPr>
-            <a:picLocks noChangeAspect="1"/>
-          </p:cNvPicPr>
-          <p:nvPr/>
-        </p:nvPicPr>
-        <p:blipFill>
-          <a:blip r:embed="rId1">
-            <a:extLst>
-              <a:ext uri="{96DAC541-7B7A-43D3-8B79-37D633B846F1}">
-                <asvg:svgBlip xmlns:asvg="http://schemas.microsoft.com/office/drawing/2016/SVG/main" r:embed="rId2"/>
-              </a:ext>
-            </a:extLst>
-          </a:blip>
-          <a:stretch>
-            <a:fillRect/>
-          </a:stretch>
-        </p:blipFill>
-        <p:spPr>
-          <a:xfrm>
-            <a:off x="3452329" y="2310209"/>
-            <a:ext cx="283461" cy="283468"/>
-          </a:xfrm>
-          <a:prstGeom prst="rect">
-            <a:avLst/>
-          </a:prstGeom>
-        </p:spPr>
-      </p:pic>
-      <p:sp>
-        <p:nvSpPr>
-          <p:cNvPr id="8" name="Text 4"/>
-          <p:cNvSpPr/>
-          <p:nvPr/>
-        </p:nvSpPr>
-        <p:spPr>
-          <a:xfrm>
-            <a:off x="3995737" y="2300784"/>
-            <a:ext cx="1816650" cy="1209675"/>
-          </a:xfrm>
-          <a:prstGeom prst="rect">
-            <a:avLst/>
-          </a:prstGeom>
-          <a:noFill/>
-        </p:spPr>
-        <p:txBody>
-          <a:bodyPr wrap="square" lIns="0" tIns="0" rIns="0" bIns="0" rtlCol="0" anchor="t">
-            <a:normAutofit/>
-          </a:bodyPr>
-          <a:lstStyle/>
-          <a:p>
-            <a:pPr marL="0" indent="0" algn="l">
-              <a:lnSpc>
-                <a:spcPct val="133000"/>
-              </a:lnSpc>
-              <a:buNone/>
-            </a:pPr>
-            <a:r>
-              <a:rPr lang="en-US" sz="1450" b="1" dirty="0">
-                <a:solidFill>
-                  <a:srgbClr val="FFFFFF"/>
-                </a:solidFill>
-                <a:latin typeface="DM Sans Bold" pitchFamily="34" charset="0"/>
-                <a:ea typeface="DM Sans Bold" pitchFamily="34" charset="-122"/>
-                <a:cs typeface="DM Sans Bold" pitchFamily="34" charset="-120"/>
-              </a:rPr>
-              <a:t>Quarantine recall 0/3</a:t>
-            </a:r>
-            <a:r>
-              <a:rPr lang="en-US" sz="1450" dirty="0">
-                <a:solidFill>
-                  <a:srgbClr val="FFFFFF"/>
-                </a:solidFill>
-                <a:latin typeface="DM Sans" pitchFamily="34" charset="0"/>
-                <a:ea typeface="DM Sans" pitchFamily="34" charset="-122"/>
-                <a:cs typeface="DM Sans" pitchFamily="34" charset="-120"/>
-              </a:rPr>
-              <a:t> 3 gold cases → report support counts</a:t>
-            </a:r>
-            <a:endParaRPr lang="en-US" sz="1450" dirty="0"/>
-          </a:p>
-        </p:txBody>
-      </p:sp>
-      <p:pic>
-        <p:nvPicPr>
-          <p:cNvPr id="9" name="Image 2" descr="preencoded.png"/>
-          <p:cNvPicPr>
-            <a:picLocks noChangeAspect="1"/>
-          </p:cNvPicPr>
-          <p:nvPr/>
-        </p:nvPicPr>
-        <p:blipFill>
-          <a:blip r:embed="rId1">
-            <a:extLst>
-              <a:ext uri="{96DAC541-7B7A-43D3-8B79-37D633B846F1}">
-                <asvg:svgBlip xmlns:asvg="http://schemas.microsoft.com/office/drawing/2016/SVG/main" r:embed="rId2"/>
-              </a:ext>
-            </a:extLst>
-          </a:blip>
-          <a:stretch>
-            <a:fillRect/>
-          </a:stretch>
-        </p:blipFill>
-        <p:spPr>
-          <a:xfrm>
-            <a:off x="785198" y="3897908"/>
-            <a:ext cx="283461" cy="283468"/>
-          </a:xfrm>
-          <a:prstGeom prst="rect">
-            <a:avLst/>
-          </a:prstGeom>
-        </p:spPr>
-      </p:pic>
-      <p:sp>
-        <p:nvSpPr>
-          <p:cNvPr id="10" name="Text 5"/>
-          <p:cNvSpPr/>
-          <p:nvPr/>
-        </p:nvSpPr>
-        <p:spPr>
-          <a:xfrm>
-            <a:off x="1328605" y="3888482"/>
-            <a:ext cx="4483782" cy="604838"/>
-          </a:xfrm>
-          <a:prstGeom prst="rect">
-            <a:avLst/>
-          </a:prstGeom>
-          <a:noFill/>
-        </p:spPr>
-        <p:txBody>
-          <a:bodyPr wrap="square" lIns="0" tIns="0" rIns="0" bIns="0" rtlCol="0" anchor="t">
-            <a:normAutofit/>
-          </a:bodyPr>
-          <a:lstStyle/>
-          <a:p>
-            <a:pPr marL="0" indent="0" algn="l">
-              <a:lnSpc>
-                <a:spcPct val="133000"/>
-              </a:lnSpc>
-              <a:buNone/>
-            </a:pPr>
-            <a:r>
-              <a:rPr lang="en-US" sz="1450" b="1" dirty="0">
-                <a:solidFill>
-                  <a:srgbClr val="FFFFFF"/>
-                </a:solidFill>
-                <a:latin typeface="DM Sans Bold" pitchFamily="34" charset="0"/>
-                <a:ea typeface="DM Sans Bold" pitchFamily="34" charset="-122"/>
-                <a:cs typeface="DM Sans Bold" pitchFamily="34" charset="-120"/>
-              </a:rPr>
-              <a:t>Synthetic data</a:t>
-            </a:r>
-            <a:r>
-              <a:rPr lang="en-US" sz="1450" dirty="0">
-                <a:solidFill>
-                  <a:srgbClr val="FFFFFF"/>
-                </a:solidFill>
-                <a:latin typeface="DM Sans" pitchFamily="34" charset="0"/>
-                <a:ea typeface="DM Sans" pitchFamily="34" charset="-122"/>
-                <a:cs typeface="DM Sans" pitchFamily="34" charset="-120"/>
-              </a:rPr>
-              <a:t> suspected-synthetic → disclose the limit</a:t>
-            </a:r>
-            <a:endParaRPr lang="en-US" sz="1450" dirty="0"/>
-          </a:p>
-        </p:txBody>
-      </p:sp>
-      <p:sp>
-        <p:nvSpPr>
-          <p:cNvPr id="11" name="Text 6"/>
-          <p:cNvSpPr/>
-          <p:nvPr/>
-        </p:nvSpPr>
-        <p:spPr>
-          <a:xfrm>
-            <a:off x="6332776" y="1792883"/>
-            <a:ext cx="5203794" cy="295275"/>
-          </a:xfrm>
-          <a:prstGeom prst="rect">
-            <a:avLst/>
-          </a:prstGeom>
-          <a:noFill/>
-        </p:spPr>
-        <p:txBody>
-          <a:bodyPr wrap="square" lIns="0" tIns="0" rIns="0" bIns="0" rtlCol="0" anchor="t">
-            <a:normAutofit/>
-          </a:bodyPr>
-          <a:lstStyle/>
-          <a:p>
-            <a:pPr marL="0" indent="0" algn="l">
-              <a:lnSpc>
-                <a:spcPct val="104000"/>
-              </a:lnSpc>
-              <a:buNone/>
-            </a:pPr>
-            <a:r>
-              <a:rPr lang="en-US" sz="1850" dirty="0">
-                <a:solidFill>
-                  <a:srgbClr val="5C4E3D"/>
-                </a:solidFill>
-                <a:latin typeface="Libre Baskerville" panose="02000000000000000000" pitchFamily="34" charset="0"/>
-                <a:ea typeface="Libre Baskerville" panose="02000000000000000000" pitchFamily="34" charset="-122"/>
-                <a:cs typeface="Libre Baskerville" panose="02000000000000000000" pitchFamily="34" charset="-120"/>
-              </a:rPr>
-              <a:t>Team Roles</a:t>
-            </a:r>
-            <a:endParaRPr lang="en-US" sz="1850" dirty="0"/>
-          </a:p>
-        </p:txBody>
-      </p:sp>
-      <p:sp>
-        <p:nvSpPr>
-          <p:cNvPr id="12" name="Shape 7"/>
-          <p:cNvSpPr/>
-          <p:nvPr/>
-        </p:nvSpPr>
-        <p:spPr>
-          <a:xfrm>
-            <a:off x="6332776" y="2348012"/>
-            <a:ext cx="5203794" cy="25400"/>
-          </a:xfrm>
-          <a:prstGeom prst="roundRect">
-            <a:avLst>
-              <a:gd name="adj" fmla="val 49999"/>
-            </a:avLst>
-          </a:prstGeom>
-          <a:solidFill>
-            <a:srgbClr val="454240">
-              <a:alpha val="50000"/>
-            </a:srgbClr>
-          </a:solidFill>
-        </p:spPr>
-        <p:txBody>
-          <a:bodyPr wrap="square">
-            <a:normAutofit/>
-          </a:bodyPr>
-          <a:p/>
-        </p:txBody>
-      </p:sp>
-      <p:sp>
-        <p:nvSpPr>
-          <p:cNvPr id="13" name="Text 8"/>
-          <p:cNvSpPr/>
-          <p:nvPr/>
-        </p:nvSpPr>
-        <p:spPr>
-          <a:xfrm>
-            <a:off x="6332776" y="2633266"/>
-            <a:ext cx="5203794" cy="295275"/>
-          </a:xfrm>
-          <a:prstGeom prst="rect">
-            <a:avLst/>
-          </a:prstGeom>
-          <a:noFill/>
-        </p:spPr>
-        <p:txBody>
-          <a:bodyPr wrap="square" lIns="0" tIns="0" rIns="0" bIns="0" rtlCol="0" anchor="t">
-            <a:normAutofit/>
-          </a:bodyPr>
-          <a:lstStyle/>
-          <a:p>
-            <a:pPr marL="0" indent="0" algn="l">
-              <a:lnSpc>
-                <a:spcPct val="104000"/>
-              </a:lnSpc>
-              <a:buNone/>
-            </a:pPr>
-            <a:r>
-              <a:rPr lang="en-US" sz="1850" dirty="0">
-                <a:solidFill>
-                  <a:srgbClr val="5C4E3D"/>
-                </a:solidFill>
-                <a:latin typeface="Libre Baskerville" panose="02000000000000000000" pitchFamily="34" charset="0"/>
-                <a:ea typeface="Libre Baskerville" panose="02000000000000000000" pitchFamily="34" charset="-122"/>
-                <a:cs typeface="Libre Baskerville" panose="02000000000000000000" pitchFamily="34" charset="-120"/>
-              </a:rPr>
-              <a:t>Immediate Next Steps</a:t>
-            </a:r>
-            <a:endParaRPr lang="en-US" sz="1850" dirty="0"/>
-          </a:p>
-        </p:txBody>
-      </p:sp>
-      <p:sp>
-        <p:nvSpPr>
-          <p:cNvPr id="14" name="Text 9"/>
-          <p:cNvSpPr/>
-          <p:nvPr/>
-        </p:nvSpPr>
-        <p:spPr>
-          <a:xfrm>
-            <a:off x="6332776" y="3117552"/>
-            <a:ext cx="5203794" cy="1039416"/>
-          </a:xfrm>
-          <a:prstGeom prst="rect">
-            <a:avLst/>
-          </a:prstGeom>
-          <a:noFill/>
-        </p:spPr>
-        <p:txBody>
-          <a:bodyPr wrap="square" lIns="0" tIns="0" rIns="0" bIns="0" rtlCol="0" anchor="t">
-            <a:normAutofit/>
-          </a:bodyPr>
-          <a:lstStyle/>
-          <a:p>
-            <a:pPr marL="294640" indent="-294640" algn="l">
-              <a:lnSpc>
-                <a:spcPct val="133000"/>
-              </a:lnSpc>
-              <a:buSzPct val="100000"/>
-              <a:buChar char="•"/>
-            </a:pPr>
-            <a:r>
-              <a:rPr lang="en-US" sz="1450" dirty="0">
-                <a:solidFill>
-                  <a:srgbClr val="454240"/>
-                </a:solidFill>
-                <a:latin typeface="DM Sans" pitchFamily="34" charset="0"/>
-                <a:ea typeface="DM Sans" pitchFamily="34" charset="-122"/>
-                <a:cs typeface="DM Sans" pitchFamily="34" charset="-120"/>
-              </a:rPr>
-              <a:t>W1: threshold review; multi-fold risk experiments</a:t>
-            </a:r>
-            <a:endParaRPr lang="en-US" sz="1450" dirty="0"/>
-          </a:p>
-          <a:p>
-            <a:pPr marL="294640" indent="-294640" algn="l">
-              <a:lnSpc>
-                <a:spcPct val="133000"/>
-              </a:lnSpc>
-              <a:buSzPct val="100000"/>
-              <a:buChar char="•"/>
-            </a:pPr>
-            <a:r>
-              <a:rPr lang="en-US" sz="1450" dirty="0">
-                <a:solidFill>
-                  <a:srgbClr val="454240"/>
-                </a:solidFill>
-                <a:latin typeface="DM Sans" pitchFamily="34" charset="0"/>
-                <a:ea typeface="DM Sans" pitchFamily="34" charset="-122"/>
-                <a:cs typeface="DM Sans" pitchFamily="34" charset="-120"/>
-              </a:rPr>
-              <a:t>W3: integrated acceptance and failure states</a:t>
-            </a:r>
-            <a:endParaRPr lang="en-US" sz="1450" dirty="0"/>
-          </a:p>
-          <a:p>
-            <a:pPr marL="294640" indent="-294640" algn="l">
-              <a:lnSpc>
-                <a:spcPct val="133000"/>
-              </a:lnSpc>
-              <a:buSzPct val="100000"/>
-              <a:buChar char="•"/>
-            </a:pPr>
-            <a:r>
-              <a:rPr lang="en-US" sz="1450" dirty="0">
-                <a:solidFill>
-                  <a:srgbClr val="454240"/>
-                </a:solidFill>
-                <a:latin typeface="DM Sans" pitchFamily="34" charset="0"/>
-                <a:ea typeface="DM Sans" pitchFamily="34" charset="-122"/>
-                <a:cs typeface="DM Sans" pitchFamily="34" charset="-120"/>
-              </a:rPr>
-              <a:t>W5: reproduce cleanly; videos by 25 Oct</a:t>
-            </a:r>
-            <a:endParaRPr lang="en-US" sz="1450" dirty="0"/>
-          </a:p>
-        </p:txBody>
-      </p:sp>
-      <p:pic>
-        <p:nvPicPr>
-          <p:cNvPr id="15" name="Image 3" descr="preencoded.png"/>
-          <p:cNvPicPr>
-            <a:picLocks noChangeAspect="1"/>
-          </p:cNvPicPr>
-          <p:nvPr/>
-        </p:nvPicPr>
-        <p:blipFill>
-          <a:blip r:embed="rId3">
-            <a:extLst>
-              <a:ext uri="{96DAC541-7B7A-43D3-8B79-37D633B846F1}">
-                <asvg:svgBlip xmlns:asvg="http://schemas.microsoft.com/office/drawing/2016/SVG/main" r:embed="rId4"/>
-              </a:ext>
-            </a:extLst>
-          </a:blip>
-          <a:stretch>
-            <a:fillRect/>
-          </a:stretch>
-        </p:blipFill>
-        <p:spPr>
-          <a:xfrm>
-            <a:off x="636075" y="4893171"/>
-            <a:ext cx="2565336" cy="1260475"/>
-          </a:xfrm>
-          <a:prstGeom prst="rect">
-            <a:avLst/>
-          </a:prstGeom>
-        </p:spPr>
-      </p:pic>
-      <p:sp>
-        <p:nvSpPr>
-          <p:cNvPr id="16" name="Text 10"/>
-          <p:cNvSpPr/>
-          <p:nvPr/>
-        </p:nvSpPr>
-        <p:spPr>
-          <a:xfrm>
-            <a:off x="901281" y="4918571"/>
-            <a:ext cx="2300131" cy="1209675"/>
-          </a:xfrm>
-          <a:prstGeom prst="rect">
-            <a:avLst/>
-          </a:prstGeom>
-          <a:noFill/>
-        </p:spPr>
-        <p:txBody>
-          <a:bodyPr wrap="square" lIns="0" tIns="0" rIns="0" bIns="0" rtlCol="0" anchor="t">
-            <a:normAutofit/>
-          </a:bodyPr>
-          <a:lstStyle/>
-          <a:p>
-            <a:pPr marL="0" indent="0" algn="l">
-              <a:lnSpc>
-                <a:spcPct val="133000"/>
-              </a:lnSpc>
-              <a:buNone/>
-            </a:pPr>
-            <a:r>
-              <a:rPr lang="en-US" sz="1450" b="1" dirty="0">
-                <a:solidFill>
-                  <a:srgbClr val="454240"/>
-                </a:solidFill>
-                <a:latin typeface="DM Sans Bold" pitchFamily="34" charset="0"/>
-                <a:ea typeface="DM Sans Bold" pitchFamily="34" charset="-122"/>
-                <a:cs typeface="DM Sans Bold" pitchFamily="34" charset="-120"/>
-              </a:rPr>
-              <a:t>Project Lead / Rules</a:t>
-            </a:r>
-            <a:r>
-              <a:rPr lang="en-US" sz="1450" dirty="0">
-                <a:solidFill>
-                  <a:srgbClr val="454240"/>
-                </a:solidFill>
-                <a:latin typeface="DM Sans" pitchFamily="34" charset="0"/>
-                <a:ea typeface="DM Sans" pitchFamily="34" charset="-122"/>
-                <a:cs typeface="DM Sans" pitchFamily="34" charset="-120"/>
-              </a:rPr>
-              <a:t> · Xu Wenzhe: rules, evidence, evaluation</a:t>
-            </a:r>
-            <a:endParaRPr lang="en-US" sz="1450" dirty="0"/>
-          </a:p>
-        </p:txBody>
-      </p:sp>
-      <p:pic>
-        <p:nvPicPr>
-          <p:cNvPr id="17" name="Image 4" descr="preencoded.png"/>
-          <p:cNvPicPr>
-            <a:picLocks noChangeAspect="1"/>
-          </p:cNvPicPr>
-          <p:nvPr/>
-        </p:nvPicPr>
-        <p:blipFill>
-          <a:blip r:embed="rId5">
-            <a:extLst>
-              <a:ext uri="{96DAC541-7B7A-43D3-8B79-37D633B846F1}">
-                <asvg:svgBlip xmlns:asvg="http://schemas.microsoft.com/office/drawing/2016/SVG/main" r:embed="rId6"/>
-              </a:ext>
-            </a:extLst>
-          </a:blip>
-          <a:stretch>
-            <a:fillRect/>
-          </a:stretch>
-        </p:blipFill>
-        <p:spPr>
-          <a:xfrm>
-            <a:off x="3412246" y="4893171"/>
-            <a:ext cx="2565435" cy="1260475"/>
-          </a:xfrm>
-          <a:prstGeom prst="rect">
-            <a:avLst/>
-          </a:prstGeom>
-        </p:spPr>
-      </p:pic>
-      <p:sp>
-        <p:nvSpPr>
-          <p:cNvPr id="18" name="Text 11"/>
-          <p:cNvSpPr/>
-          <p:nvPr/>
-        </p:nvSpPr>
-        <p:spPr>
-          <a:xfrm>
-            <a:off x="3677451" y="4918571"/>
-            <a:ext cx="2300230" cy="907256"/>
-          </a:xfrm>
-          <a:prstGeom prst="rect">
-            <a:avLst/>
-          </a:prstGeom>
-          <a:noFill/>
-        </p:spPr>
-        <p:txBody>
-          <a:bodyPr wrap="square" lIns="0" tIns="0" rIns="0" bIns="0" rtlCol="0" anchor="t">
-            <a:normAutofit/>
-          </a:bodyPr>
-          <a:lstStyle/>
-          <a:p>
-            <a:pPr marL="0" indent="0" algn="l">
-              <a:lnSpc>
-                <a:spcPct val="133000"/>
-              </a:lnSpc>
-              <a:buNone/>
-            </a:pPr>
-            <a:r>
-              <a:rPr lang="en-US" sz="1450" b="1" dirty="0">
-                <a:solidFill>
-                  <a:srgbClr val="454240"/>
-                </a:solidFill>
-                <a:latin typeface="DM Sans Bold" pitchFamily="34" charset="0"/>
-                <a:ea typeface="DM Sans Bold" pitchFamily="34" charset="-122"/>
-                <a:cs typeface="DM Sans Bold" pitchFamily="34" charset="-120"/>
-              </a:rPr>
-              <a:t>Data &amp; ML</a:t>
-            </a:r>
-            <a:r>
-              <a:rPr lang="en-US" sz="1450" dirty="0">
-                <a:solidFill>
-                  <a:srgbClr val="454240"/>
-                </a:solidFill>
-                <a:latin typeface="DM Sans" pitchFamily="34" charset="0"/>
-                <a:ea typeface="DM Sans" pitchFamily="34" charset="-122"/>
-                <a:cs typeface="DM Sans" pitchFamily="34" charset="-120"/>
-              </a:rPr>
-              <a:t> · Zhu Jianyu: data, risk, causes, SHAP</a:t>
-            </a:r>
-            <a:endParaRPr lang="en-US" sz="1450" dirty="0"/>
-          </a:p>
-        </p:txBody>
-      </p:sp>
-      <p:pic>
-        <p:nvPicPr>
-          <p:cNvPr id="19" name="Image 5" descr="preencoded.png"/>
-          <p:cNvPicPr>
-            <a:picLocks noChangeAspect="1"/>
-          </p:cNvPicPr>
-          <p:nvPr/>
-        </p:nvPicPr>
-        <p:blipFill>
-          <a:blip r:embed="rId5">
-            <a:extLst>
-              <a:ext uri="{96DAC541-7B7A-43D3-8B79-37D633B846F1}">
-                <asvg:svgBlip xmlns:asvg="http://schemas.microsoft.com/office/drawing/2016/SVG/main" r:embed="rId6"/>
-              </a:ext>
-            </a:extLst>
-          </a:blip>
-          <a:stretch>
-            <a:fillRect/>
-          </a:stretch>
-        </p:blipFill>
-        <p:spPr>
-          <a:xfrm>
-            <a:off x="6188515" y="4893171"/>
-            <a:ext cx="2565435" cy="1260475"/>
-          </a:xfrm>
-          <a:prstGeom prst="rect">
-            <a:avLst/>
-          </a:prstGeom>
-        </p:spPr>
-      </p:pic>
-      <p:sp>
-        <p:nvSpPr>
-          <p:cNvPr id="20" name="Text 12"/>
-          <p:cNvSpPr/>
-          <p:nvPr/>
-        </p:nvSpPr>
-        <p:spPr>
-          <a:xfrm>
-            <a:off x="6453721" y="4918571"/>
-            <a:ext cx="2300230" cy="907256"/>
-          </a:xfrm>
-          <a:prstGeom prst="rect">
-            <a:avLst/>
-          </a:prstGeom>
-          <a:noFill/>
-        </p:spPr>
-        <p:txBody>
-          <a:bodyPr wrap="square" lIns="0" tIns="0" rIns="0" bIns="0" rtlCol="0" anchor="t">
-            <a:normAutofit/>
-          </a:bodyPr>
-          <a:lstStyle/>
-          <a:p>
-            <a:pPr marL="0" indent="0" algn="l">
-              <a:lnSpc>
-                <a:spcPct val="133000"/>
-              </a:lnSpc>
-              <a:buNone/>
-            </a:pPr>
-            <a:r>
-              <a:rPr lang="en-US" sz="1450" b="1" dirty="0">
-                <a:solidFill>
-                  <a:srgbClr val="454240"/>
-                </a:solidFill>
-                <a:latin typeface="DM Sans Bold" pitchFamily="34" charset="0"/>
-                <a:ea typeface="DM Sans Bold" pitchFamily="34" charset="-122"/>
-                <a:cs typeface="DM Sans Bold" pitchFamily="34" charset="-120"/>
-              </a:rPr>
-              <a:t>Optimisation</a:t>
-            </a:r>
-            <a:r>
-              <a:rPr lang="en-US" sz="1450" dirty="0">
-                <a:solidFill>
-                  <a:srgbClr val="454240"/>
-                </a:solidFill>
-                <a:latin typeface="DM Sans" pitchFamily="34" charset="0"/>
-                <a:ea typeface="DM Sans" pitchFamily="34" charset="-122"/>
-                <a:cs typeface="DM Sans" pitchFamily="34" charset="-120"/>
-              </a:rPr>
-              <a:t> · Wang Lepeng: VRPTW, routes, dispatch</a:t>
-            </a:r>
-            <a:endParaRPr lang="en-US" sz="1450" dirty="0"/>
-          </a:p>
-        </p:txBody>
-      </p:sp>
-      <p:pic>
-        <p:nvPicPr>
-          <p:cNvPr id="21" name="Image 6" descr="preencoded.png"/>
-          <p:cNvPicPr>
-            <a:picLocks noChangeAspect="1"/>
-          </p:cNvPicPr>
-          <p:nvPr/>
-        </p:nvPicPr>
-        <p:blipFill>
-          <a:blip r:embed="rId5">
-            <a:extLst>
-              <a:ext uri="{96DAC541-7B7A-43D3-8B79-37D633B846F1}">
-                <asvg:svgBlip xmlns:asvg="http://schemas.microsoft.com/office/drawing/2016/SVG/main" r:embed="rId6"/>
-              </a:ext>
-            </a:extLst>
-          </a:blip>
-          <a:stretch>
-            <a:fillRect/>
-          </a:stretch>
-        </p:blipFill>
-        <p:spPr>
-          <a:xfrm>
-            <a:off x="8964785" y="4893171"/>
-            <a:ext cx="2565435" cy="1260475"/>
-          </a:xfrm>
-          <a:prstGeom prst="rect">
-            <a:avLst/>
-          </a:prstGeom>
-        </p:spPr>
-      </p:pic>
-      <p:sp>
-        <p:nvSpPr>
-          <p:cNvPr id="22" name="Text 13"/>
-          <p:cNvSpPr/>
-          <p:nvPr/>
-        </p:nvSpPr>
-        <p:spPr>
-          <a:xfrm>
-            <a:off x="9229990" y="4918571"/>
-            <a:ext cx="2300230" cy="1209675"/>
-          </a:xfrm>
-          <a:prstGeom prst="rect">
-            <a:avLst/>
-          </a:prstGeom>
-          <a:noFill/>
-        </p:spPr>
-        <p:txBody>
-          <a:bodyPr wrap="square" lIns="0" tIns="0" rIns="0" bIns="0" rtlCol="0" anchor="t">
-            <a:normAutofit/>
-          </a:bodyPr>
-          <a:lstStyle/>
-          <a:p>
-            <a:pPr marL="0" indent="0" algn="l">
-              <a:lnSpc>
-                <a:spcPct val="133000"/>
-              </a:lnSpc>
-              <a:buNone/>
-            </a:pPr>
-            <a:r>
-              <a:rPr lang="en-US" sz="1450" b="1" dirty="0">
-                <a:solidFill>
-                  <a:srgbClr val="454240"/>
-                </a:solidFill>
-                <a:latin typeface="DM Sans Bold" pitchFamily="34" charset="0"/>
-                <a:ea typeface="DM Sans Bold" pitchFamily="34" charset="-122"/>
-                <a:cs typeface="DM Sans Bold" pitchFamily="34" charset="-120"/>
-              </a:rPr>
-              <a:t>KG + QA + Frontend</a:t>
-            </a:r>
-            <a:r>
-              <a:rPr lang="en-US" sz="1450" dirty="0">
-                <a:solidFill>
-                  <a:srgbClr val="454240"/>
-                </a:solidFill>
-                <a:latin typeface="DM Sans" pitchFamily="34" charset="0"/>
-                <a:ea typeface="DM Sans" pitchFamily="34" charset="-122"/>
-                <a:cs typeface="DM Sans" pitchFamily="34" charset="-120"/>
-              </a:rPr>
-              <a:t> · Shen Ziyi: KG, QA, API, frontend</a:t>
-            </a:r>
-            <a:endParaRPr lang="en-US" sz="1450" dirty="0"/>
-          </a:p>
-        </p:txBody>
-      </p:sp>
-    </p:spTree>
-  </p:cSld>
-  <p:clrMapOvr>
-    <a:masterClrMapping/>
-  </p:clrMapOvr>
-</p:sld>
-</file>
-
-<file path=ppt/slides/slide13.xml><?xml version="1.0" encoding="utf-8"?>
+<file path=ppt/slides/slide10.xml><?xml version="1.0" encoding="utf-8"?>
 <p:sld xmlns:a="http://schemas.openxmlformats.org/drawingml/2006/main" xmlns:p="http://schemas.openxmlformats.org/presentationml/2006/main" xmlns:r="http://schemas.openxmlformats.org/officeDocument/2006/relationships">
   <p:cSld>
     <p:spTree>
@@ -2494,8 +1567,8 @@
         </p:nvSpPr>
         <p:spPr>
           <a:xfrm>
-            <a:off x="566928" y="384048"/>
-            <a:ext cx="11064240" cy="822960"/>
+            <a:off x="566928" y="365760"/>
+            <a:ext cx="11064240" cy="868680"/>
           </a:xfrm>
           <a:prstGeom prst="rect">
             <a:avLst/>
@@ -2509,12 +1582,15 @@
           <a:lstStyle/>
           <a:p>
             <a:r>
-              <a:rPr sz="3000" b="1">
-                <a:solidFill>
-                  <a:srgbClr val="1F2A37"/>
-                </a:solidFill>
-              </a:rPr>
-              <a:t>Where PharmaColdOps Sits</a:t>
+              <a:rPr sz="3700" b="0" i="0">
+                <a:solidFill>
+                  <a:srgbClr val="454240"/>
+                </a:solidFill>
+                <a:latin typeface="Libre Baskerville"/>
+                <a:ea typeface="Libre Baskerville"/>
+                <a:cs typeface="Libre Baskerville"/>
+              </a:rPr>
+              <a:t>Conclusion and Next Steps</a:t>
             </a:r>
           </a:p>
         </p:txBody>
@@ -2527,7 +1603,7 @@
         </p:nvSpPr>
         <p:spPr>
           <a:xfrm>
-            <a:off x="603504" y="1115568"/>
+            <a:off x="603504" y="1170432"/>
             <a:ext cx="11064240" cy="365760"/>
           </a:xfrm>
           <a:prstGeom prst="rect">
@@ -2542,87 +1618,68 @@
           <a:lstStyle/>
           <a:p>
             <a:r>
-              <a:rPr sz="1300">
-                <a:solidFill>
-                  <a:srgbClr val="0E6EA8"/>
-                </a:solidFill>
-              </a:rPr>
-              <a:t>Positioning · market context and related work</a:t>
-            </a:r>
-          </a:p>
-        </p:txBody>
-      </p:sp>
-      <p:sp>
-        <p:nvSpPr>
-          <p:cNvPr id="4" name="TextBox 3"/>
-          <p:cNvSpPr txBox="1"/>
-          <p:nvPr/>
-        </p:nvSpPr>
-        <p:spPr>
-          <a:xfrm>
-            <a:off x="566928" y="1600200"/>
-            <a:ext cx="11064240" cy="4572000"/>
-          </a:xfrm>
-          <a:prstGeom prst="rect">
-            <a:avLst/>
-          </a:prstGeom>
-          <a:noFill/>
-        </p:spPr>
-        <p:txBody>
-          <a:bodyPr wrap="square" anchor="t">
-            <a:normAutofit/>
-          </a:bodyPr>
-          <a:lstStyle/>
-          <a:p>
-            <a:pPr>
-              <a:spcAft>
-                <a:spcPts val="1400"/>
-              </a:spcAft>
-            </a:pPr>
-            <a:r>
-              <a:rPr sz="1700" b="0">
-                <a:solidFill>
-                  <a:srgbClr val="1F2A37"/>
-                </a:solidFill>
-              </a:rPr>
-              <a:t>● Commercial platforms already monitor temperature and automate parts of the quality process — we do not claim to be first.</a:t>
-            </a:r>
-          </a:p>
-          <a:p>
-            <a:pPr>
-              <a:spcAft>
-                <a:spcPts val="1400"/>
-              </a:spcAft>
-            </a:pPr>
-            <a:r>
-              <a:rPr sz="1700" b="0">
-                <a:solidFill>
-                  <a:srgbClr val="1F2A37"/>
-                </a:solidFill>
-              </a:rPr>
-              <a:t>● We build on existing foundations: Solomon's VRPTW benchmark, OR-Tools, gradient-boosted trees, SHAP.</a:t>
-            </a:r>
-          </a:p>
-          <a:p>
-            <a:pPr>
-              <a:spcAft>
-                <a:spcPts val="1400"/>
-              </a:spcAft>
-            </a:pPr>
-            <a:r>
-              <a:rPr sz="1700" b="0">
-                <a:solidFill>
-                  <a:srgbClr val="1F2A37"/>
-                </a:solidFill>
-              </a:rPr>
-              <a:t>● The gap we address is the unbroken, inspectable chain from event to disposition to order to route to cited evidence.</a:t>
-            </a:r>
-          </a:p>
-        </p:txBody>
-      </p:sp>
-      <p:sp>
-        <p:nvSpPr>
-          <p:cNvPr id="5" name="TextBox 4"/>
+              <a:rPr sz="1150" b="0" i="0">
+                <a:solidFill>
+                  <a:srgbClr val="5C4E3D"/>
+                </a:solidFill>
+                <a:latin typeface="DM Sans"/>
+                <a:ea typeface="DM Sans"/>
+                <a:cs typeface="DM Sans"/>
+              </a:rPr>
+              <a:t>What we commit to</a:t>
+            </a:r>
+          </a:p>
+        </p:txBody>
+      </p:sp>
+      <p:sp>
+        <p:nvSpPr>
+          <p:cNvPr id="4" name="Rectangle 3"/>
+          <p:cNvSpPr/>
+          <p:nvPr/>
+        </p:nvSpPr>
+        <p:spPr>
+          <a:xfrm>
+            <a:off x="566928" y="1097280"/>
+            <a:ext cx="2011680" cy="20320"/>
+          </a:xfrm>
+          <a:prstGeom prst="rect">
+            <a:avLst/>
+          </a:prstGeom>
+          <a:solidFill>
+            <a:srgbClr val="B88E23"/>
+          </a:solidFill>
+          <a:ln>
+            <a:noFill/>
+          </a:ln>
+          <a:effectLst/>
+        </p:spPr>
+        <p:style>
+          <a:lnRef idx="1">
+            <a:schemeClr val="accent1"/>
+          </a:lnRef>
+          <a:fillRef idx="3">
+            <a:schemeClr val="accent1"/>
+          </a:fillRef>
+          <a:effectRef idx="2">
+            <a:schemeClr val="accent1"/>
+          </a:effectRef>
+          <a:fontRef idx="minor">
+            <a:schemeClr val="lt1"/>
+          </a:fontRef>
+        </p:style>
+        <p:txBody>
+          <a:bodyPr rtlCol="0" anchor="ctr" wrap="square">
+            <a:normAutofit/>
+          </a:bodyPr>
+          <a:lstStyle/>
+          <a:p>
+            <a:pPr algn="ctr"/>
+          </a:p>
+        </p:txBody>
+      </p:sp>
+      <p:sp>
+        <p:nvSpPr>
+          <p:cNvPr id="6" name="TextBox 4"/>
           <p:cNvSpPr txBox="1"/>
           <p:nvPr/>
         </p:nvSpPr>
@@ -2643,375 +1700,22 @@
           <a:lstStyle/>
           <a:p>
             <a:r>
-              <a:rPr sz="1100" i="1">
-                <a:solidFill>
-                  <a:srgbClr val="505F6E"/>
-                </a:solidFill>
-              </a:rPr>
-              <a:t>Proposal §3.2–3.3 · Figure 1. Market value still requires user interviews and operational data.</a:t>
-            </a:r>
-          </a:p>
-        </p:txBody>
-      </p:sp>
-    </p:spTree>
-  </p:cSld>
-  <p:clrMapOvr>
-    <a:masterClrMapping/>
-  </p:clrMapOvr>
-</p:sld>
-</file>
-
-<file path=ppt/slides/slide14.xml><?xml version="1.0" encoding="utf-8"?>
-<p:sld xmlns:a="http://schemas.openxmlformats.org/drawingml/2006/main" xmlns:p="http://schemas.openxmlformats.org/presentationml/2006/main" xmlns:r="http://schemas.openxmlformats.org/officeDocument/2006/relationships">
-  <p:cSld>
-    <p:spTree>
-      <p:nvGrpSpPr>
-        <p:cNvPr id="1" name=""/>
-        <p:cNvGrpSpPr/>
-        <p:nvPr/>
-      </p:nvGrpSpPr>
-      <p:grpSpPr/>
-      <p:sp>
-        <p:nvSpPr>
-          <p:cNvPr id="2" name="TextBox 1"/>
-          <p:cNvSpPr txBox="1"/>
-          <p:nvPr/>
-        </p:nvSpPr>
-        <p:spPr>
-          <a:xfrm>
-            <a:off x="566928" y="384048"/>
-            <a:ext cx="11064240" cy="822960"/>
-          </a:xfrm>
-          <a:prstGeom prst="rect">
-            <a:avLst/>
-          </a:prstGeom>
-          <a:noFill/>
-        </p:spPr>
-        <p:txBody>
-          <a:bodyPr wrap="square" anchor="t">
-            <a:normAutofit/>
-          </a:bodyPr>
-          <a:lstStyle/>
-          <a:p>
-            <a:r>
-              <a:rPr sz="3000" b="1">
-                <a:solidFill>
-                  <a:srgbClr val="1F2A37"/>
-                </a:solidFill>
-              </a:rPr>
-              <a:t>Built and Running Today</a:t>
-            </a:r>
-          </a:p>
-        </p:txBody>
-      </p:sp>
-      <p:sp>
-        <p:nvSpPr>
-          <p:cNvPr id="3" name="TextBox 2"/>
-          <p:cNvSpPr txBox="1"/>
-          <p:nvPr/>
-        </p:nvSpPr>
-        <p:spPr>
-          <a:xfrm>
-            <a:off x="603504" y="1115568"/>
-            <a:ext cx="11064240" cy="365760"/>
-          </a:xfrm>
-          <a:prstGeom prst="rect">
-            <a:avLst/>
-          </a:prstGeom>
-          <a:noFill/>
-        </p:spPr>
-        <p:txBody>
-          <a:bodyPr wrap="square" anchor="t">
-            <a:normAutofit/>
-          </a:bodyPr>
-          <a:lstStyle/>
-          <a:p>
-            <a:r>
-              <a:rPr sz="1300">
-                <a:solidFill>
-                  <a:srgbClr val="0E6EA8"/>
-                </a:solidFill>
-              </a:rPr>
-              <a:t>Measured from the repository, 2026-09-27</a:t>
-            </a:r>
-          </a:p>
-        </p:txBody>
-      </p:sp>
-      <p:pic>
-        <p:nvPicPr>
-          <p:cNvPr id="4" name="Picture 3" descr="frontend_demo.png"/>
-          <p:cNvPicPr>
-            <a:picLocks noChangeAspect="1"/>
-          </p:cNvPicPr>
-          <p:nvPr/>
-        </p:nvPicPr>
-        <p:blipFill>
-          <a:blip r:embed="rId2"/>
-          <a:stretch>
-            <a:fillRect/>
-          </a:stretch>
-        </p:blipFill>
-        <p:spPr>
-          <a:xfrm>
-            <a:off x="566928" y="1600200"/>
-            <a:ext cx="6766560" cy="4954379"/>
-          </a:xfrm>
-          <a:prstGeom prst="rect">
-            <a:avLst/>
-          </a:prstGeom>
-        </p:spPr>
-      </p:pic>
-      <p:sp>
-        <p:nvSpPr>
-          <p:cNvPr id="6" name="TextBox 5"/>
-          <p:cNvSpPr txBox="1"/>
-          <p:nvPr/>
-        </p:nvSpPr>
-        <p:spPr>
-          <a:xfrm>
-            <a:off x="566928" y="6263640"/>
-            <a:ext cx="11064240" cy="365760"/>
-          </a:xfrm>
-          <a:prstGeom prst="rect">
-            <a:avLst/>
-          </a:prstGeom>
-          <a:noFill/>
-        </p:spPr>
-        <p:txBody>
-          <a:bodyPr wrap="square" anchor="t">
-            <a:normAutofit/>
-          </a:bodyPr>
-          <a:lstStyle/>
-          <a:p>
-            <a:r>
-              <a:rPr sz="1100" i="1">
-                <a:solidFill>
-                  <a:srgbClr val="505F6E"/>
-                </a:solidFill>
-              </a:rPr>
-              <a:t>Screenshot: the Vue client in API mode, 2026-09-27.</a:t>
-            </a:r>
-          </a:p>
-        </p:txBody>
-      </p:sp>
-      <p:sp>
-        <p:nvSpPr>
-          <p:cNvPr id="7" name="TextBox 6"/>
-          <p:cNvSpPr txBox="1"/>
-          <p:nvPr/>
-        </p:nvSpPr>
-        <p:spPr>
-          <a:xfrm>
-            <a:off x="7543800" y="1600200"/>
-            <a:ext cx="4114800" cy="4572000"/>
-          </a:xfrm>
-          <a:prstGeom prst="rect">
-            <a:avLst/>
-          </a:prstGeom>
-          <a:noFill/>
-        </p:spPr>
-        <p:txBody>
-          <a:bodyPr wrap="square" anchor="t">
-            <a:normAutofit/>
-          </a:bodyPr>
-          <a:lstStyle/>
-          <a:p>
-            <a:pPr>
-              <a:spcAft>
-                <a:spcPts val="900"/>
-              </a:spcAft>
-            </a:pPr>
-            <a:r>
-              <a:rPr sz="1300" b="0">
-                <a:solidFill>
-                  <a:srgbClr val="1F2A37"/>
-                </a:solidFill>
-              </a:rPr>
-              <a:t>● 23 HTTP endpoints, 13 of them dispatch operations.</a:t>
-            </a:r>
-          </a:p>
-          <a:p>
-            <a:pPr>
-              <a:spcAft>
-                <a:spcPts val="900"/>
-              </a:spcAft>
-            </a:pPr>
-            <a:r>
-              <a:rPr sz="1300" b="0">
-                <a:solidFill>
-                  <a:srgbClr val="1F2A37"/>
-                </a:solidFill>
-              </a:rPr>
-              <a:t>● One Vue 3 client, 23 components; EN/ZH and offline mode.</a:t>
-            </a:r>
-          </a:p>
-          <a:p>
-            <a:pPr>
-              <a:spcAft>
-                <a:spcPts val="900"/>
-              </a:spcAft>
-            </a:pPr>
-            <a:r>
-              <a:rPr sz="1300" b="0">
-                <a:solidFill>
-                  <a:srgbClr val="1F2A37"/>
-                </a:solidFill>
-              </a:rPr>
-              <a:t>● 25 archived cases; 56 dispatch operations persisted.</a:t>
-            </a:r>
-          </a:p>
-          <a:p>
-            <a:pPr>
-              <a:spcAft>
-                <a:spcPts val="900"/>
-              </a:spcAft>
-            </a:pPr>
-            <a:r>
-              <a:rPr sz="1300" b="0">
-                <a:solidFill>
-                  <a:srgbClr val="1F2A37"/>
-                </a:solidFill>
-              </a:rPr>
-              <a:t>● 305 test functions across 35 files.</a:t>
-            </a:r>
-          </a:p>
-          <a:p>
-            <a:pPr>
-              <a:spcAft>
-                <a:spcPts val="900"/>
-              </a:spcAft>
-            </a:pPr>
-            <a:r>
-              <a:rPr sz="1300" b="0">
-                <a:solidFill>
-                  <a:srgbClr val="1F2A37"/>
-                </a:solidFill>
-              </a:rPr>
-              <a:t>● Still missing: cloud deploy, de-duplication, destination pool.</a:t>
-            </a:r>
-          </a:p>
-        </p:txBody>
-      </p:sp>
-    </p:spTree>
-  </p:cSld>
-  <p:clrMapOvr>
-    <a:masterClrMapping/>
-  </p:clrMapOvr>
-</p:sld>
-</file>
-
-<file path=ppt/slides/slide15.xml><?xml version="1.0" encoding="utf-8"?>
-<p:sld xmlns:a="http://schemas.openxmlformats.org/drawingml/2006/main" xmlns:p="http://schemas.openxmlformats.org/presentationml/2006/main" xmlns:r="http://schemas.openxmlformats.org/officeDocument/2006/relationships">
-  <p:cSld>
-    <p:spTree>
-      <p:nvGrpSpPr>
-        <p:cNvPr id="1" name=""/>
-        <p:cNvGrpSpPr/>
-        <p:nvPr/>
-      </p:nvGrpSpPr>
-      <p:grpSpPr/>
-      <p:sp>
-        <p:nvSpPr>
-          <p:cNvPr id="2" name="TextBox 1"/>
-          <p:cNvSpPr txBox="1"/>
-          <p:nvPr/>
-        </p:nvSpPr>
-        <p:spPr>
-          <a:xfrm>
-            <a:off x="566928" y="384048"/>
-            <a:ext cx="11064240" cy="822960"/>
-          </a:xfrm>
-          <a:prstGeom prst="rect">
-            <a:avLst/>
-          </a:prstGeom>
-          <a:noFill/>
-        </p:spPr>
-        <p:txBody>
-          <a:bodyPr wrap="square" anchor="t">
-            <a:normAutofit/>
-          </a:bodyPr>
-          <a:lstStyle/>
-          <a:p>
-            <a:r>
-              <a:rPr sz="3000" b="1">
-                <a:solidFill>
-                  <a:srgbClr val="1F2A37"/>
-                </a:solidFill>
-              </a:rPr>
-              <a:t>Results So Far</a:t>
-            </a:r>
-          </a:p>
-        </p:txBody>
-      </p:sp>
-      <p:sp>
-        <p:nvSpPr>
-          <p:cNvPr id="3" name="TextBox 2"/>
-          <p:cNvSpPr txBox="1"/>
-          <p:nvPr/>
-        </p:nvSpPr>
-        <p:spPr>
-          <a:xfrm>
-            <a:off x="603504" y="1115568"/>
-            <a:ext cx="11064240" cy="365760"/>
-          </a:xfrm>
-          <a:prstGeom prst="rect">
-            <a:avLst/>
-          </a:prstGeom>
-          <a:noFill/>
-        </p:spPr>
-        <p:txBody>
-          <a:bodyPr wrap="square" anchor="t">
-            <a:normAutofit/>
-          </a:bodyPr>
-          <a:lstStyle/>
-          <a:p>
-            <a:r>
-              <a:rPr sz="1300">
-                <a:solidFill>
-                  <a:srgbClr val="0E6EA8"/>
-                </a:solidFill>
-              </a:rPr>
-              <a:t>Every number reproducible in the repo</a:t>
-            </a:r>
-          </a:p>
-        </p:txBody>
-      </p:sp>
-      <p:sp>
-        <p:nvSpPr>
-          <p:cNvPr id="5" name="TextBox 4"/>
-          <p:cNvSpPr txBox="1"/>
-          <p:nvPr/>
-        </p:nvSpPr>
-        <p:spPr>
-          <a:xfrm>
-            <a:off x="566928" y="6263640"/>
-            <a:ext cx="11064240" cy="365760"/>
-          </a:xfrm>
-          <a:prstGeom prst="rect">
-            <a:avLst/>
-          </a:prstGeom>
-          <a:noFill/>
-        </p:spPr>
-        <p:txBody>
-          <a:bodyPr wrap="square" anchor="t">
-            <a:normAutofit/>
-          </a:bodyPr>
-          <a:lstStyle/>
-          <a:p>
-            <a:r>
-              <a:rPr sz="1100" i="1">
-                <a:solidFill>
-                  <a:srgbClr val="505F6E"/>
-                </a:solidFill>
-              </a:rPr>
-              <a:t>Boundaries: suspected-synthetic data, single random split, time-bounded solver — these do not establish real-world or operational savings.</a:t>
-            </a:r>
-          </a:p>
-        </p:txBody>
-      </p:sp>
-      <p:sp>
-        <p:nvSpPr>
-          <p:cNvPr id="6" name="TextBox 5"/>
+              <a:rPr sz="1050" b="0" i="1">
+                <a:solidFill>
+                  <a:srgbClr val="5C4E3D"/>
+                </a:solidFill>
+                <a:latin typeface="DM Sans"/>
+                <a:ea typeface="DM Sans"/>
+                <a:cs typeface="DM Sans"/>
+              </a:rPr>
+              <a:t>Thank you — we are happy to take questions.</a:t>
+            </a:r>
+          </a:p>
+        </p:txBody>
+      </p:sp>
+      <p:sp>
+        <p:nvSpPr>
+          <p:cNvPr id="7" name="TextBox 3"/>
           <p:cNvSpPr txBox="1"/>
           <p:nvPr/>
         </p:nvSpPr>
@@ -3037,12 +1741,15 @@
               </a:spcAft>
             </a:pPr>
             <a:r>
-              <a:rPr sz="1700" b="0">
-                <a:solidFill>
-                  <a:srgbClr val="1F2A37"/>
-                </a:solidFill>
-              </a:rPr>
-              <a:t>● Engine vs human gold: 54/57 = 94.7%; scrap recall 33/33.</a:t>
+              <a:rPr sz="1700" b="0" i="0">
+                <a:solidFill>
+                  <a:srgbClr val="454240"/>
+                </a:solidFill>
+                <a:latin typeface="DM Sans"/>
+                <a:ea typeface="DM Sans"/>
+                <a:cs typeface="DM Sans"/>
+              </a:rPr>
+              <a:t>● The reasoning path exists and carries its own critique: rule-versus-judgement disagreement, a weak cause classifier, prototype thresholds.</a:t>
             </a:r>
           </a:p>
           <a:p>
@@ -3052,12 +1759,15 @@
               </a:spcAft>
             </a:pPr>
             <a:r>
-              <a:rPr sz="1700" b="0">
-                <a:solidFill>
-                  <a:srgbClr val="1F2A37"/>
-                </a:solidFill>
-              </a:rPr>
-              <a:t>● Annotator agreement κ = 0.6434 — below our 0.80 target.</a:t>
+              <a:rPr sz="1700" b="0" i="0">
+                <a:solidFill>
+                  <a:srgbClr val="454240"/>
+                </a:solidFill>
+                <a:latin typeface="DM Sans"/>
+                <a:ea typeface="DM Sans"/>
+                <a:cs typeface="DM Sans"/>
+              </a:rPr>
+              <a:t>● All four IRS technique groups are covered, against a requirement of three.</a:t>
             </a:r>
           </a:p>
           <a:p>
@@ -3067,12 +1777,15 @@
               </a:spcAft>
             </a:pPr>
             <a:r>
-              <a:rPr sz="1700" b="0">
-                <a:solidFill>
-                  <a:srgbClr val="1F2A37"/>
-                </a:solidFill>
-              </a:rPr>
-              <a:t>● Routing: 142.63 → 133.81 km (−6.19%, 0 violations); Solomon optima reached in 10 s.</a:t>
+              <a:rPr sz="1700" b="0" i="0">
+                <a:solidFill>
+                  <a:srgbClr val="454240"/>
+                </a:solidFill>
+                <a:latin typeface="DM Sans"/>
+                <a:ea typeface="DM Sans"/>
+                <a:cs typeface="DM Sans"/>
+              </a:rPr>
+              <a:t>● By 25 Oct: integrated acceptance with failure states, clean-environment reproduction, the two videos.</a:t>
             </a:r>
           </a:p>
           <a:p>
@@ -3082,103 +1795,22 @@
               </a:spcAft>
             </a:pPr>
             <a:r>
-              <a:rPr sz="1700" b="0">
-                <a:solidFill>
-                  <a:srgbClr val="1F2A37"/>
-                </a:solidFill>
-              </a:rPr>
-              <a:t>● Risk model: F1 0.691 / ROC-AUC 0.925; cause Top-1 0.143 is below the majority baseline and reported as such.</a:t>
-            </a:r>
-          </a:p>
-        </p:txBody>
-      </p:sp>
-    </p:spTree>
-  </p:cSld>
-  <p:clrMapOvr>
-    <a:masterClrMapping/>
-  </p:clrMapOvr>
-</p:sld>
-</file>
-
-<file path=ppt/slides/slide16.xml><?xml version="1.0" encoding="utf-8"?>
-<p:sld xmlns:a="http://schemas.openxmlformats.org/drawingml/2006/main" xmlns:p="http://schemas.openxmlformats.org/presentationml/2006/main" xmlns:r="http://schemas.openxmlformats.org/officeDocument/2006/relationships">
-  <p:cSld>
-    <p:spTree>
-      <p:nvGrpSpPr>
-        <p:cNvPr id="1" name=""/>
-        <p:cNvGrpSpPr/>
-        <p:nvPr/>
-      </p:nvGrpSpPr>
-      <p:grpSpPr/>
-      <p:sp>
-        <p:nvSpPr>
-          <p:cNvPr id="2" name="TextBox 1"/>
-          <p:cNvSpPr txBox="1"/>
-          <p:nvPr/>
-        </p:nvSpPr>
-        <p:spPr>
-          <a:xfrm>
-            <a:off x="566928" y="384048"/>
-            <a:ext cx="11064240" cy="822960"/>
-          </a:xfrm>
-          <a:prstGeom prst="rect">
-            <a:avLst/>
-          </a:prstGeom>
-          <a:noFill/>
-        </p:spPr>
-        <p:txBody>
-          <a:bodyPr wrap="square" anchor="t">
-            <a:normAutofit/>
-          </a:bodyPr>
-          <a:lstStyle/>
-          <a:p>
-            <a:r>
-              <a:rPr sz="3000" b="1">
-                <a:solidFill>
-                  <a:srgbClr val="1F2A37"/>
-                </a:solidFill>
-              </a:rPr>
-              <a:t>Conclusion and Next Steps</a:t>
-            </a:r>
-          </a:p>
-        </p:txBody>
-      </p:sp>
-      <p:sp>
-        <p:nvSpPr>
-          <p:cNvPr id="3" name="TextBox 2"/>
-          <p:cNvSpPr txBox="1"/>
-          <p:nvPr/>
-        </p:nvSpPr>
-        <p:spPr>
-          <a:xfrm>
-            <a:off x="603504" y="1115568"/>
-            <a:ext cx="11064240" cy="365760"/>
-          </a:xfrm>
-          <a:prstGeom prst="rect">
-            <a:avLst/>
-          </a:prstGeom>
-          <a:noFill/>
-        </p:spPr>
-        <p:txBody>
-          <a:bodyPr wrap="square" anchor="t">
-            <a:normAutofit/>
-          </a:bodyPr>
-          <a:lstStyle/>
-          <a:p>
-            <a:r>
-              <a:rPr sz="1300">
-                <a:solidFill>
-                  <a:srgbClr val="0E6EA8"/>
-                </a:solidFill>
-              </a:rPr>
-              <a:t>What we commit to</a:t>
-            </a:r>
-          </a:p>
-        </p:txBody>
-      </p:sp>
-      <p:sp>
-        <p:nvSpPr>
-          <p:cNvPr id="5" name="TextBox 4"/>
+              <a:rPr sz="1700" b="0" i="0">
+                <a:solidFill>
+                  <a:srgbClr val="454240"/>
+                </a:solidFill>
+                <a:latin typeface="DM Sans"/>
+                <a:ea typeface="DM Sans"/>
+                <a:cs typeface="DM Sans"/>
+              </a:rPr>
+              <a:t>● It does not replace the quality lead's approval, and does not authorise real product release, destruction or transport.</a:t>
+            </a:r>
+          </a:p>
+        </p:txBody>
+      </p:sp>
+      <p:sp>
+        <p:nvSpPr>
+          <p:cNvPr id="8" name="TextBox 4"/>
           <p:cNvSpPr txBox="1"/>
           <p:nvPr/>
         </p:nvSpPr>
@@ -3199,126 +1831,13 @@
           <a:lstStyle/>
           <a:p>
             <a:r>
-              <a:rPr sz="1100" i="1">
-                <a:solidFill>
-                  <a:srgbClr val="505F6E"/>
-                </a:solidFill>
-              </a:rPr>
-              <a:t>Thank you — we are happy to take questions.</a:t>
-            </a:r>
-          </a:p>
-        </p:txBody>
-      </p:sp>
-      <p:sp>
-        <p:nvSpPr>
-          <p:cNvPr id="6" name="TextBox 5"/>
-          <p:cNvSpPr txBox="1"/>
-          <p:nvPr/>
-        </p:nvSpPr>
-        <p:spPr>
-          <a:xfrm>
-            <a:off x="566928" y="1828800"/>
-            <a:ext cx="11064240" cy="4023360"/>
-          </a:xfrm>
-          <a:prstGeom prst="rect">
-            <a:avLst/>
-          </a:prstGeom>
-          <a:noFill/>
-        </p:spPr>
-        <p:txBody>
-          <a:bodyPr wrap="square" anchor="t">
-            <a:normAutofit/>
-          </a:bodyPr>
-          <a:lstStyle/>
-          <a:p>
-            <a:pPr>
-              <a:spcAft>
-                <a:spcPts val="1600"/>
-              </a:spcAft>
-            </a:pPr>
-            <a:r>
-              <a:rPr sz="1700" b="0">
-                <a:solidFill>
-                  <a:srgbClr val="1F2A37"/>
-                </a:solidFill>
-              </a:rPr>
-              <a:t>● The reasoning path exists and carries its own critique: rule-versus-judgement disagreement, a weak cause classifier, prototype thresholds.</a:t>
-            </a:r>
-          </a:p>
-          <a:p>
-            <a:pPr>
-              <a:spcAft>
-                <a:spcPts val="1600"/>
-              </a:spcAft>
-            </a:pPr>
-            <a:r>
-              <a:rPr sz="1700" b="0">
-                <a:solidFill>
-                  <a:srgbClr val="1F2A37"/>
-                </a:solidFill>
-              </a:rPr>
-              <a:t>● All four IRS technique groups are covered, against a requirement of three.</a:t>
-            </a:r>
-          </a:p>
-          <a:p>
-            <a:pPr>
-              <a:spcAft>
-                <a:spcPts val="1600"/>
-              </a:spcAft>
-            </a:pPr>
-            <a:r>
-              <a:rPr sz="1700" b="0">
-                <a:solidFill>
-                  <a:srgbClr val="1F2A37"/>
-                </a:solidFill>
-              </a:rPr>
-              <a:t>● By 25 Oct: integrated acceptance with failure states, clean-environment reproduction, the two videos.</a:t>
-            </a:r>
-          </a:p>
-          <a:p>
-            <a:pPr>
-              <a:spcAft>
-                <a:spcPts val="1600"/>
-              </a:spcAft>
-            </a:pPr>
-            <a:r>
-              <a:rPr sz="1700" b="0">
-                <a:solidFill>
-                  <a:srgbClr val="1F2A37"/>
-                </a:solidFill>
-              </a:rPr>
-              <a:t>● It does not replace the quality lead's approval, and does not authorise real product release, destruction or transport.</a:t>
-            </a:r>
-          </a:p>
-        </p:txBody>
-      </p:sp>
-      <p:sp>
-        <p:nvSpPr>
-          <p:cNvPr id="7" name="TextBox 6"/>
-          <p:cNvSpPr txBox="1"/>
-          <p:nvPr/>
-        </p:nvSpPr>
-        <p:spPr>
-          <a:xfrm>
-            <a:off x="566928" y="6263640"/>
-            <a:ext cx="11064240" cy="365760"/>
-          </a:xfrm>
-          <a:prstGeom prst="rect">
-            <a:avLst/>
-          </a:prstGeom>
-          <a:noFill/>
-        </p:spPr>
-        <p:txBody>
-          <a:bodyPr wrap="square" anchor="t">
-            <a:normAutofit/>
-          </a:bodyPr>
-          <a:lstStyle/>
-          <a:p>
-            <a:r>
-              <a:rPr sz="1100" i="1">
-                <a:solidFill>
-                  <a:srgbClr val="505F6E"/>
-                </a:solidFill>
+              <a:rPr sz="1050" b="0" i="1">
+                <a:solidFill>
+                  <a:srgbClr val="5C4E3D"/>
+                </a:solidFill>
+                <a:latin typeface="DM Sans"/>
+                <a:ea typeface="DM Sans"/>
+                <a:cs typeface="DM Sans"/>
               </a:rPr>
               <a:t>Thank you — we are happy to take questions.</a:t>
             </a:r>
@@ -3807,7 +2326,7 @@
 </p:sld>
 </file>
 
-<file path=ppt/slides/slide4.xml><?xml version="1.0" encoding="utf-8"?>
+<file path=ppt/slides/slide3.xml><?xml version="1.0" encoding="utf-8"?>
 <p:sld xmlns:a="http://schemas.openxmlformats.org/drawingml/2006/main" xmlns:r="http://schemas.openxmlformats.org/officeDocument/2006/relationships" xmlns:p="http://schemas.openxmlformats.org/presentationml/2006/main">
   <p:cSld>
     <p:spTree>
@@ -4317,7 +2836,7 @@
 </p:sld>
 </file>
 
-<file path=ppt/slides/slide5.xml><?xml version="1.0" encoding="utf-8"?>
+<file path=ppt/slides/slide4.xml><?xml version="1.0" encoding="utf-8"?>
 <p:sld xmlns:a="http://schemas.openxmlformats.org/drawingml/2006/main" xmlns:r="http://schemas.openxmlformats.org/officeDocument/2006/relationships" xmlns:p="http://schemas.openxmlformats.org/presentationml/2006/main">
   <p:cSld>
     <p:spTree>
@@ -5058,6 +3577,1515 @@
 </p:sld>
 </file>
 
+<file path=ppt/slides/slide5.xml><?xml version="1.0" encoding="utf-8"?>
+<p:sld xmlns:a="http://schemas.openxmlformats.org/drawingml/2006/main" xmlns:p="http://schemas.openxmlformats.org/presentationml/2006/main" xmlns:r="http://schemas.openxmlformats.org/officeDocument/2006/relationships">
+  <p:cSld>
+    <p:spTree>
+      <p:nvGrpSpPr>
+        <p:cNvPr id="1" name=""/>
+        <p:cNvGrpSpPr/>
+        <p:nvPr/>
+      </p:nvGrpSpPr>
+      <p:grpSpPr/>
+      <p:sp>
+        <p:nvSpPr>
+          <p:cNvPr id="2" name="TextBox 1"/>
+          <p:cNvSpPr txBox="1"/>
+          <p:nvPr/>
+        </p:nvSpPr>
+        <p:spPr>
+          <a:xfrm>
+            <a:off x="566928" y="365760"/>
+            <a:ext cx="11064240" cy="868680"/>
+          </a:xfrm>
+          <a:prstGeom prst="rect">
+            <a:avLst/>
+          </a:prstGeom>
+          <a:noFill/>
+        </p:spPr>
+        <p:txBody>
+          <a:bodyPr wrap="square" anchor="t">
+            <a:normAutofit/>
+          </a:bodyPr>
+          <a:lstStyle/>
+          <a:p>
+            <a:r>
+              <a:rPr sz="3700" b="0" i="0">
+                <a:solidFill>
+                  <a:srgbClr val="454240"/>
+                </a:solidFill>
+                <a:latin typeface="Libre Baskerville"/>
+                <a:ea typeface="Libre Baskerville"/>
+                <a:cs typeface="Libre Baskerville"/>
+              </a:rPr>
+              <a:t>Where PharmaColdOps Sits</a:t>
+            </a:r>
+          </a:p>
+        </p:txBody>
+      </p:sp>
+      <p:sp>
+        <p:nvSpPr>
+          <p:cNvPr id="3" name="TextBox 2"/>
+          <p:cNvSpPr txBox="1"/>
+          <p:nvPr/>
+        </p:nvSpPr>
+        <p:spPr>
+          <a:xfrm>
+            <a:off x="603504" y="1170432"/>
+            <a:ext cx="11064240" cy="365760"/>
+          </a:xfrm>
+          <a:prstGeom prst="rect">
+            <a:avLst/>
+          </a:prstGeom>
+          <a:noFill/>
+        </p:spPr>
+        <p:txBody>
+          <a:bodyPr wrap="square" anchor="t">
+            <a:normAutofit/>
+          </a:bodyPr>
+          <a:lstStyle/>
+          <a:p>
+            <a:r>
+              <a:rPr sz="1150" b="0" i="0">
+                <a:solidFill>
+                  <a:srgbClr val="5C4E3D"/>
+                </a:solidFill>
+                <a:latin typeface="DM Sans"/>
+                <a:ea typeface="DM Sans"/>
+                <a:cs typeface="DM Sans"/>
+              </a:rPr>
+              <a:t>Positioning · market context and related work</a:t>
+            </a:r>
+          </a:p>
+        </p:txBody>
+      </p:sp>
+      <p:sp>
+        <p:nvSpPr>
+          <p:cNvPr id="4" name="Rectangle 3"/>
+          <p:cNvSpPr/>
+          <p:nvPr/>
+        </p:nvSpPr>
+        <p:spPr>
+          <a:xfrm>
+            <a:off x="566928" y="1097280"/>
+            <a:ext cx="2011680" cy="20320"/>
+          </a:xfrm>
+          <a:prstGeom prst="rect">
+            <a:avLst/>
+          </a:prstGeom>
+          <a:solidFill>
+            <a:srgbClr val="B88E23"/>
+          </a:solidFill>
+          <a:ln>
+            <a:noFill/>
+          </a:ln>
+          <a:effectLst/>
+        </p:spPr>
+        <p:style>
+          <a:lnRef idx="1">
+            <a:schemeClr val="accent1"/>
+          </a:lnRef>
+          <a:fillRef idx="3">
+            <a:schemeClr val="accent1"/>
+          </a:fillRef>
+          <a:effectRef idx="2">
+            <a:schemeClr val="accent1"/>
+          </a:effectRef>
+          <a:fontRef idx="minor">
+            <a:schemeClr val="lt1"/>
+          </a:fontRef>
+        </p:style>
+        <p:txBody>
+          <a:bodyPr rtlCol="0" anchor="ctr" wrap="square">
+            <a:normAutofit/>
+          </a:bodyPr>
+          <a:lstStyle/>
+          <a:p>
+            <a:pPr algn="ctr"/>
+          </a:p>
+        </p:txBody>
+      </p:sp>
+      <p:sp>
+        <p:nvSpPr>
+          <p:cNvPr id="5" name="TextBox 3"/>
+          <p:cNvSpPr txBox="1"/>
+          <p:nvPr/>
+        </p:nvSpPr>
+        <p:spPr>
+          <a:xfrm>
+            <a:off x="566928" y="1600200"/>
+            <a:ext cx="11064240" cy="4572000"/>
+          </a:xfrm>
+          <a:prstGeom prst="rect">
+            <a:avLst/>
+          </a:prstGeom>
+          <a:noFill/>
+        </p:spPr>
+        <p:txBody>
+          <a:bodyPr wrap="square" anchor="t">
+            <a:normAutofit/>
+          </a:bodyPr>
+          <a:lstStyle/>
+          <a:p>
+            <a:pPr>
+              <a:spcAft>
+                <a:spcPts val="1400"/>
+              </a:spcAft>
+            </a:pPr>
+            <a:r>
+              <a:rPr sz="1700" b="0" i="0">
+                <a:solidFill>
+                  <a:srgbClr val="454240"/>
+                </a:solidFill>
+                <a:latin typeface="DM Sans"/>
+                <a:ea typeface="DM Sans"/>
+                <a:cs typeface="DM Sans"/>
+              </a:rPr>
+              <a:t>● Commercial platforms already monitor temperature and automate parts of the quality process — we do not claim to be first.</a:t>
+            </a:r>
+          </a:p>
+          <a:p>
+            <a:pPr>
+              <a:spcAft>
+                <a:spcPts val="1400"/>
+              </a:spcAft>
+            </a:pPr>
+            <a:r>
+              <a:rPr sz="1700" b="0" i="0">
+                <a:solidFill>
+                  <a:srgbClr val="454240"/>
+                </a:solidFill>
+                <a:latin typeface="DM Sans"/>
+                <a:ea typeface="DM Sans"/>
+                <a:cs typeface="DM Sans"/>
+              </a:rPr>
+              <a:t>● We build on existing foundations: Solomon's VRPTW benchmark, OR-Tools, gradient-boosted trees, SHAP.</a:t>
+            </a:r>
+          </a:p>
+          <a:p>
+            <a:pPr>
+              <a:spcAft>
+                <a:spcPts val="1400"/>
+              </a:spcAft>
+            </a:pPr>
+            <a:r>
+              <a:rPr sz="1700" b="0" i="0">
+                <a:solidFill>
+                  <a:srgbClr val="454240"/>
+                </a:solidFill>
+                <a:latin typeface="DM Sans"/>
+                <a:ea typeface="DM Sans"/>
+                <a:cs typeface="DM Sans"/>
+              </a:rPr>
+              <a:t>● The gap we address is the unbroken, inspectable chain from event to disposition to order to route to cited evidence.</a:t>
+            </a:r>
+          </a:p>
+        </p:txBody>
+      </p:sp>
+      <p:sp>
+        <p:nvSpPr>
+          <p:cNvPr id="6" name="TextBox 4"/>
+          <p:cNvSpPr txBox="1"/>
+          <p:nvPr/>
+        </p:nvSpPr>
+        <p:spPr>
+          <a:xfrm>
+            <a:off x="566928" y="6263640"/>
+            <a:ext cx="11064240" cy="365760"/>
+          </a:xfrm>
+          <a:prstGeom prst="rect">
+            <a:avLst/>
+          </a:prstGeom>
+          <a:noFill/>
+        </p:spPr>
+        <p:txBody>
+          <a:bodyPr wrap="square" anchor="t">
+            <a:normAutofit/>
+          </a:bodyPr>
+          <a:lstStyle/>
+          <a:p>
+            <a:r>
+              <a:rPr sz="1050" b="0" i="1">
+                <a:solidFill>
+                  <a:srgbClr val="5C4E3D"/>
+                </a:solidFill>
+                <a:latin typeface="DM Sans"/>
+                <a:ea typeface="DM Sans"/>
+                <a:cs typeface="DM Sans"/>
+              </a:rPr>
+              <a:t>Proposal §3.2–3.3 · Figure 1. Market value still requires user interviews and operational data.</a:t>
+            </a:r>
+          </a:p>
+        </p:txBody>
+      </p:sp>
+    </p:spTree>
+  </p:cSld>
+  <p:clrMapOvr>
+    <a:masterClrMapping/>
+  </p:clrMapOvr>
+</p:sld>
+</file>
+
+<file path=ppt/slides/slide6.xml><?xml version="1.0" encoding="utf-8"?>
+<p:sld xmlns:a="http://schemas.openxmlformats.org/drawingml/2006/main" xmlns:r="http://schemas.openxmlformats.org/officeDocument/2006/relationships" xmlns:p="http://schemas.openxmlformats.org/presentationml/2006/main">
+  <p:cSld>
+    <p:spTree>
+      <p:nvGrpSpPr>
+        <p:cNvPr id="1" name=""/>
+        <p:cNvGrpSpPr/>
+        <p:nvPr/>
+      </p:nvGrpSpPr>
+      <p:grpSpPr>
+        <a:xfrm>
+          <a:off x="0" y="0"/>
+          <a:ext cx="0" cy="0"/>
+          <a:chOff x="0" y="0"/>
+          <a:chExt cx="0" cy="0"/>
+        </a:xfrm>
+      </p:grpSpPr>
+      <p:sp>
+        <p:nvSpPr>
+          <p:cNvPr id="2" name="Text 0"/>
+          <p:cNvSpPr/>
+          <p:nvPr/>
+        </p:nvSpPr>
+        <p:spPr>
+          <a:xfrm>
+            <a:off x="661475" y="841970"/>
+            <a:ext cx="10868745" cy="590649"/>
+          </a:xfrm>
+          <a:prstGeom prst="rect">
+            <a:avLst/>
+          </a:prstGeom>
+          <a:noFill/>
+        </p:spPr>
+        <p:txBody>
+          <a:bodyPr wrap="square" lIns="0" tIns="0" rIns="0" bIns="0" rtlCol="0" anchor="t">
+            <a:normAutofit/>
+          </a:bodyPr>
+          <a:lstStyle/>
+          <a:p>
+            <a:pPr marL="0" indent="0" algn="l">
+              <a:lnSpc>
+                <a:spcPct val="104000"/>
+              </a:lnSpc>
+              <a:buNone/>
+            </a:pPr>
+            <a:r>
+              <a:rPr lang="en-US" sz="3700" dirty="0">
+                <a:solidFill>
+                  <a:srgbClr val="5C4E3D"/>
+                </a:solidFill>
+                <a:latin typeface="Libre Baskerville" panose="02000000000000000000" pitchFamily="34" charset="0"/>
+                <a:ea typeface="Libre Baskerville" panose="02000000000000000000" pitchFamily="34" charset="-122"/>
+                <a:cs typeface="Libre Baskerville" panose="02000000000000000000" pitchFamily="34" charset="-120"/>
+              </a:rPr>
+              <a:t>Data: Verifiable, Disclosed Provenance</a:t>
+            </a:r>
+            <a:endParaRPr lang="en-US" sz="3700" dirty="0"/>
+          </a:p>
+        </p:txBody>
+      </p:sp>
+      <p:pic>
+        <p:nvPicPr>
+          <p:cNvPr id="3" name="Image 0" descr="preencoded.png"/>
+          <p:cNvPicPr>
+            <a:picLocks noChangeAspect="1"/>
+          </p:cNvPicPr>
+          <p:nvPr/>
+        </p:nvPicPr>
+        <p:blipFill>
+          <a:blip r:embed="rId1">
+            <a:extLst>
+              <a:ext uri="{96DAC541-7B7A-43D3-8B79-37D633B846F1}">
+                <asvg:svgBlip xmlns:asvg="http://schemas.microsoft.com/office/drawing/2016/SVG/main" r:embed="rId2"/>
+              </a:ext>
+            </a:extLst>
+          </a:blip>
+          <a:stretch>
+            <a:fillRect/>
+          </a:stretch>
+        </p:blipFill>
+        <p:spPr>
+          <a:xfrm>
+            <a:off x="661475" y="1810643"/>
+            <a:ext cx="472468" cy="472480"/>
+          </a:xfrm>
+          <a:prstGeom prst="rect">
+            <a:avLst/>
+          </a:prstGeom>
+        </p:spPr>
+      </p:pic>
+      <p:sp>
+        <p:nvSpPr>
+          <p:cNvPr id="4" name="Text 1"/>
+          <p:cNvSpPr/>
+          <p:nvPr/>
+        </p:nvSpPr>
+        <p:spPr>
+          <a:xfrm>
+            <a:off x="1370177" y="1810643"/>
+            <a:ext cx="2756724" cy="590550"/>
+          </a:xfrm>
+          <a:prstGeom prst="rect">
+            <a:avLst/>
+          </a:prstGeom>
+          <a:noFill/>
+        </p:spPr>
+        <p:txBody>
+          <a:bodyPr wrap="square" lIns="0" tIns="0" rIns="0" bIns="0" rtlCol="0" anchor="t">
+            <a:normAutofit/>
+          </a:bodyPr>
+          <a:lstStyle/>
+          <a:p>
+            <a:pPr marL="0" indent="0" algn="l">
+              <a:lnSpc>
+                <a:spcPct val="104000"/>
+              </a:lnSpc>
+              <a:buNone/>
+            </a:pPr>
+            <a:r>
+              <a:rPr lang="en-US" sz="1850" dirty="0">
+                <a:solidFill>
+                  <a:srgbClr val="454240"/>
+                </a:solidFill>
+                <a:latin typeface="Libre Baskerville" panose="02000000000000000000" pitchFamily="34" charset="0"/>
+                <a:ea typeface="Libre Baskerville" panose="02000000000000000000" pitchFamily="34" charset="-122"/>
+                <a:cs typeface="Libre Baskerville" panose="02000000000000000000" pitchFamily="34" charset="-120"/>
+              </a:rPr>
+              <a:t>Cold Chain Silent Failure (Kaggle)</a:t>
+            </a:r>
+            <a:endParaRPr lang="en-US" sz="1850" dirty="0"/>
+          </a:p>
+        </p:txBody>
+      </p:sp>
+      <p:sp>
+        <p:nvSpPr>
+          <p:cNvPr id="5" name="Text 2"/>
+          <p:cNvSpPr/>
+          <p:nvPr/>
+        </p:nvSpPr>
+        <p:spPr>
+          <a:xfrm>
+            <a:off x="1370177" y="2514600"/>
+            <a:ext cx="2756724" cy="907256"/>
+          </a:xfrm>
+          <a:prstGeom prst="rect">
+            <a:avLst/>
+          </a:prstGeom>
+          <a:noFill/>
+        </p:spPr>
+        <p:txBody>
+          <a:bodyPr wrap="square" lIns="0" tIns="0" rIns="0" bIns="0" rtlCol="0" anchor="t">
+            <a:normAutofit/>
+          </a:bodyPr>
+          <a:lstStyle/>
+          <a:p>
+            <a:pPr marL="0" indent="0" algn="l">
+              <a:lnSpc>
+                <a:spcPct val="133000"/>
+              </a:lnSpc>
+              <a:buNone/>
+            </a:pPr>
+            <a:r>
+              <a:rPr lang="en-US" sz="1450" dirty="0">
+                <a:solidFill>
+                  <a:srgbClr val="454240"/>
+                </a:solidFill>
+                <a:latin typeface="DM Sans" pitchFamily="34" charset="0"/>
+                <a:ea typeface="DM Sans" pitchFamily="34" charset="-122"/>
+                <a:cs typeface="DM Sans" pitchFamily="34" charset="-120"/>
+              </a:rPr>
+              <a:t>≈8,000 rows — failure classification.</a:t>
+            </a:r>
+            <a:endParaRPr lang="en-US" sz="1450" dirty="0"/>
+          </a:p>
+        </p:txBody>
+      </p:sp>
+      <p:pic>
+        <p:nvPicPr>
+          <p:cNvPr id="6" name="Image 1" descr="preencoded.png"/>
+          <p:cNvPicPr>
+            <a:picLocks noChangeAspect="1"/>
+          </p:cNvPicPr>
+          <p:nvPr/>
+        </p:nvPicPr>
+        <p:blipFill>
+          <a:blip r:embed="rId3">
+            <a:extLst>
+              <a:ext uri="{96DAC541-7B7A-43D3-8B79-37D633B846F1}">
+                <asvg:svgBlip xmlns:asvg="http://schemas.microsoft.com/office/drawing/2016/SVG/main" r:embed="rId4"/>
+              </a:ext>
+            </a:extLst>
+          </a:blip>
+          <a:stretch>
+            <a:fillRect/>
+          </a:stretch>
+        </p:blipFill>
+        <p:spPr>
+          <a:xfrm>
+            <a:off x="4363135" y="1810643"/>
+            <a:ext cx="472468" cy="472480"/>
+          </a:xfrm>
+          <a:prstGeom prst="rect">
+            <a:avLst/>
+          </a:prstGeom>
+        </p:spPr>
+      </p:pic>
+      <p:sp>
+        <p:nvSpPr>
+          <p:cNvPr id="7" name="Text 3"/>
+          <p:cNvSpPr/>
+          <p:nvPr/>
+        </p:nvSpPr>
+        <p:spPr>
+          <a:xfrm>
+            <a:off x="5071836" y="1810643"/>
+            <a:ext cx="2756724" cy="590550"/>
+          </a:xfrm>
+          <a:prstGeom prst="rect">
+            <a:avLst/>
+          </a:prstGeom>
+          <a:noFill/>
+        </p:spPr>
+        <p:txBody>
+          <a:bodyPr wrap="square" lIns="0" tIns="0" rIns="0" bIns="0" rtlCol="0" anchor="t">
+            <a:normAutofit/>
+          </a:bodyPr>
+          <a:lstStyle/>
+          <a:p>
+            <a:pPr marL="0" indent="0" algn="l">
+              <a:lnSpc>
+                <a:spcPct val="104000"/>
+              </a:lnSpc>
+              <a:buNone/>
+            </a:pPr>
+            <a:r>
+              <a:rPr lang="en-US" sz="1850" dirty="0">
+                <a:solidFill>
+                  <a:srgbClr val="454240"/>
+                </a:solidFill>
+                <a:latin typeface="Libre Baskerville" panose="02000000000000000000" pitchFamily="34" charset="0"/>
+                <a:ea typeface="Libre Baskerville" panose="02000000000000000000" pitchFamily="34" charset="-122"/>
+                <a:cs typeface="Libre Baskerville" panose="02000000000000000000" pitchFamily="34" charset="-120"/>
+              </a:rPr>
+              <a:t>Vaccine Distribution w/ Temp Logging (Kaggle)</a:t>
+            </a:r>
+            <a:endParaRPr lang="en-US" sz="1850" dirty="0"/>
+          </a:p>
+        </p:txBody>
+      </p:sp>
+      <p:sp>
+        <p:nvSpPr>
+          <p:cNvPr id="8" name="Text 4"/>
+          <p:cNvSpPr/>
+          <p:nvPr/>
+        </p:nvSpPr>
+        <p:spPr>
+          <a:xfrm>
+            <a:off x="5071836" y="2514600"/>
+            <a:ext cx="2756724" cy="1209675"/>
+          </a:xfrm>
+          <a:prstGeom prst="rect">
+            <a:avLst/>
+          </a:prstGeom>
+          <a:noFill/>
+        </p:spPr>
+        <p:txBody>
+          <a:bodyPr wrap="square" lIns="0" tIns="0" rIns="0" bIns="0" rtlCol="0" anchor="t">
+            <a:normAutofit/>
+          </a:bodyPr>
+          <a:lstStyle/>
+          <a:p>
+            <a:pPr marL="0" indent="0" algn="l">
+              <a:lnSpc>
+                <a:spcPct val="133000"/>
+              </a:lnSpc>
+              <a:buNone/>
+            </a:pPr>
+            <a:r>
+              <a:rPr lang="en-US" sz="1450" dirty="0">
+                <a:solidFill>
+                  <a:srgbClr val="454240"/>
+                </a:solidFill>
+                <a:latin typeface="DM Sans" pitchFamily="34" charset="0"/>
+                <a:ea typeface="DM Sans" pitchFamily="34" charset="-122"/>
+                <a:cs typeface="DM Sans" pitchFamily="34" charset="-120"/>
+              </a:rPr>
+              <a:t>≈26,700 rows — sequence and MKT work.</a:t>
+            </a:r>
+            <a:endParaRPr lang="en-US" sz="1450" dirty="0"/>
+          </a:p>
+        </p:txBody>
+      </p:sp>
+      <p:pic>
+        <p:nvPicPr>
+          <p:cNvPr id="9" name="Image 2" descr="preencoded.png"/>
+          <p:cNvPicPr>
+            <a:picLocks noChangeAspect="1"/>
+          </p:cNvPicPr>
+          <p:nvPr/>
+        </p:nvPicPr>
+        <p:blipFill>
+          <a:blip r:embed="rId5">
+            <a:extLst>
+              <a:ext uri="{96DAC541-7B7A-43D3-8B79-37D633B846F1}">
+                <asvg:svgBlip xmlns:asvg="http://schemas.microsoft.com/office/drawing/2016/SVG/main" r:embed="rId6"/>
+              </a:ext>
+            </a:extLst>
+          </a:blip>
+          <a:stretch>
+            <a:fillRect/>
+          </a:stretch>
+        </p:blipFill>
+        <p:spPr>
+          <a:xfrm>
+            <a:off x="8064794" y="1810643"/>
+            <a:ext cx="472468" cy="472480"/>
+          </a:xfrm>
+          <a:prstGeom prst="rect">
+            <a:avLst/>
+          </a:prstGeom>
+        </p:spPr>
+      </p:pic>
+      <p:sp>
+        <p:nvSpPr>
+          <p:cNvPr id="10" name="Text 5"/>
+          <p:cNvSpPr/>
+          <p:nvPr/>
+        </p:nvSpPr>
+        <p:spPr>
+          <a:xfrm>
+            <a:off x="8773496" y="1810643"/>
+            <a:ext cx="2756724" cy="590550"/>
+          </a:xfrm>
+          <a:prstGeom prst="rect">
+            <a:avLst/>
+          </a:prstGeom>
+          <a:noFill/>
+        </p:spPr>
+        <p:txBody>
+          <a:bodyPr wrap="square" lIns="0" tIns="0" rIns="0" bIns="0" rtlCol="0" anchor="t">
+            <a:normAutofit/>
+          </a:bodyPr>
+          <a:lstStyle/>
+          <a:p>
+            <a:pPr marL="0" indent="0" algn="l">
+              <a:lnSpc>
+                <a:spcPct val="104000"/>
+              </a:lnSpc>
+              <a:buNone/>
+            </a:pPr>
+            <a:r>
+              <a:rPr lang="en-US" sz="1850" dirty="0">
+                <a:solidFill>
+                  <a:srgbClr val="454240"/>
+                </a:solidFill>
+                <a:latin typeface="Libre Baskerville" panose="02000000000000000000" pitchFamily="34" charset="0"/>
+                <a:ea typeface="Libre Baskerville" panose="02000000000000000000" pitchFamily="34" charset="-122"/>
+                <a:cs typeface="Libre Baskerville" panose="02000000000000000000" pitchFamily="34" charset="-120"/>
+              </a:rPr>
+              <a:t>Electric Sheep Africa Dataset</a:t>
+            </a:r>
+            <a:endParaRPr lang="en-US" sz="1850" dirty="0"/>
+          </a:p>
+        </p:txBody>
+      </p:sp>
+      <p:sp>
+        <p:nvSpPr>
+          <p:cNvPr id="11" name="Text 6"/>
+          <p:cNvSpPr/>
+          <p:nvPr/>
+        </p:nvSpPr>
+        <p:spPr>
+          <a:xfrm>
+            <a:off x="8773496" y="2514600"/>
+            <a:ext cx="2756724" cy="1209675"/>
+          </a:xfrm>
+          <a:prstGeom prst="rect">
+            <a:avLst/>
+          </a:prstGeom>
+          <a:noFill/>
+        </p:spPr>
+        <p:txBody>
+          <a:bodyPr wrap="square" lIns="0" tIns="0" rIns="0" bIns="0" rtlCol="0" anchor="t">
+            <a:normAutofit/>
+          </a:bodyPr>
+          <a:lstStyle/>
+          <a:p>
+            <a:pPr marL="0" indent="0" algn="l">
+              <a:lnSpc>
+                <a:spcPct val="133000"/>
+              </a:lnSpc>
+              <a:buNone/>
+            </a:pPr>
+            <a:r>
+              <a:rPr lang="en-US" sz="1450" dirty="0">
+                <a:solidFill>
+                  <a:srgbClr val="454240"/>
+                </a:solidFill>
+                <a:latin typeface="DM Sans" pitchFamily="34" charset="0"/>
+                <a:ea typeface="DM Sans" pitchFamily="34" charset="-122"/>
+                <a:cs typeface="DM Sans" pitchFamily="34" charset="-120"/>
+              </a:rPr>
+              <a:t>Simulated facility-monthly records.</a:t>
+            </a:r>
+            <a:endParaRPr lang="en-US" sz="1450" dirty="0"/>
+          </a:p>
+        </p:txBody>
+      </p:sp>
+      <p:pic>
+        <p:nvPicPr>
+          <p:cNvPr id="12" name="Image 3" descr="preencoded.png"/>
+          <p:cNvPicPr>
+            <a:picLocks noChangeAspect="1"/>
+          </p:cNvPicPr>
+          <p:nvPr/>
+        </p:nvPicPr>
+        <p:blipFill>
+          <a:blip r:embed="rId7">
+            <a:extLst>
+              <a:ext uri="{96DAC541-7B7A-43D3-8B79-37D633B846F1}">
+                <asvg:svgBlip xmlns:asvg="http://schemas.microsoft.com/office/drawing/2016/SVG/main" r:embed="rId8"/>
+              </a:ext>
+            </a:extLst>
+          </a:blip>
+          <a:stretch>
+            <a:fillRect/>
+          </a:stretch>
+        </p:blipFill>
+        <p:spPr>
+          <a:xfrm>
+            <a:off x="661475" y="4102298"/>
+            <a:ext cx="472468" cy="472480"/>
+          </a:xfrm>
+          <a:prstGeom prst="rect">
+            <a:avLst/>
+          </a:prstGeom>
+        </p:spPr>
+      </p:pic>
+      <p:sp>
+        <p:nvSpPr>
+          <p:cNvPr id="13" name="Text 7"/>
+          <p:cNvSpPr/>
+          <p:nvPr/>
+        </p:nvSpPr>
+        <p:spPr>
+          <a:xfrm>
+            <a:off x="1370177" y="4102298"/>
+            <a:ext cx="2756724" cy="590550"/>
+          </a:xfrm>
+          <a:prstGeom prst="rect">
+            <a:avLst/>
+          </a:prstGeom>
+          <a:noFill/>
+        </p:spPr>
+        <p:txBody>
+          <a:bodyPr wrap="square" lIns="0" tIns="0" rIns="0" bIns="0" rtlCol="0" anchor="t">
+            <a:normAutofit/>
+          </a:bodyPr>
+          <a:lstStyle/>
+          <a:p>
+            <a:pPr marL="0" indent="0" algn="l">
+              <a:lnSpc>
+                <a:spcPct val="104000"/>
+              </a:lnSpc>
+              <a:buNone/>
+            </a:pPr>
+            <a:r>
+              <a:rPr lang="en-US" sz="1850" dirty="0">
+                <a:solidFill>
+                  <a:srgbClr val="454240"/>
+                </a:solidFill>
+                <a:latin typeface="Libre Baskerville" panose="02000000000000000000" pitchFamily="34" charset="0"/>
+                <a:ea typeface="Libre Baskerville" panose="02000000000000000000" pitchFamily="34" charset="-122"/>
+                <a:cs typeface="Libre Baskerville" panose="02000000000000000000" pitchFamily="34" charset="-120"/>
+              </a:rPr>
+              <a:t>CVRPLIB Benchmarks</a:t>
+            </a:r>
+            <a:endParaRPr lang="en-US" sz="1850" dirty="0"/>
+          </a:p>
+        </p:txBody>
+      </p:sp>
+      <p:sp>
+        <p:nvSpPr>
+          <p:cNvPr id="14" name="Text 8"/>
+          <p:cNvSpPr/>
+          <p:nvPr/>
+        </p:nvSpPr>
+        <p:spPr>
+          <a:xfrm>
+            <a:off x="1370177" y="4806255"/>
+            <a:ext cx="2756724" cy="1209675"/>
+          </a:xfrm>
+          <a:prstGeom prst="rect">
+            <a:avLst/>
+          </a:prstGeom>
+          <a:noFill/>
+        </p:spPr>
+        <p:txBody>
+          <a:bodyPr wrap="square" lIns="0" tIns="0" rIns="0" bIns="0" rtlCol="0" anchor="t">
+            <a:normAutofit/>
+          </a:bodyPr>
+          <a:lstStyle/>
+          <a:p>
+            <a:pPr marL="0" indent="0" algn="l">
+              <a:lnSpc>
+                <a:spcPct val="133000"/>
+              </a:lnSpc>
+              <a:buNone/>
+            </a:pPr>
+            <a:r>
+              <a:rPr lang="en-US" sz="1450" dirty="0">
+                <a:solidFill>
+                  <a:srgbClr val="454240"/>
+                </a:solidFill>
+                <a:latin typeface="DM Sans" pitchFamily="34" charset="0"/>
+                <a:ea typeface="DM Sans" pitchFamily="34" charset="-122"/>
+                <a:cs typeface="DM Sans" pitchFamily="34" charset="-120"/>
+              </a:rPr>
+              <a:t>Six Solomon instances + OSM road network.</a:t>
+            </a:r>
+            <a:endParaRPr lang="en-US" sz="1450" dirty="0"/>
+          </a:p>
+        </p:txBody>
+      </p:sp>
+      <p:pic>
+        <p:nvPicPr>
+          <p:cNvPr id="15" name="Image 4" descr="preencoded.png"/>
+          <p:cNvPicPr>
+            <a:picLocks noChangeAspect="1"/>
+          </p:cNvPicPr>
+          <p:nvPr/>
+        </p:nvPicPr>
+        <p:blipFill>
+          <a:blip r:embed="rId9">
+            <a:extLst>
+              <a:ext uri="{96DAC541-7B7A-43D3-8B79-37D633B846F1}">
+                <asvg:svgBlip xmlns:asvg="http://schemas.microsoft.com/office/drawing/2016/SVG/main" r:embed="rId10"/>
+              </a:ext>
+            </a:extLst>
+          </a:blip>
+          <a:stretch>
+            <a:fillRect/>
+          </a:stretch>
+        </p:blipFill>
+        <p:spPr>
+          <a:xfrm>
+            <a:off x="4363135" y="4102298"/>
+            <a:ext cx="472468" cy="472480"/>
+          </a:xfrm>
+          <a:prstGeom prst="rect">
+            <a:avLst/>
+          </a:prstGeom>
+        </p:spPr>
+      </p:pic>
+      <p:sp>
+        <p:nvSpPr>
+          <p:cNvPr id="16" name="Text 9"/>
+          <p:cNvSpPr/>
+          <p:nvPr/>
+        </p:nvSpPr>
+        <p:spPr>
+          <a:xfrm>
+            <a:off x="5071836" y="4102298"/>
+            <a:ext cx="2756724" cy="295275"/>
+          </a:xfrm>
+          <a:prstGeom prst="rect">
+            <a:avLst/>
+          </a:prstGeom>
+          <a:noFill/>
+        </p:spPr>
+        <p:txBody>
+          <a:bodyPr wrap="square" lIns="0" tIns="0" rIns="0" bIns="0" rtlCol="0" anchor="t">
+            <a:normAutofit/>
+          </a:bodyPr>
+          <a:lstStyle/>
+          <a:p>
+            <a:pPr marL="0" indent="0" algn="l">
+              <a:lnSpc>
+                <a:spcPct val="104000"/>
+              </a:lnSpc>
+              <a:buNone/>
+            </a:pPr>
+            <a:r>
+              <a:rPr lang="en-US" sz="1850" dirty="0">
+                <a:solidFill>
+                  <a:srgbClr val="454240"/>
+                </a:solidFill>
+                <a:latin typeface="Libre Baskerville" panose="02000000000000000000" pitchFamily="34" charset="0"/>
+                <a:ea typeface="Libre Baskerville" panose="02000000000000000000" pitchFamily="34" charset="-122"/>
+                <a:cs typeface="Libre Baskerville" panose="02000000000000000000" pitchFamily="34" charset="-120"/>
+              </a:rPr>
+              <a:t>Domain Rules</a:t>
+            </a:r>
+            <a:endParaRPr lang="en-US" sz="1850" dirty="0"/>
+          </a:p>
+        </p:txBody>
+      </p:sp>
+      <p:sp>
+        <p:nvSpPr>
+          <p:cNvPr id="17" name="Text 10"/>
+          <p:cNvSpPr/>
+          <p:nvPr/>
+        </p:nvSpPr>
+        <p:spPr>
+          <a:xfrm>
+            <a:off x="5071836" y="4510980"/>
+            <a:ext cx="2756724" cy="1209675"/>
+          </a:xfrm>
+          <a:prstGeom prst="rect">
+            <a:avLst/>
+          </a:prstGeom>
+          <a:noFill/>
+        </p:spPr>
+        <p:txBody>
+          <a:bodyPr wrap="square" lIns="0" tIns="0" rIns="0" bIns="0" rtlCol="0" anchor="t">
+            <a:normAutofit/>
+          </a:bodyPr>
+          <a:lstStyle/>
+          <a:p>
+            <a:pPr marL="0" indent="0" algn="l">
+              <a:lnSpc>
+                <a:spcPct val="133000"/>
+              </a:lnSpc>
+              <a:buNone/>
+            </a:pPr>
+            <a:r>
+              <a:rPr lang="en-US" sz="1450" dirty="0">
+                <a:solidFill>
+                  <a:srgbClr val="454240"/>
+                </a:solidFill>
+                <a:latin typeface="DM Sans" pitchFamily="34" charset="0"/>
+                <a:ea typeface="DM Sans" pitchFamily="34" charset="-122"/>
+                <a:cs typeface="DM Sans" pitchFamily="34" charset="-120"/>
+              </a:rPr>
+              <a:t>WHO / EU GDP / ICH · CDC. Thresholds are prototype assumptions.</a:t>
+            </a:r>
+            <a:endParaRPr lang="en-US" sz="1450" dirty="0"/>
+          </a:p>
+        </p:txBody>
+      </p:sp>
+    </p:spTree>
+  </p:cSld>
+  <p:clrMapOvr>
+    <a:masterClrMapping/>
+  </p:clrMapOvr>
+</p:sld>
+</file>
+
+<file path=ppt/slides/slide7.xml><?xml version="1.0" encoding="utf-8"?>
+<p:sld xmlns:a="http://schemas.openxmlformats.org/drawingml/2006/main" xmlns:p="http://schemas.openxmlformats.org/presentationml/2006/main" xmlns:r="http://schemas.openxmlformats.org/officeDocument/2006/relationships">
+  <p:cSld>
+    <p:spTree>
+      <p:nvGrpSpPr>
+        <p:cNvPr id="1" name=""/>
+        <p:cNvGrpSpPr/>
+        <p:nvPr/>
+      </p:nvGrpSpPr>
+      <p:grpSpPr/>
+      <p:sp>
+        <p:nvSpPr>
+          <p:cNvPr id="2" name="TextBox 1"/>
+          <p:cNvSpPr txBox="1"/>
+          <p:nvPr/>
+        </p:nvSpPr>
+        <p:spPr>
+          <a:xfrm>
+            <a:off x="566928" y="365760"/>
+            <a:ext cx="11064240" cy="868680"/>
+          </a:xfrm>
+          <a:prstGeom prst="rect">
+            <a:avLst/>
+          </a:prstGeom>
+          <a:noFill/>
+        </p:spPr>
+        <p:txBody>
+          <a:bodyPr wrap="square" anchor="t">
+            <a:normAutofit/>
+          </a:bodyPr>
+          <a:lstStyle/>
+          <a:p>
+            <a:r>
+              <a:rPr sz="3700" b="0" i="0">
+                <a:solidFill>
+                  <a:srgbClr val="454240"/>
+                </a:solidFill>
+                <a:latin typeface="Libre Baskerville"/>
+                <a:ea typeface="Libre Baskerville"/>
+                <a:cs typeface="Libre Baskerville"/>
+              </a:rPr>
+              <a:t>Built and Running Today</a:t>
+            </a:r>
+          </a:p>
+        </p:txBody>
+      </p:sp>
+      <p:sp>
+        <p:nvSpPr>
+          <p:cNvPr id="3" name="TextBox 2"/>
+          <p:cNvSpPr txBox="1"/>
+          <p:nvPr/>
+        </p:nvSpPr>
+        <p:spPr>
+          <a:xfrm>
+            <a:off x="603504" y="1170432"/>
+            <a:ext cx="11064240" cy="365760"/>
+          </a:xfrm>
+          <a:prstGeom prst="rect">
+            <a:avLst/>
+          </a:prstGeom>
+          <a:noFill/>
+        </p:spPr>
+        <p:txBody>
+          <a:bodyPr wrap="square" anchor="t">
+            <a:normAutofit/>
+          </a:bodyPr>
+          <a:lstStyle/>
+          <a:p>
+            <a:r>
+              <a:rPr sz="1150" b="0" i="0">
+                <a:solidFill>
+                  <a:srgbClr val="5C4E3D"/>
+                </a:solidFill>
+                <a:latin typeface="DM Sans"/>
+                <a:ea typeface="DM Sans"/>
+                <a:cs typeface="DM Sans"/>
+              </a:rPr>
+              <a:t>Measured from the repository, 2026-09-27</a:t>
+            </a:r>
+          </a:p>
+        </p:txBody>
+      </p:sp>
+      <p:sp>
+        <p:nvSpPr>
+          <p:cNvPr id="4" name="Rectangle 3"/>
+          <p:cNvSpPr/>
+          <p:nvPr/>
+        </p:nvSpPr>
+        <p:spPr>
+          <a:xfrm>
+            <a:off x="566928" y="1097280"/>
+            <a:ext cx="2011680" cy="20320"/>
+          </a:xfrm>
+          <a:prstGeom prst="rect">
+            <a:avLst/>
+          </a:prstGeom>
+          <a:solidFill>
+            <a:srgbClr val="B88E23"/>
+          </a:solidFill>
+          <a:ln>
+            <a:noFill/>
+          </a:ln>
+          <a:effectLst/>
+        </p:spPr>
+        <p:style>
+          <a:lnRef idx="1">
+            <a:schemeClr val="accent1"/>
+          </a:lnRef>
+          <a:fillRef idx="3">
+            <a:schemeClr val="accent1"/>
+          </a:fillRef>
+          <a:effectRef idx="2">
+            <a:schemeClr val="accent1"/>
+          </a:effectRef>
+          <a:fontRef idx="minor">
+            <a:schemeClr val="lt1"/>
+          </a:fontRef>
+        </p:style>
+        <p:txBody>
+          <a:bodyPr rtlCol="0" anchor="ctr" wrap="square">
+            <a:normAutofit/>
+          </a:bodyPr>
+          <a:lstStyle/>
+          <a:p>
+            <a:pPr algn="ctr"/>
+          </a:p>
+        </p:txBody>
+      </p:sp>
+      <p:pic>
+        <p:nvPicPr>
+          <p:cNvPr id="5" name="Picture 4" descr="frontend_demo.png"/>
+          <p:cNvPicPr>
+            <a:picLocks noChangeAspect="1"/>
+          </p:cNvPicPr>
+          <p:nvPr/>
+        </p:nvPicPr>
+        <p:blipFill>
+          <a:blip r:embed="rId2"/>
+          <a:stretch>
+            <a:fillRect/>
+          </a:stretch>
+        </p:blipFill>
+        <p:spPr>
+          <a:xfrm>
+            <a:off x="566928" y="1600200"/>
+            <a:ext cx="6766560" cy="4954379"/>
+          </a:xfrm>
+          <a:prstGeom prst="rect">
+            <a:avLst/>
+          </a:prstGeom>
+        </p:spPr>
+      </p:pic>
+      <p:sp>
+        <p:nvSpPr>
+          <p:cNvPr id="7" name="TextBox 6"/>
+          <p:cNvSpPr txBox="1"/>
+          <p:nvPr/>
+        </p:nvSpPr>
+        <p:spPr>
+          <a:xfrm>
+            <a:off x="566928" y="6263640"/>
+            <a:ext cx="11064240" cy="365760"/>
+          </a:xfrm>
+          <a:prstGeom prst="rect">
+            <a:avLst/>
+          </a:prstGeom>
+          <a:noFill/>
+        </p:spPr>
+        <p:txBody>
+          <a:bodyPr wrap="square" anchor="t">
+            <a:normAutofit/>
+          </a:bodyPr>
+          <a:lstStyle/>
+          <a:p>
+            <a:r>
+              <a:rPr sz="1050" b="0" i="1">
+                <a:solidFill>
+                  <a:srgbClr val="5C4E3D"/>
+                </a:solidFill>
+                <a:latin typeface="DM Sans"/>
+                <a:ea typeface="DM Sans"/>
+                <a:cs typeface="DM Sans"/>
+              </a:rPr>
+              <a:t>Screenshot: Vue client in API mode (2026-09-27; route and evidence computed live by the backend, not mocked).</a:t>
+            </a:r>
+          </a:p>
+        </p:txBody>
+      </p:sp>
+      <p:sp>
+        <p:nvSpPr>
+          <p:cNvPr id="8" name="TextBox 5"/>
+          <p:cNvSpPr txBox="1"/>
+          <p:nvPr/>
+        </p:nvSpPr>
+        <p:spPr>
+          <a:xfrm>
+            <a:off x="566928" y="6263640"/>
+            <a:ext cx="11064240" cy="365760"/>
+          </a:xfrm>
+          <a:prstGeom prst="rect">
+            <a:avLst/>
+          </a:prstGeom>
+          <a:noFill/>
+        </p:spPr>
+        <p:txBody>
+          <a:bodyPr wrap="square" anchor="t">
+            <a:normAutofit/>
+          </a:bodyPr>
+          <a:lstStyle/>
+          <a:p>
+            <a:r>
+              <a:rPr sz="1050" b="0" i="1">
+                <a:solidFill>
+                  <a:srgbClr val="5C4E3D"/>
+                </a:solidFill>
+                <a:latin typeface="DM Sans"/>
+                <a:ea typeface="DM Sans"/>
+                <a:cs typeface="DM Sans"/>
+              </a:rPr>
+              <a:t>Screenshot: the Vue client in API mode, 2026-09-27.</a:t>
+            </a:r>
+          </a:p>
+        </p:txBody>
+      </p:sp>
+      <p:sp>
+        <p:nvSpPr>
+          <p:cNvPr id="9" name="TextBox 4"/>
+          <p:cNvSpPr txBox="1"/>
+          <p:nvPr/>
+        </p:nvSpPr>
+        <p:spPr>
+          <a:xfrm>
+            <a:off x="7543800" y="1600200"/>
+            <a:ext cx="4114800" cy="4572000"/>
+          </a:xfrm>
+          <a:prstGeom prst="rect">
+            <a:avLst/>
+          </a:prstGeom>
+          <a:noFill/>
+        </p:spPr>
+        <p:txBody>
+          <a:bodyPr wrap="square" anchor="t">
+            <a:normAutofit/>
+          </a:bodyPr>
+          <a:lstStyle/>
+          <a:p>
+            <a:pPr>
+              <a:spcAft>
+                <a:spcPts val="900"/>
+              </a:spcAft>
+            </a:pPr>
+            <a:r>
+              <a:rPr sz="1300" b="0" i="0">
+                <a:solidFill>
+                  <a:srgbClr val="454240"/>
+                </a:solidFill>
+                <a:latin typeface="DM Sans"/>
+                <a:ea typeface="DM Sans"/>
+                <a:cs typeface="DM Sans"/>
+              </a:rPr>
+              <a:t>● 23 HTTP endpoints, 13 of them dispatch operations.</a:t>
+            </a:r>
+          </a:p>
+          <a:p>
+            <a:pPr>
+              <a:spcAft>
+                <a:spcPts val="900"/>
+              </a:spcAft>
+            </a:pPr>
+            <a:r>
+              <a:rPr sz="1300" b="0" i="0">
+                <a:solidFill>
+                  <a:srgbClr val="454240"/>
+                </a:solidFill>
+                <a:latin typeface="DM Sans"/>
+                <a:ea typeface="DM Sans"/>
+                <a:cs typeface="DM Sans"/>
+              </a:rPr>
+              <a:t>● One Vue 3 client, 23 components; EN/ZH and offline mode.</a:t>
+            </a:r>
+          </a:p>
+          <a:p>
+            <a:pPr>
+              <a:spcAft>
+                <a:spcPts val="900"/>
+              </a:spcAft>
+            </a:pPr>
+            <a:r>
+              <a:rPr sz="1300" b="0" i="0">
+                <a:solidFill>
+                  <a:srgbClr val="454240"/>
+                </a:solidFill>
+                <a:latin typeface="DM Sans"/>
+                <a:ea typeface="DM Sans"/>
+                <a:cs typeface="DM Sans"/>
+              </a:rPr>
+              <a:t>● 25 archived cases; 56 dispatch operations persisted.</a:t>
+            </a:r>
+          </a:p>
+          <a:p>
+            <a:pPr>
+              <a:spcAft>
+                <a:spcPts val="900"/>
+              </a:spcAft>
+            </a:pPr>
+            <a:r>
+              <a:rPr sz="1300" b="0" i="0">
+                <a:solidFill>
+                  <a:srgbClr val="454240"/>
+                </a:solidFill>
+                <a:latin typeface="DM Sans"/>
+                <a:ea typeface="DM Sans"/>
+                <a:cs typeface="DM Sans"/>
+              </a:rPr>
+              <a:t>● 305 test functions across 35 files.</a:t>
+            </a:r>
+          </a:p>
+          <a:p>
+            <a:pPr>
+              <a:spcAft>
+                <a:spcPts val="900"/>
+              </a:spcAft>
+            </a:pPr>
+            <a:r>
+              <a:rPr sz="1300" b="0" i="0">
+                <a:solidFill>
+                  <a:srgbClr val="454240"/>
+                </a:solidFill>
+                <a:latin typeface="DM Sans"/>
+                <a:ea typeface="DM Sans"/>
+                <a:cs typeface="DM Sans"/>
+              </a:rPr>
+              <a:t>● Still missing: cloud deploy, de-duplication, destination pool.</a:t>
+            </a:r>
+          </a:p>
+        </p:txBody>
+      </p:sp>
+    </p:spTree>
+  </p:cSld>
+  <p:clrMapOvr>
+    <a:masterClrMapping/>
+  </p:clrMapOvr>
+</p:sld>
+</file>
+
+<file path=ppt/slides/slide8.xml><?xml version="1.0" encoding="utf-8"?>
+<p:sld xmlns:a="http://schemas.openxmlformats.org/drawingml/2006/main" xmlns:p="http://schemas.openxmlformats.org/presentationml/2006/main" xmlns:r="http://schemas.openxmlformats.org/officeDocument/2006/relationships">
+  <p:cSld>
+    <p:spTree>
+      <p:nvGrpSpPr>
+        <p:cNvPr id="1" name=""/>
+        <p:cNvGrpSpPr/>
+        <p:nvPr/>
+      </p:nvGrpSpPr>
+      <p:grpSpPr/>
+      <p:sp>
+        <p:nvSpPr>
+          <p:cNvPr id="2" name="TextBox 1"/>
+          <p:cNvSpPr txBox="1"/>
+          <p:nvPr/>
+        </p:nvSpPr>
+        <p:spPr>
+          <a:xfrm>
+            <a:off x="566928" y="365760"/>
+            <a:ext cx="11064240" cy="868680"/>
+          </a:xfrm>
+          <a:prstGeom prst="rect">
+            <a:avLst/>
+          </a:prstGeom>
+          <a:noFill/>
+        </p:spPr>
+        <p:txBody>
+          <a:bodyPr wrap="square" anchor="t">
+            <a:normAutofit/>
+          </a:bodyPr>
+          <a:lstStyle/>
+          <a:p>
+            <a:r>
+              <a:rPr sz="3700" b="0" i="0">
+                <a:solidFill>
+                  <a:srgbClr val="454240"/>
+                </a:solidFill>
+                <a:latin typeface="Libre Baskerville"/>
+                <a:ea typeface="Libre Baskerville"/>
+                <a:cs typeface="Libre Baskerville"/>
+              </a:rPr>
+              <a:t>Results So Far</a:t>
+            </a:r>
+          </a:p>
+        </p:txBody>
+      </p:sp>
+      <p:sp>
+        <p:nvSpPr>
+          <p:cNvPr id="3" name="TextBox 2"/>
+          <p:cNvSpPr txBox="1"/>
+          <p:nvPr/>
+        </p:nvSpPr>
+        <p:spPr>
+          <a:xfrm>
+            <a:off x="603504" y="1170432"/>
+            <a:ext cx="11064240" cy="365760"/>
+          </a:xfrm>
+          <a:prstGeom prst="rect">
+            <a:avLst/>
+          </a:prstGeom>
+          <a:noFill/>
+        </p:spPr>
+        <p:txBody>
+          <a:bodyPr wrap="square" anchor="t">
+            <a:normAutofit/>
+          </a:bodyPr>
+          <a:lstStyle/>
+          <a:p>
+            <a:r>
+              <a:rPr sz="1150" b="0" i="0">
+                <a:solidFill>
+                  <a:srgbClr val="5C4E3D"/>
+                </a:solidFill>
+                <a:latin typeface="DM Sans"/>
+                <a:ea typeface="DM Sans"/>
+                <a:cs typeface="DM Sans"/>
+              </a:rPr>
+              <a:t>Every number reproducible in the repo</a:t>
+            </a:r>
+          </a:p>
+        </p:txBody>
+      </p:sp>
+      <p:sp>
+        <p:nvSpPr>
+          <p:cNvPr id="4" name="Rectangle 3"/>
+          <p:cNvSpPr/>
+          <p:nvPr/>
+        </p:nvSpPr>
+        <p:spPr>
+          <a:xfrm>
+            <a:off x="566928" y="1097280"/>
+            <a:ext cx="2011680" cy="20320"/>
+          </a:xfrm>
+          <a:prstGeom prst="rect">
+            <a:avLst/>
+          </a:prstGeom>
+          <a:solidFill>
+            <a:srgbClr val="B88E23"/>
+          </a:solidFill>
+          <a:ln>
+            <a:noFill/>
+          </a:ln>
+          <a:effectLst/>
+        </p:spPr>
+        <p:style>
+          <a:lnRef idx="1">
+            <a:schemeClr val="accent1"/>
+          </a:lnRef>
+          <a:fillRef idx="3">
+            <a:schemeClr val="accent1"/>
+          </a:fillRef>
+          <a:effectRef idx="2">
+            <a:schemeClr val="accent1"/>
+          </a:effectRef>
+          <a:fontRef idx="minor">
+            <a:schemeClr val="lt1"/>
+          </a:fontRef>
+        </p:style>
+        <p:txBody>
+          <a:bodyPr rtlCol="0" anchor="ctr" wrap="square">
+            <a:normAutofit/>
+          </a:bodyPr>
+          <a:lstStyle/>
+          <a:p>
+            <a:pPr algn="ctr"/>
+          </a:p>
+        </p:txBody>
+      </p:sp>
+      <p:sp>
+        <p:nvSpPr>
+          <p:cNvPr id="6" name="TextBox 4"/>
+          <p:cNvSpPr txBox="1"/>
+          <p:nvPr/>
+        </p:nvSpPr>
+        <p:spPr>
+          <a:xfrm>
+            <a:off x="566928" y="6263640"/>
+            <a:ext cx="11064240" cy="365760"/>
+          </a:xfrm>
+          <a:prstGeom prst="rect">
+            <a:avLst/>
+          </a:prstGeom>
+          <a:noFill/>
+        </p:spPr>
+        <p:txBody>
+          <a:bodyPr wrap="square" anchor="t">
+            <a:normAutofit/>
+          </a:bodyPr>
+          <a:lstStyle/>
+          <a:p>
+            <a:r>
+              <a:rPr sz="1050" b="0" i="1">
+                <a:solidFill>
+                  <a:srgbClr val="5C4E3D"/>
+                </a:solidFill>
+                <a:latin typeface="DM Sans"/>
+                <a:ea typeface="DM Sans"/>
+                <a:cs typeface="DM Sans"/>
+              </a:rPr>
+              <a:t>Boundaries: suspected-synthetic data, single random split, time-bounded solver — these do not establish real-world or operational savings.</a:t>
+            </a:r>
+          </a:p>
+        </p:txBody>
+      </p:sp>
+      <p:sp>
+        <p:nvSpPr>
+          <p:cNvPr id="7" name="TextBox 6"/>
+          <p:cNvSpPr txBox="1"/>
+          <p:nvPr/>
+        </p:nvSpPr>
+        <p:spPr>
+          <a:xfrm>
+            <a:off x="566928" y="1828800"/>
+            <a:ext cx="11064240" cy="4023360"/>
+          </a:xfrm>
+          <a:prstGeom prst="rect">
+            <a:avLst/>
+          </a:prstGeom>
+          <a:noFill/>
+        </p:spPr>
+        <p:txBody>
+          <a:bodyPr wrap="square" anchor="t">
+            <a:normAutofit/>
+          </a:bodyPr>
+          <a:lstStyle/>
+          <a:p>
+            <a:pPr>
+              <a:spcAft>
+                <a:spcPts val="1600"/>
+              </a:spcAft>
+            </a:pPr>
+            <a:r>
+              <a:rPr sz="1700" b="0" i="0">
+                <a:solidFill>
+                  <a:srgbClr val="454240"/>
+                </a:solidFill>
+                <a:latin typeface="DM Sans"/>
+                <a:ea typeface="DM Sans"/>
+                <a:cs typeface="DM Sans"/>
+              </a:rPr>
+              <a:t>● Engine vs human gold: 54/57 = 94.7%; scrap recall 33/33.</a:t>
+            </a:r>
+          </a:p>
+          <a:p>
+            <a:pPr>
+              <a:spcAft>
+                <a:spcPts val="1600"/>
+              </a:spcAft>
+            </a:pPr>
+            <a:r>
+              <a:rPr sz="1700" b="0" i="0">
+                <a:solidFill>
+                  <a:srgbClr val="454240"/>
+                </a:solidFill>
+                <a:latin typeface="DM Sans"/>
+                <a:ea typeface="DM Sans"/>
+                <a:cs typeface="DM Sans"/>
+              </a:rPr>
+              <a:t>● Annotator agreement κ = 0.6434 — below our 0.80 target.</a:t>
+            </a:r>
+          </a:p>
+          <a:p>
+            <a:pPr>
+              <a:spcAft>
+                <a:spcPts val="1600"/>
+              </a:spcAft>
+            </a:pPr>
+            <a:r>
+              <a:rPr sz="1700" b="0" i="0">
+                <a:solidFill>
+                  <a:srgbClr val="454240"/>
+                </a:solidFill>
+                <a:latin typeface="DM Sans"/>
+                <a:ea typeface="DM Sans"/>
+                <a:cs typeface="DM Sans"/>
+              </a:rPr>
+              <a:t>● Routing: 142.63 → 133.81 km (−6.19%, 0 violations); Solomon optima reached in 10 s.</a:t>
+            </a:r>
+          </a:p>
+          <a:p>
+            <a:pPr>
+              <a:spcAft>
+                <a:spcPts val="1600"/>
+              </a:spcAft>
+            </a:pPr>
+            <a:r>
+              <a:rPr sz="1700" b="0" i="0">
+                <a:solidFill>
+                  <a:srgbClr val="454240"/>
+                </a:solidFill>
+                <a:latin typeface="DM Sans"/>
+                <a:ea typeface="DM Sans"/>
+                <a:cs typeface="DM Sans"/>
+              </a:rPr>
+              <a:t>● Risk model: F1 0.691 / ROC-AUC 0.925; cause Top-1 0.143 is below the majority baseline and reported as such.</a:t>
+            </a:r>
+          </a:p>
+        </p:txBody>
+      </p:sp>
+    </p:spTree>
+  </p:cSld>
+  <p:clrMapOvr>
+    <a:masterClrMapping/>
+  </p:clrMapOvr>
+</p:sld>
+</file>
+
 <file path=ppt/slides/slide9.xml><?xml version="1.0" encoding="utf-8"?>
 <p:sld xmlns:a="http://schemas.openxmlformats.org/drawingml/2006/main" xmlns:r="http://schemas.openxmlformats.org/officeDocument/2006/relationships" xmlns:p="http://schemas.openxmlformats.org/presentationml/2006/main">
   <p:cSld>
@@ -5083,7 +5111,7 @@
         </p:nvSpPr>
         <p:spPr>
           <a:xfrm>
-            <a:off x="661475" y="841970"/>
+            <a:off x="661475" y="729754"/>
             <a:ext cx="10868745" cy="590649"/>
           </a:xfrm>
           <a:prstGeom prst="rect">
@@ -5112,15 +5140,85 @@
                 <a:ea typeface="Libre Baskerville" panose="02000000000000000000" pitchFamily="34" charset="-122"/>
                 <a:cs typeface="Libre Baskerville" panose="02000000000000000000" pitchFamily="34" charset="-120"/>
               </a:rPr>
-              <a:t>Data: Verifiable, Disclosed Provenance</a:t>
+              <a:t>Risks, Team &amp; Next Steps</a:t>
             </a:r>
             <a:endParaRPr lang="en-US" sz="3700" dirty="0"/>
+          </a:p>
+        </p:txBody>
+      </p:sp>
+      <p:sp>
+        <p:nvSpPr>
+          <p:cNvPr id="3" name="Shape 1"/>
+          <p:cNvSpPr/>
+          <p:nvPr/>
+        </p:nvSpPr>
+        <p:spPr>
+          <a:xfrm>
+            <a:off x="525350" y="1603871"/>
+            <a:ext cx="5476043" cy="3102074"/>
+          </a:xfrm>
+          <a:prstGeom prst="roundRect">
+            <a:avLst>
+              <a:gd name="adj" fmla="val 4387"/>
+            </a:avLst>
+          </a:prstGeom>
+          <a:solidFill>
+            <a:srgbClr val="063E5F"/>
+          </a:solidFill>
+        </p:spPr>
+        <p:txBody>
+          <a:bodyPr wrap="square">
+            <a:normAutofit/>
+          </a:bodyPr>
+          <a:p/>
+        </p:txBody>
+      </p:sp>
+      <p:sp>
+        <p:nvSpPr>
+          <p:cNvPr id="4" name="Text 2"/>
+          <p:cNvSpPr/>
+          <p:nvPr/>
+        </p:nvSpPr>
+        <p:spPr>
+          <a:xfrm>
+            <a:off x="714357" y="1792883"/>
+            <a:ext cx="5098029" cy="295275"/>
+          </a:xfrm>
+          <a:prstGeom prst="rect">
+            <a:avLst/>
+          </a:prstGeom>
+          <a:noFill/>
+        </p:spPr>
+        <p:txBody>
+          <a:bodyPr wrap="square" lIns="0" tIns="0" rIns="0" bIns="0" rtlCol="0" anchor="t">
+            <a:normAutofit/>
+          </a:bodyPr>
+          <a:lstStyle/>
+          <a:p>
+            <a:pPr marL="0" indent="0" algn="l">
+              <a:lnSpc>
+                <a:spcPct val="104000"/>
+              </a:lnSpc>
+              <a:buNone/>
+            </a:pPr>
+            <a:r>
+              <a:rPr lang="en-US" sz="1850" dirty="0">
+                <a:solidFill>
+                  <a:srgbClr val="FFFFFF"/>
+                </a:solidFill>
+                <a:latin typeface="Libre Baskerville" panose="02000000000000000000" pitchFamily="34" charset="0"/>
+                <a:ea typeface="Libre Baskerville" panose="02000000000000000000" pitchFamily="34" charset="-122"/>
+                <a:cs typeface="Libre Baskerville" panose="02000000000000000000" pitchFamily="34" charset="-120"/>
+              </a:rPr>
+              <a:t>Risk Mitigations</a:t>
+            </a:r>
+            <a:endParaRPr lang="en-US" sz="1850" dirty="0"/>
           </a:p>
         </p:txBody>
       </p:sp>
       <p:pic>
         <p:nvPicPr>
-          <p:cNvPr id="3" name="Image 0" descr="preencoded.png"/>
+          <p:cNvPr id="5" name="Image 0" descr="preencoded.png"/>
           <p:cNvPicPr>
             <a:picLocks noChangeAspect="1"/>
           </p:cNvPicPr>
@@ -5140,8 +5238,8 @@
         </p:blipFill>
         <p:spPr>
           <a:xfrm>
-            <a:off x="661475" y="1810643"/>
-            <a:ext cx="472468" cy="472480"/>
+            <a:off x="785198" y="2310209"/>
+            <a:ext cx="283461" cy="283468"/>
           </a:xfrm>
           <a:prstGeom prst="rect">
             <a:avLst/>
@@ -5150,14 +5248,236 @@
       </p:pic>
       <p:sp>
         <p:nvSpPr>
-          <p:cNvPr id="4" name="Text 1"/>
-          <p:cNvSpPr/>
-          <p:nvPr/>
-        </p:nvSpPr>
-        <p:spPr>
-          <a:xfrm>
-            <a:off x="1370177" y="1810643"/>
-            <a:ext cx="2756724" cy="590550"/>
+          <p:cNvPr id="6" name="Text 3"/>
+          <p:cNvSpPr/>
+          <p:nvPr/>
+        </p:nvSpPr>
+        <p:spPr>
+          <a:xfrm>
+            <a:off x="1328605" y="2300784"/>
+            <a:ext cx="1816650" cy="1209675"/>
+          </a:xfrm>
+          <a:prstGeom prst="rect">
+            <a:avLst/>
+          </a:prstGeom>
+          <a:noFill/>
+        </p:spPr>
+        <p:txBody>
+          <a:bodyPr wrap="square" lIns="0" tIns="0" rIns="0" bIns="0" rtlCol="0" anchor="t">
+            <a:normAutofit/>
+          </a:bodyPr>
+          <a:lstStyle/>
+          <a:p>
+            <a:pPr marL="0" indent="0" algn="l">
+              <a:lnSpc>
+                <a:spcPct val="133000"/>
+              </a:lnSpc>
+              <a:buNone/>
+            </a:pPr>
+            <a:r>
+              <a:rPr lang="en-US" sz="1450" b="1" dirty="0">
+                <a:solidFill>
+                  <a:srgbClr val="FFFFFF"/>
+                </a:solidFill>
+                <a:latin typeface="DM Sans Bold" pitchFamily="34" charset="0"/>
+                <a:ea typeface="DM Sans Bold" pitchFamily="34" charset="-122"/>
+                <a:cs typeface="DM Sans Bold" pitchFamily="34" charset="-120"/>
+              </a:rPr>
+              <a:t>Annotator agreement</a:t>
+            </a:r>
+            <a:r>
+              <a:rPr lang="en-US" sz="1450" dirty="0">
+                <a:solidFill>
+                  <a:srgbClr val="FFFFFF"/>
+                </a:solidFill>
+                <a:latin typeface="DM Sans" pitchFamily="34" charset="0"/>
+                <a:ea typeface="DM Sans" pitchFamily="34" charset="-122"/>
+                <a:cs typeface="DM Sans" pitchFamily="34" charset="-120"/>
+              </a:rPr>
+              <a:t> κ = 0.6434 vs our 0.80 target → report it</a:t>
+            </a:r>
+            <a:endParaRPr lang="en-US" sz="1450" dirty="0"/>
+          </a:p>
+        </p:txBody>
+      </p:sp>
+      <p:pic>
+        <p:nvPicPr>
+          <p:cNvPr id="7" name="Image 1" descr="preencoded.png"/>
+          <p:cNvPicPr>
+            <a:picLocks noChangeAspect="1"/>
+          </p:cNvPicPr>
+          <p:nvPr/>
+        </p:nvPicPr>
+        <p:blipFill>
+          <a:blip r:embed="rId1">
+            <a:extLst>
+              <a:ext uri="{96DAC541-7B7A-43D3-8B79-37D633B846F1}">
+                <asvg:svgBlip xmlns:asvg="http://schemas.microsoft.com/office/drawing/2016/SVG/main" r:embed="rId2"/>
+              </a:ext>
+            </a:extLst>
+          </a:blip>
+          <a:stretch>
+            <a:fillRect/>
+          </a:stretch>
+        </p:blipFill>
+        <p:spPr>
+          <a:xfrm>
+            <a:off x="3452329" y="2310209"/>
+            <a:ext cx="283461" cy="283468"/>
+          </a:xfrm>
+          <a:prstGeom prst="rect">
+            <a:avLst/>
+          </a:prstGeom>
+        </p:spPr>
+      </p:pic>
+      <p:sp>
+        <p:nvSpPr>
+          <p:cNvPr id="8" name="Text 4"/>
+          <p:cNvSpPr/>
+          <p:nvPr/>
+        </p:nvSpPr>
+        <p:spPr>
+          <a:xfrm>
+            <a:off x="3995737" y="2300784"/>
+            <a:ext cx="1816650" cy="1209675"/>
+          </a:xfrm>
+          <a:prstGeom prst="rect">
+            <a:avLst/>
+          </a:prstGeom>
+          <a:noFill/>
+        </p:spPr>
+        <p:txBody>
+          <a:bodyPr wrap="square" lIns="0" tIns="0" rIns="0" bIns="0" rtlCol="0" anchor="t">
+            <a:normAutofit/>
+          </a:bodyPr>
+          <a:lstStyle/>
+          <a:p>
+            <a:pPr marL="0" indent="0" algn="l">
+              <a:lnSpc>
+                <a:spcPct val="133000"/>
+              </a:lnSpc>
+              <a:buNone/>
+            </a:pPr>
+            <a:r>
+              <a:rPr lang="en-US" sz="1450" b="1" dirty="0">
+                <a:solidFill>
+                  <a:srgbClr val="FFFFFF"/>
+                </a:solidFill>
+                <a:latin typeface="DM Sans Bold" pitchFamily="34" charset="0"/>
+                <a:ea typeface="DM Sans Bold" pitchFamily="34" charset="-122"/>
+                <a:cs typeface="DM Sans Bold" pitchFamily="34" charset="-120"/>
+              </a:rPr>
+              <a:t>Quarantine recall 0/3</a:t>
+            </a:r>
+            <a:r>
+              <a:rPr lang="en-US" sz="1450" dirty="0">
+                <a:solidFill>
+                  <a:srgbClr val="FFFFFF"/>
+                </a:solidFill>
+                <a:latin typeface="DM Sans" pitchFamily="34" charset="0"/>
+                <a:ea typeface="DM Sans" pitchFamily="34" charset="-122"/>
+                <a:cs typeface="DM Sans" pitchFamily="34" charset="-120"/>
+              </a:rPr>
+              <a:t> 3 gold cases → report support counts</a:t>
+            </a:r>
+            <a:endParaRPr lang="en-US" sz="1450" dirty="0"/>
+          </a:p>
+        </p:txBody>
+      </p:sp>
+      <p:pic>
+        <p:nvPicPr>
+          <p:cNvPr id="9" name="Image 2" descr="preencoded.png"/>
+          <p:cNvPicPr>
+            <a:picLocks noChangeAspect="1"/>
+          </p:cNvPicPr>
+          <p:nvPr/>
+        </p:nvPicPr>
+        <p:blipFill>
+          <a:blip r:embed="rId1">
+            <a:extLst>
+              <a:ext uri="{96DAC541-7B7A-43D3-8B79-37D633B846F1}">
+                <asvg:svgBlip xmlns:asvg="http://schemas.microsoft.com/office/drawing/2016/SVG/main" r:embed="rId2"/>
+              </a:ext>
+            </a:extLst>
+          </a:blip>
+          <a:stretch>
+            <a:fillRect/>
+          </a:stretch>
+        </p:blipFill>
+        <p:spPr>
+          <a:xfrm>
+            <a:off x="785198" y="3897908"/>
+            <a:ext cx="283461" cy="283468"/>
+          </a:xfrm>
+          <a:prstGeom prst="rect">
+            <a:avLst/>
+          </a:prstGeom>
+        </p:spPr>
+      </p:pic>
+      <p:sp>
+        <p:nvSpPr>
+          <p:cNvPr id="10" name="Text 5"/>
+          <p:cNvSpPr/>
+          <p:nvPr/>
+        </p:nvSpPr>
+        <p:spPr>
+          <a:xfrm>
+            <a:off x="1328605" y="3888482"/>
+            <a:ext cx="4483782" cy="604838"/>
+          </a:xfrm>
+          <a:prstGeom prst="rect">
+            <a:avLst/>
+          </a:prstGeom>
+          <a:noFill/>
+        </p:spPr>
+        <p:txBody>
+          <a:bodyPr wrap="square" lIns="0" tIns="0" rIns="0" bIns="0" rtlCol="0" anchor="t">
+            <a:normAutofit/>
+          </a:bodyPr>
+          <a:lstStyle/>
+          <a:p>
+            <a:pPr marL="0" indent="0" algn="l">
+              <a:lnSpc>
+                <a:spcPct val="133000"/>
+              </a:lnSpc>
+              <a:buNone/>
+            </a:pPr>
+            <a:r>
+              <a:rPr lang="en-US" sz="1450" b="1" dirty="0">
+                <a:solidFill>
+                  <a:srgbClr val="FFFFFF"/>
+                </a:solidFill>
+                <a:latin typeface="DM Sans Bold" pitchFamily="34" charset="0"/>
+                <a:ea typeface="DM Sans Bold" pitchFamily="34" charset="-122"/>
+                <a:cs typeface="DM Sans Bold" pitchFamily="34" charset="-120"/>
+              </a:rPr>
+              <a:t>Synthetic data</a:t>
+            </a:r>
+            <a:r>
+              <a:rPr lang="en-US" sz="1450" dirty="0">
+                <a:solidFill>
+                  <a:srgbClr val="FFFFFF"/>
+                </a:solidFill>
+                <a:latin typeface="DM Sans" pitchFamily="34" charset="0"/>
+                <a:ea typeface="DM Sans" pitchFamily="34" charset="-122"/>
+                <a:cs typeface="DM Sans" pitchFamily="34" charset="-120"/>
+              </a:rPr>
+              <a:t> suspected-synthetic → disclose the limit</a:t>
+            </a:r>
+            <a:endParaRPr lang="en-US" sz="1450" dirty="0"/>
+          </a:p>
+        </p:txBody>
+      </p:sp>
+      <p:sp>
+        <p:nvSpPr>
+          <p:cNvPr id="11" name="Text 6"/>
+          <p:cNvSpPr/>
+          <p:nvPr/>
+        </p:nvSpPr>
+        <p:spPr>
+          <a:xfrm>
+            <a:off x="6332776" y="1792883"/>
+            <a:ext cx="5203794" cy="295275"/>
           </a:xfrm>
           <a:prstGeom prst="rect">
             <a:avLst/>
@@ -5179,13 +5499,13 @@
             <a:r>
               <a:rPr lang="en-US" sz="1850" dirty="0">
                 <a:solidFill>
-                  <a:srgbClr val="454240"/>
+                  <a:srgbClr val="5C4E3D"/>
                 </a:solidFill>
                 <a:latin typeface="Libre Baskerville" panose="02000000000000000000" pitchFamily="34" charset="0"/>
                 <a:ea typeface="Libre Baskerville" panose="02000000000000000000" pitchFamily="34" charset="-122"/>
                 <a:cs typeface="Libre Baskerville" panose="02000000000000000000" pitchFamily="34" charset="-120"/>
               </a:rPr>
-              <a:t>Cold Chain Silent Failure (Kaggle)</a:t>
+              <a:t>Team Roles</a:t>
             </a:r>
             <a:endParaRPr lang="en-US" sz="1850" dirty="0"/>
           </a:p>
@@ -5193,14 +5513,43 @@
       </p:sp>
       <p:sp>
         <p:nvSpPr>
-          <p:cNvPr id="5" name="Text 2"/>
-          <p:cNvSpPr/>
-          <p:nvPr/>
-        </p:nvSpPr>
-        <p:spPr>
-          <a:xfrm>
-            <a:off x="1370177" y="2514600"/>
-            <a:ext cx="2756724" cy="907256"/>
+          <p:cNvPr id="12" name="Shape 7"/>
+          <p:cNvSpPr/>
+          <p:nvPr/>
+        </p:nvSpPr>
+        <p:spPr>
+          <a:xfrm>
+            <a:off x="6332776" y="2348012"/>
+            <a:ext cx="5203794" cy="25400"/>
+          </a:xfrm>
+          <a:prstGeom prst="roundRect">
+            <a:avLst>
+              <a:gd name="adj" fmla="val 49999"/>
+            </a:avLst>
+          </a:prstGeom>
+          <a:solidFill>
+            <a:srgbClr val="454240">
+              <a:alpha val="50000"/>
+            </a:srgbClr>
+          </a:solidFill>
+        </p:spPr>
+        <p:txBody>
+          <a:bodyPr wrap="square">
+            <a:normAutofit/>
+          </a:bodyPr>
+          <a:p/>
+        </p:txBody>
+      </p:sp>
+      <p:sp>
+        <p:nvSpPr>
+          <p:cNvPr id="13" name="Text 8"/>
+          <p:cNvSpPr/>
+          <p:nvPr/>
+        </p:nvSpPr>
+        <p:spPr>
+          <a:xfrm>
+            <a:off x="6332776" y="2633266"/>
+            <a:ext cx="5203794" cy="295275"/>
           </a:xfrm>
           <a:prstGeom prst="rect">
             <a:avLst/>
@@ -5214,10 +5563,54 @@
           <a:lstStyle/>
           <a:p>
             <a:pPr marL="0" indent="0" algn="l">
+              <a:lnSpc>
+                <a:spcPct val="104000"/>
+              </a:lnSpc>
+              <a:buNone/>
+            </a:pPr>
+            <a:r>
+              <a:rPr lang="en-US" sz="1850" dirty="0">
+                <a:solidFill>
+                  <a:srgbClr val="5C4E3D"/>
+                </a:solidFill>
+                <a:latin typeface="Libre Baskerville" panose="02000000000000000000" pitchFamily="34" charset="0"/>
+                <a:ea typeface="Libre Baskerville" panose="02000000000000000000" pitchFamily="34" charset="-122"/>
+                <a:cs typeface="Libre Baskerville" panose="02000000000000000000" pitchFamily="34" charset="-120"/>
+              </a:rPr>
+              <a:t>Immediate Next Steps</a:t>
+            </a:r>
+            <a:endParaRPr lang="en-US" sz="1850" dirty="0"/>
+          </a:p>
+        </p:txBody>
+      </p:sp>
+      <p:sp>
+        <p:nvSpPr>
+          <p:cNvPr id="14" name="Text 9"/>
+          <p:cNvSpPr/>
+          <p:nvPr/>
+        </p:nvSpPr>
+        <p:spPr>
+          <a:xfrm>
+            <a:off x="6332776" y="3117552"/>
+            <a:ext cx="5203794" cy="1039416"/>
+          </a:xfrm>
+          <a:prstGeom prst="rect">
+            <a:avLst/>
+          </a:prstGeom>
+          <a:noFill/>
+        </p:spPr>
+        <p:txBody>
+          <a:bodyPr wrap="square" lIns="0" tIns="0" rIns="0" bIns="0" rtlCol="0" anchor="t">
+            <a:normAutofit/>
+          </a:bodyPr>
+          <a:lstStyle/>
+          <a:p>
+            <a:pPr marL="294640" indent="-294640" algn="l">
               <a:lnSpc>
                 <a:spcPct val="133000"/>
               </a:lnSpc>
-              <a:buNone/>
+              <a:buSzPct val="100000"/>
+              <a:buChar char="•"/>
             </a:pPr>
             <a:r>
               <a:rPr lang="en-US" sz="1450" dirty="0">
@@ -5228,7 +5621,49 @@
                 <a:ea typeface="DM Sans" pitchFamily="34" charset="-122"/>
                 <a:cs typeface="DM Sans" pitchFamily="34" charset="-120"/>
               </a:rPr>
-              <a:t>≈8,000 rows — failure classification.</a:t>
+              <a:t>W1: threshold review; multi-fold risk experiments</a:t>
+            </a:r>
+            <a:endParaRPr lang="en-US" sz="1450" dirty="0"/>
+          </a:p>
+          <a:p>
+            <a:pPr marL="294640" indent="-294640" algn="l">
+              <a:lnSpc>
+                <a:spcPct val="133000"/>
+              </a:lnSpc>
+              <a:buSzPct val="100000"/>
+              <a:buChar char="•"/>
+            </a:pPr>
+            <a:r>
+              <a:rPr lang="en-US" sz="1450" dirty="0">
+                <a:solidFill>
+                  <a:srgbClr val="454240"/>
+                </a:solidFill>
+                <a:latin typeface="DM Sans" pitchFamily="34" charset="0"/>
+                <a:ea typeface="DM Sans" pitchFamily="34" charset="-122"/>
+                <a:cs typeface="DM Sans" pitchFamily="34" charset="-120"/>
+              </a:rPr>
+              <a:t>W3: integrated acceptance and failure states</a:t>
+            </a:r>
+            <a:endParaRPr lang="en-US" sz="1450" dirty="0"/>
+          </a:p>
+          <a:p>
+            <a:pPr marL="294640" indent="-294640" algn="l">
+              <a:lnSpc>
+                <a:spcPct val="133000"/>
+              </a:lnSpc>
+              <a:buSzPct val="100000"/>
+              <a:buChar char="•"/>
+            </a:pPr>
+            <a:r>
+              <a:rPr lang="en-US" sz="1450" dirty="0">
+                <a:solidFill>
+                  <a:srgbClr val="454240"/>
+                </a:solidFill>
+                <a:latin typeface="DM Sans" pitchFamily="34" charset="0"/>
+                <a:ea typeface="DM Sans" pitchFamily="34" charset="-122"/>
+                <a:cs typeface="DM Sans" pitchFamily="34" charset="-120"/>
+              </a:rPr>
+              <a:t>W5: reproduce cleanly; videos by 25 Oct</a:t>
             </a:r>
             <a:endParaRPr lang="en-US" sz="1450" dirty="0"/>
           </a:p>
@@ -5236,7 +5671,7 @@
       </p:sp>
       <p:pic>
         <p:nvPicPr>
-          <p:cNvPr id="6" name="Image 1" descr="preencoded.png"/>
+          <p:cNvPr id="15" name="Image 3" descr="preencoded.png"/>
           <p:cNvPicPr>
             <a:picLocks noChangeAspect="1"/>
           </p:cNvPicPr>
@@ -5256,8 +5691,8 @@
         </p:blipFill>
         <p:spPr>
           <a:xfrm>
-            <a:off x="4363135" y="1810643"/>
-            <a:ext cx="472468" cy="472480"/>
+            <a:off x="636075" y="4893171"/>
+            <a:ext cx="2565336" cy="1260475"/>
           </a:xfrm>
           <a:prstGeom prst="rect">
             <a:avLst/>
@@ -5266,57 +5701,14 @@
       </p:pic>
       <p:sp>
         <p:nvSpPr>
-          <p:cNvPr id="7" name="Text 3"/>
-          <p:cNvSpPr/>
-          <p:nvPr/>
-        </p:nvSpPr>
-        <p:spPr>
-          <a:xfrm>
-            <a:off x="5071836" y="1810643"/>
-            <a:ext cx="2756724" cy="590550"/>
-          </a:xfrm>
-          <a:prstGeom prst="rect">
-            <a:avLst/>
-          </a:prstGeom>
-          <a:noFill/>
-        </p:spPr>
-        <p:txBody>
-          <a:bodyPr wrap="square" lIns="0" tIns="0" rIns="0" bIns="0" rtlCol="0" anchor="t">
-            <a:normAutofit/>
-          </a:bodyPr>
-          <a:lstStyle/>
-          <a:p>
-            <a:pPr marL="0" indent="0" algn="l">
-              <a:lnSpc>
-                <a:spcPct val="104000"/>
-              </a:lnSpc>
-              <a:buNone/>
-            </a:pPr>
-            <a:r>
-              <a:rPr lang="en-US" sz="1850" dirty="0">
-                <a:solidFill>
-                  <a:srgbClr val="454240"/>
-                </a:solidFill>
-                <a:latin typeface="Libre Baskerville" panose="02000000000000000000" pitchFamily="34" charset="0"/>
-                <a:ea typeface="Libre Baskerville" panose="02000000000000000000" pitchFamily="34" charset="-122"/>
-                <a:cs typeface="Libre Baskerville" panose="02000000000000000000" pitchFamily="34" charset="-120"/>
-              </a:rPr>
-              <a:t>Vaccine Distribution w/ Temp Logging (Kaggle)</a:t>
-            </a:r>
-            <a:endParaRPr lang="en-US" sz="1850" dirty="0"/>
-          </a:p>
-        </p:txBody>
-      </p:sp>
-      <p:sp>
-        <p:nvSpPr>
-          <p:cNvPr id="8" name="Text 4"/>
-          <p:cNvSpPr/>
-          <p:nvPr/>
-        </p:nvSpPr>
-        <p:spPr>
-          <a:xfrm>
-            <a:off x="5071836" y="2514600"/>
-            <a:ext cx="2756724" cy="1209675"/>
+          <p:cNvPr id="16" name="Text 10"/>
+          <p:cNvSpPr/>
+          <p:nvPr/>
+        </p:nvSpPr>
+        <p:spPr>
+          <a:xfrm>
+            <a:off x="901281" y="4918571"/>
+            <a:ext cx="2300131" cy="1209675"/>
           </a:xfrm>
           <a:prstGeom prst="rect">
             <a:avLst/>
@@ -5336,6 +5728,17 @@
               <a:buNone/>
             </a:pPr>
             <a:r>
+              <a:rPr lang="en-US" sz="1450" b="1" dirty="0">
+                <a:solidFill>
+                  <a:srgbClr val="454240"/>
+                </a:solidFill>
+                <a:latin typeface="DM Sans Bold" pitchFamily="34" charset="0"/>
+                <a:ea typeface="DM Sans Bold" pitchFamily="34" charset="-122"/>
+                <a:cs typeface="DM Sans Bold" pitchFamily="34" charset="-120"/>
+              </a:rPr>
+              <a:t>Project Lead / Rules</a:t>
+            </a:r>
+            <a:r>
               <a:rPr lang="en-US" sz="1450" dirty="0">
                 <a:solidFill>
                   <a:srgbClr val="454240"/>
@@ -5344,7 +5747,7 @@
                 <a:ea typeface="DM Sans" pitchFamily="34" charset="-122"/>
                 <a:cs typeface="DM Sans" pitchFamily="34" charset="-120"/>
               </a:rPr>
-              <a:t>≈26,700 rows — sequence and MKT work.</a:t>
+              <a:t> · Xu Wenzhe: rules, evidence, evaluation</a:t>
             </a:r>
             <a:endParaRPr lang="en-US" sz="1450" dirty="0"/>
           </a:p>
@@ -5352,7 +5755,7 @@
       </p:sp>
       <p:pic>
         <p:nvPicPr>
-          <p:cNvPr id="9" name="Image 2" descr="preencoded.png"/>
+          <p:cNvPr id="17" name="Image 4" descr="preencoded.png"/>
           <p:cNvPicPr>
             <a:picLocks noChangeAspect="1"/>
           </p:cNvPicPr>
@@ -5372,8 +5775,8 @@
         </p:blipFill>
         <p:spPr>
           <a:xfrm>
-            <a:off x="8064794" y="1810643"/>
-            <a:ext cx="472468" cy="472480"/>
+            <a:off x="3412246" y="4893171"/>
+            <a:ext cx="2565435" cy="1260475"/>
           </a:xfrm>
           <a:prstGeom prst="rect">
             <a:avLst/>
@@ -5382,57 +5785,14 @@
       </p:pic>
       <p:sp>
         <p:nvSpPr>
-          <p:cNvPr id="10" name="Text 5"/>
-          <p:cNvSpPr/>
-          <p:nvPr/>
-        </p:nvSpPr>
-        <p:spPr>
-          <a:xfrm>
-            <a:off x="8773496" y="1810643"/>
-            <a:ext cx="2756724" cy="590550"/>
-          </a:xfrm>
-          <a:prstGeom prst="rect">
-            <a:avLst/>
-          </a:prstGeom>
-          <a:noFill/>
-        </p:spPr>
-        <p:txBody>
-          <a:bodyPr wrap="square" lIns="0" tIns="0" rIns="0" bIns="0" rtlCol="0" anchor="t">
-            <a:normAutofit/>
-          </a:bodyPr>
-          <a:lstStyle/>
-          <a:p>
-            <a:pPr marL="0" indent="0" algn="l">
-              <a:lnSpc>
-                <a:spcPct val="104000"/>
-              </a:lnSpc>
-              <a:buNone/>
-            </a:pPr>
-            <a:r>
-              <a:rPr lang="en-US" sz="1850" dirty="0">
-                <a:solidFill>
-                  <a:srgbClr val="454240"/>
-                </a:solidFill>
-                <a:latin typeface="Libre Baskerville" panose="02000000000000000000" pitchFamily="34" charset="0"/>
-                <a:ea typeface="Libre Baskerville" panose="02000000000000000000" pitchFamily="34" charset="-122"/>
-                <a:cs typeface="Libre Baskerville" panose="02000000000000000000" pitchFamily="34" charset="-120"/>
-              </a:rPr>
-              <a:t>Electric Sheep Africa Dataset</a:t>
-            </a:r>
-            <a:endParaRPr lang="en-US" sz="1850" dirty="0"/>
-          </a:p>
-        </p:txBody>
-      </p:sp>
-      <p:sp>
-        <p:nvSpPr>
-          <p:cNvPr id="11" name="Text 6"/>
-          <p:cNvSpPr/>
-          <p:nvPr/>
-        </p:nvSpPr>
-        <p:spPr>
-          <a:xfrm>
-            <a:off x="8773496" y="2514600"/>
-            <a:ext cx="2756724" cy="1209675"/>
+          <p:cNvPr id="18" name="Text 11"/>
+          <p:cNvSpPr/>
+          <p:nvPr/>
+        </p:nvSpPr>
+        <p:spPr>
+          <a:xfrm>
+            <a:off x="3677451" y="4918571"/>
+            <a:ext cx="2300230" cy="907256"/>
           </a:xfrm>
           <a:prstGeom prst="rect">
             <a:avLst/>
@@ -5452,6 +5812,17 @@
               <a:buNone/>
             </a:pPr>
             <a:r>
+              <a:rPr lang="en-US" sz="1450" b="1" dirty="0">
+                <a:solidFill>
+                  <a:srgbClr val="454240"/>
+                </a:solidFill>
+                <a:latin typeface="DM Sans Bold" pitchFamily="34" charset="0"/>
+                <a:ea typeface="DM Sans Bold" pitchFamily="34" charset="-122"/>
+                <a:cs typeface="DM Sans Bold" pitchFamily="34" charset="-120"/>
+              </a:rPr>
+              <a:t>Data &amp; ML</a:t>
+            </a:r>
+            <a:r>
               <a:rPr lang="en-US" sz="1450" dirty="0">
                 <a:solidFill>
                   <a:srgbClr val="454240"/>
@@ -5460,7 +5831,7 @@
                 <a:ea typeface="DM Sans" pitchFamily="34" charset="-122"/>
                 <a:cs typeface="DM Sans" pitchFamily="34" charset="-120"/>
               </a:rPr>
-              <a:t>Simulated facility-monthly records.</a:t>
+              <a:t> · Zhu Jianyu: data, risk, causes, SHAP</a:t>
             </a:r>
             <a:endParaRPr lang="en-US" sz="1450" dirty="0"/>
           </a:p>
@@ -5468,17 +5839,17 @@
       </p:sp>
       <p:pic>
         <p:nvPicPr>
-          <p:cNvPr id="12" name="Image 3" descr="preencoded.png"/>
+          <p:cNvPr id="19" name="Image 5" descr="preencoded.png"/>
           <p:cNvPicPr>
             <a:picLocks noChangeAspect="1"/>
           </p:cNvPicPr>
           <p:nvPr/>
         </p:nvPicPr>
         <p:blipFill>
-          <a:blip r:embed="rId7">
+          <a:blip r:embed="rId5">
             <a:extLst>
               <a:ext uri="{96DAC541-7B7A-43D3-8B79-37D633B846F1}">
-                <asvg:svgBlip xmlns:asvg="http://schemas.microsoft.com/office/drawing/2016/SVG/main" r:embed="rId8"/>
+                <asvg:svgBlip xmlns:asvg="http://schemas.microsoft.com/office/drawing/2016/SVG/main" r:embed="rId6"/>
               </a:ext>
             </a:extLst>
           </a:blip>
@@ -5488,8 +5859,8 @@
         </p:blipFill>
         <p:spPr>
           <a:xfrm>
-            <a:off x="661475" y="4102298"/>
-            <a:ext cx="472468" cy="472480"/>
+            <a:off x="6188515" y="4893171"/>
+            <a:ext cx="2565435" cy="1260475"/>
           </a:xfrm>
           <a:prstGeom prst="rect">
             <a:avLst/>
@@ -5498,57 +5869,14 @@
       </p:pic>
       <p:sp>
         <p:nvSpPr>
-          <p:cNvPr id="13" name="Text 7"/>
-          <p:cNvSpPr/>
-          <p:nvPr/>
-        </p:nvSpPr>
-        <p:spPr>
-          <a:xfrm>
-            <a:off x="1370177" y="4102298"/>
-            <a:ext cx="2756724" cy="590550"/>
-          </a:xfrm>
-          <a:prstGeom prst="rect">
-            <a:avLst/>
-          </a:prstGeom>
-          <a:noFill/>
-        </p:spPr>
-        <p:txBody>
-          <a:bodyPr wrap="square" lIns="0" tIns="0" rIns="0" bIns="0" rtlCol="0" anchor="t">
-            <a:normAutofit/>
-          </a:bodyPr>
-          <a:lstStyle/>
-          <a:p>
-            <a:pPr marL="0" indent="0" algn="l">
-              <a:lnSpc>
-                <a:spcPct val="104000"/>
-              </a:lnSpc>
-              <a:buNone/>
-            </a:pPr>
-            <a:r>
-              <a:rPr lang="en-US" sz="1850" dirty="0">
-                <a:solidFill>
-                  <a:srgbClr val="454240"/>
-                </a:solidFill>
-                <a:latin typeface="Libre Baskerville" panose="02000000000000000000" pitchFamily="34" charset="0"/>
-                <a:ea typeface="Libre Baskerville" panose="02000000000000000000" pitchFamily="34" charset="-122"/>
-                <a:cs typeface="Libre Baskerville" panose="02000000000000000000" pitchFamily="34" charset="-120"/>
-              </a:rPr>
-              <a:t>CVRPLIB Benchmarks</a:t>
-            </a:r>
-            <a:endParaRPr lang="en-US" sz="1850" dirty="0"/>
-          </a:p>
-        </p:txBody>
-      </p:sp>
-      <p:sp>
-        <p:nvSpPr>
-          <p:cNvPr id="14" name="Text 8"/>
-          <p:cNvSpPr/>
-          <p:nvPr/>
-        </p:nvSpPr>
-        <p:spPr>
-          <a:xfrm>
-            <a:off x="1370177" y="4806255"/>
-            <a:ext cx="2756724" cy="1209675"/>
+          <p:cNvPr id="20" name="Text 12"/>
+          <p:cNvSpPr/>
+          <p:nvPr/>
+        </p:nvSpPr>
+        <p:spPr>
+          <a:xfrm>
+            <a:off x="6453721" y="4918571"/>
+            <a:ext cx="2300230" cy="907256"/>
           </a:xfrm>
           <a:prstGeom prst="rect">
             <a:avLst/>
@@ -5568,6 +5896,17 @@
               <a:buNone/>
             </a:pPr>
             <a:r>
+              <a:rPr lang="en-US" sz="1450" b="1" dirty="0">
+                <a:solidFill>
+                  <a:srgbClr val="454240"/>
+                </a:solidFill>
+                <a:latin typeface="DM Sans Bold" pitchFamily="34" charset="0"/>
+                <a:ea typeface="DM Sans Bold" pitchFamily="34" charset="-122"/>
+                <a:cs typeface="DM Sans Bold" pitchFamily="34" charset="-120"/>
+              </a:rPr>
+              <a:t>Optimisation</a:t>
+            </a:r>
+            <a:r>
               <a:rPr lang="en-US" sz="1450" dirty="0">
                 <a:solidFill>
                   <a:srgbClr val="454240"/>
@@ -5576,7 +5915,7 @@
                 <a:ea typeface="DM Sans" pitchFamily="34" charset="-122"/>
                 <a:cs typeface="DM Sans" pitchFamily="34" charset="-120"/>
               </a:rPr>
-              <a:t>Six Solomon instances + OSM road network.</a:t>
+              <a:t> · Wang Lepeng: VRPTW, routes, dispatch</a:t>
             </a:r>
             <a:endParaRPr lang="en-US" sz="1450" dirty="0"/>
           </a:p>
@@ -5584,17 +5923,17 @@
       </p:sp>
       <p:pic>
         <p:nvPicPr>
-          <p:cNvPr id="15" name="Image 4" descr="preencoded.png"/>
+          <p:cNvPr id="21" name="Image 6" descr="preencoded.png"/>
           <p:cNvPicPr>
             <a:picLocks noChangeAspect="1"/>
           </p:cNvPicPr>
           <p:nvPr/>
         </p:nvPicPr>
         <p:blipFill>
-          <a:blip r:embed="rId9">
+          <a:blip r:embed="rId5">
             <a:extLst>
               <a:ext uri="{96DAC541-7B7A-43D3-8B79-37D633B846F1}">
-                <asvg:svgBlip xmlns:asvg="http://schemas.microsoft.com/office/drawing/2016/SVG/main" r:embed="rId10"/>
+                <asvg:svgBlip xmlns:asvg="http://schemas.microsoft.com/office/drawing/2016/SVG/main" r:embed="rId6"/>
               </a:ext>
             </a:extLst>
           </a:blip>
@@ -5604,8 +5943,8 @@
         </p:blipFill>
         <p:spPr>
           <a:xfrm>
-            <a:off x="4363135" y="4102298"/>
-            <a:ext cx="472468" cy="472480"/>
+            <a:off x="8964785" y="4893171"/>
+            <a:ext cx="2565435" cy="1260475"/>
           </a:xfrm>
           <a:prstGeom prst="rect">
             <a:avLst/>
@@ -5614,57 +5953,14 @@
       </p:pic>
       <p:sp>
         <p:nvSpPr>
-          <p:cNvPr id="16" name="Text 9"/>
-          <p:cNvSpPr/>
-          <p:nvPr/>
-        </p:nvSpPr>
-        <p:spPr>
-          <a:xfrm>
-            <a:off x="5071836" y="4102298"/>
-            <a:ext cx="2756724" cy="295275"/>
-          </a:xfrm>
-          <a:prstGeom prst="rect">
-            <a:avLst/>
-          </a:prstGeom>
-          <a:noFill/>
-        </p:spPr>
-        <p:txBody>
-          <a:bodyPr wrap="square" lIns="0" tIns="0" rIns="0" bIns="0" rtlCol="0" anchor="t">
-            <a:normAutofit/>
-          </a:bodyPr>
-          <a:lstStyle/>
-          <a:p>
-            <a:pPr marL="0" indent="0" algn="l">
-              <a:lnSpc>
-                <a:spcPct val="104000"/>
-              </a:lnSpc>
-              <a:buNone/>
-            </a:pPr>
-            <a:r>
-              <a:rPr lang="en-US" sz="1850" dirty="0">
-                <a:solidFill>
-                  <a:srgbClr val="454240"/>
-                </a:solidFill>
-                <a:latin typeface="Libre Baskerville" panose="02000000000000000000" pitchFamily="34" charset="0"/>
-                <a:ea typeface="Libre Baskerville" panose="02000000000000000000" pitchFamily="34" charset="-122"/>
-                <a:cs typeface="Libre Baskerville" panose="02000000000000000000" pitchFamily="34" charset="-120"/>
-              </a:rPr>
-              <a:t>Domain Rules</a:t>
-            </a:r>
-            <a:endParaRPr lang="en-US" sz="1850" dirty="0"/>
-          </a:p>
-        </p:txBody>
-      </p:sp>
-      <p:sp>
-        <p:nvSpPr>
-          <p:cNvPr id="17" name="Text 10"/>
-          <p:cNvSpPr/>
-          <p:nvPr/>
-        </p:nvSpPr>
-        <p:spPr>
-          <a:xfrm>
-            <a:off x="5071836" y="4510980"/>
-            <a:ext cx="2756724" cy="1209675"/>
+          <p:cNvPr id="22" name="Text 13"/>
+          <p:cNvSpPr/>
+          <p:nvPr/>
+        </p:nvSpPr>
+        <p:spPr>
+          <a:xfrm>
+            <a:off x="9229990" y="4918571"/>
+            <a:ext cx="2300230" cy="1209675"/>
           </a:xfrm>
           <a:prstGeom prst="rect">
             <a:avLst/>
@@ -5684,6 +5980,17 @@
               <a:buNone/>
             </a:pPr>
             <a:r>
+              <a:rPr lang="en-US" sz="1450" b="1" dirty="0">
+                <a:solidFill>
+                  <a:srgbClr val="454240"/>
+                </a:solidFill>
+                <a:latin typeface="DM Sans Bold" pitchFamily="34" charset="0"/>
+                <a:ea typeface="DM Sans Bold" pitchFamily="34" charset="-122"/>
+                <a:cs typeface="DM Sans Bold" pitchFamily="34" charset="-120"/>
+              </a:rPr>
+              <a:t>KG + QA + Frontend</a:t>
+            </a:r>
+            <a:r>
               <a:rPr lang="en-US" sz="1450" dirty="0">
                 <a:solidFill>
                   <a:srgbClr val="454240"/>
@@ -5692,7 +5999,7 @@
                 <a:ea typeface="DM Sans" pitchFamily="34" charset="-122"/>
                 <a:cs typeface="DM Sans" pitchFamily="34" charset="-120"/>
               </a:rPr>
-              <a:t>WHO / EU GDP / ICH · CDC. Thresholds are prototype assumptions.</a:t>
+              <a:t> · Shen Ziyi: KG, QA, API, frontend</a:t>
             </a:r>
             <a:endParaRPr lang="en-US" sz="1450" dirty="0"/>
           </a:p>

--- a/proposal/PharmaColdOps-Proposal-Presentation-Final.pptx
+++ b/proposal/PharmaColdOps-Proposal-Presentation-Final.pptx
@@ -1549,7 +1549,1795 @@
 </p:sld>
 </file>
 
-<file path=ppt/slides/slide10.xml><?xml version="1.0" encoding="utf-8"?>
+<file path=ppt/slides/slide12.xml><?xml version="1.0" encoding="utf-8"?>
+<p:sld xmlns:a="http://schemas.openxmlformats.org/drawingml/2006/main" xmlns:r="http://schemas.openxmlformats.org/officeDocument/2006/relationships" xmlns:p="http://schemas.openxmlformats.org/presentationml/2006/main">
+  <p:cSld>
+    <p:spTree>
+      <p:nvGrpSpPr>
+        <p:cNvPr id="1" name=""/>
+        <p:cNvGrpSpPr/>
+        <p:nvPr/>
+      </p:nvGrpSpPr>
+      <p:grpSpPr>
+        <a:xfrm>
+          <a:off x="0" y="0"/>
+          <a:ext cx="0" cy="0"/>
+          <a:chOff x="0" y="0"/>
+          <a:chExt cx="0" cy="0"/>
+        </a:xfrm>
+      </p:grpSpPr>
+      <p:sp>
+        <p:nvSpPr>
+          <p:cNvPr id="2" name="Text 0"/>
+          <p:cNvSpPr/>
+          <p:nvPr/>
+        </p:nvSpPr>
+        <p:spPr>
+          <a:xfrm>
+            <a:off x="661475" y="729754"/>
+            <a:ext cx="10868745" cy="590649"/>
+          </a:xfrm>
+          <a:prstGeom prst="rect">
+            <a:avLst/>
+          </a:prstGeom>
+          <a:noFill/>
+        </p:spPr>
+        <p:txBody>
+          <a:bodyPr wrap="square" lIns="0" tIns="0" rIns="0" bIns="0" rtlCol="0" anchor="t">
+            <a:normAutofit/>
+          </a:bodyPr>
+          <a:lstStyle/>
+          <a:p>
+            <a:pPr marL="0" indent="0" algn="l">
+              <a:lnSpc>
+                <a:spcPct val="104000"/>
+              </a:lnSpc>
+              <a:buNone/>
+            </a:pPr>
+            <a:r>
+              <a:rPr lang="en-US" sz="3700" dirty="0">
+                <a:solidFill>
+                  <a:srgbClr val="5C4E3D"/>
+                </a:solidFill>
+                <a:latin typeface="Libre Baskerville" panose="02000000000000000000" pitchFamily="34" charset="0"/>
+                <a:ea typeface="Libre Baskerville" panose="02000000000000000000" pitchFamily="34" charset="-122"/>
+                <a:cs typeface="Libre Baskerville" panose="02000000000000000000" pitchFamily="34" charset="-120"/>
+              </a:rPr>
+              <a:t>Risks, Team &amp; Next Steps</a:t>
+            </a:r>
+            <a:endParaRPr lang="en-US" sz="3700" dirty="0"/>
+          </a:p>
+        </p:txBody>
+      </p:sp>
+      <p:sp>
+        <p:nvSpPr>
+          <p:cNvPr id="3" name="Shape 1"/>
+          <p:cNvSpPr/>
+          <p:nvPr/>
+        </p:nvSpPr>
+        <p:spPr>
+          <a:xfrm>
+            <a:off x="525350" y="1603871"/>
+            <a:ext cx="5476043" cy="3102074"/>
+          </a:xfrm>
+          <a:prstGeom prst="roundRect">
+            <a:avLst>
+              <a:gd name="adj" fmla="val 4387"/>
+            </a:avLst>
+          </a:prstGeom>
+          <a:solidFill>
+            <a:srgbClr val="063E5F"/>
+          </a:solidFill>
+        </p:spPr>
+        <p:txBody>
+          <a:bodyPr wrap="square">
+            <a:normAutofit/>
+          </a:bodyPr>
+          <a:p/>
+        </p:txBody>
+      </p:sp>
+      <p:sp>
+        <p:nvSpPr>
+          <p:cNvPr id="4" name="Text 2"/>
+          <p:cNvSpPr/>
+          <p:nvPr/>
+        </p:nvSpPr>
+        <p:spPr>
+          <a:xfrm>
+            <a:off x="714357" y="1792883"/>
+            <a:ext cx="5098029" cy="295275"/>
+          </a:xfrm>
+          <a:prstGeom prst="rect">
+            <a:avLst/>
+          </a:prstGeom>
+          <a:noFill/>
+        </p:spPr>
+        <p:txBody>
+          <a:bodyPr wrap="square" lIns="0" tIns="0" rIns="0" bIns="0" rtlCol="0" anchor="t">
+            <a:normAutofit/>
+          </a:bodyPr>
+          <a:lstStyle/>
+          <a:p>
+            <a:pPr marL="0" indent="0" algn="l">
+              <a:lnSpc>
+                <a:spcPct val="104000"/>
+              </a:lnSpc>
+              <a:buNone/>
+            </a:pPr>
+            <a:r>
+              <a:rPr lang="en-US" sz="1850" dirty="0">
+                <a:solidFill>
+                  <a:srgbClr val="FFFFFF"/>
+                </a:solidFill>
+                <a:latin typeface="Libre Baskerville" panose="02000000000000000000" pitchFamily="34" charset="0"/>
+                <a:ea typeface="Libre Baskerville" panose="02000000000000000000" pitchFamily="34" charset="-122"/>
+                <a:cs typeface="Libre Baskerville" panose="02000000000000000000" pitchFamily="34" charset="-120"/>
+              </a:rPr>
+              <a:t>Risk Mitigations</a:t>
+            </a:r>
+            <a:endParaRPr lang="en-US" sz="1850" dirty="0"/>
+          </a:p>
+        </p:txBody>
+      </p:sp>
+      <p:pic>
+        <p:nvPicPr>
+          <p:cNvPr id="5" name="Image 0" descr="preencoded.png"/>
+          <p:cNvPicPr>
+            <a:picLocks noChangeAspect="1"/>
+          </p:cNvPicPr>
+          <p:nvPr/>
+        </p:nvPicPr>
+        <p:blipFill>
+          <a:blip r:embed="rId1">
+            <a:extLst>
+              <a:ext uri="{96DAC541-7B7A-43D3-8B79-37D633B846F1}">
+                <asvg:svgBlip xmlns:asvg="http://schemas.microsoft.com/office/drawing/2016/SVG/main" r:embed="rId2"/>
+              </a:ext>
+            </a:extLst>
+          </a:blip>
+          <a:stretch>
+            <a:fillRect/>
+          </a:stretch>
+        </p:blipFill>
+        <p:spPr>
+          <a:xfrm>
+            <a:off x="785198" y="2310209"/>
+            <a:ext cx="283461" cy="283468"/>
+          </a:xfrm>
+          <a:prstGeom prst="rect">
+            <a:avLst/>
+          </a:prstGeom>
+        </p:spPr>
+      </p:pic>
+      <p:sp>
+        <p:nvSpPr>
+          <p:cNvPr id="6" name="Text 3"/>
+          <p:cNvSpPr/>
+          <p:nvPr/>
+        </p:nvSpPr>
+        <p:spPr>
+          <a:xfrm>
+            <a:off x="1328605" y="2300784"/>
+            <a:ext cx="1816650" cy="1209675"/>
+          </a:xfrm>
+          <a:prstGeom prst="rect">
+            <a:avLst/>
+          </a:prstGeom>
+          <a:noFill/>
+        </p:spPr>
+        <p:txBody>
+          <a:bodyPr wrap="square" lIns="0" tIns="0" rIns="0" bIns="0" rtlCol="0" anchor="t">
+            <a:normAutofit/>
+          </a:bodyPr>
+          <a:lstStyle/>
+          <a:p>
+            <a:pPr marL="0" indent="0" algn="l">
+              <a:lnSpc>
+                <a:spcPct val="133000"/>
+              </a:lnSpc>
+              <a:buNone/>
+            </a:pPr>
+            <a:r>
+              <a:rPr lang="en-US" sz="1450" b="1" dirty="0">
+                <a:solidFill>
+                  <a:srgbClr val="FFFFFF"/>
+                </a:solidFill>
+                <a:latin typeface="DM Sans Bold" pitchFamily="34" charset="0"/>
+                <a:ea typeface="DM Sans Bold" pitchFamily="34" charset="-122"/>
+                <a:cs typeface="DM Sans Bold" pitchFamily="34" charset="-120"/>
+              </a:rPr>
+              <a:t>Annotator agreement</a:t>
+            </a:r>
+            <a:r>
+              <a:rPr lang="en-US" sz="1450" dirty="0">
+                <a:solidFill>
+                  <a:srgbClr val="FFFFFF"/>
+                </a:solidFill>
+                <a:latin typeface="DM Sans" pitchFamily="34" charset="0"/>
+                <a:ea typeface="DM Sans" pitchFamily="34" charset="-122"/>
+                <a:cs typeface="DM Sans" pitchFamily="34" charset="-120"/>
+              </a:rPr>
+              <a:t> κ = 0.6434 vs our 0.80 target → report it</a:t>
+            </a:r>
+            <a:endParaRPr lang="en-US" sz="1450" dirty="0"/>
+          </a:p>
+        </p:txBody>
+      </p:sp>
+      <p:pic>
+        <p:nvPicPr>
+          <p:cNvPr id="7" name="Image 1" descr="preencoded.png"/>
+          <p:cNvPicPr>
+            <a:picLocks noChangeAspect="1"/>
+          </p:cNvPicPr>
+          <p:nvPr/>
+        </p:nvPicPr>
+        <p:blipFill>
+          <a:blip r:embed="rId1">
+            <a:extLst>
+              <a:ext uri="{96DAC541-7B7A-43D3-8B79-37D633B846F1}">
+                <asvg:svgBlip xmlns:asvg="http://schemas.microsoft.com/office/drawing/2016/SVG/main" r:embed="rId2"/>
+              </a:ext>
+            </a:extLst>
+          </a:blip>
+          <a:stretch>
+            <a:fillRect/>
+          </a:stretch>
+        </p:blipFill>
+        <p:spPr>
+          <a:xfrm>
+            <a:off x="3452329" y="2310209"/>
+            <a:ext cx="283461" cy="283468"/>
+          </a:xfrm>
+          <a:prstGeom prst="rect">
+            <a:avLst/>
+          </a:prstGeom>
+        </p:spPr>
+      </p:pic>
+      <p:sp>
+        <p:nvSpPr>
+          <p:cNvPr id="8" name="Text 4"/>
+          <p:cNvSpPr/>
+          <p:nvPr/>
+        </p:nvSpPr>
+        <p:spPr>
+          <a:xfrm>
+            <a:off x="3995737" y="2300784"/>
+            <a:ext cx="1816650" cy="1209675"/>
+          </a:xfrm>
+          <a:prstGeom prst="rect">
+            <a:avLst/>
+          </a:prstGeom>
+          <a:noFill/>
+        </p:spPr>
+        <p:txBody>
+          <a:bodyPr wrap="square" lIns="0" tIns="0" rIns="0" bIns="0" rtlCol="0" anchor="t">
+            <a:normAutofit/>
+          </a:bodyPr>
+          <a:lstStyle/>
+          <a:p>
+            <a:pPr marL="0" indent="0" algn="l">
+              <a:lnSpc>
+                <a:spcPct val="133000"/>
+              </a:lnSpc>
+              <a:buNone/>
+            </a:pPr>
+            <a:r>
+              <a:rPr lang="en-US" sz="1450" b="1" dirty="0">
+                <a:solidFill>
+                  <a:srgbClr val="FFFFFF"/>
+                </a:solidFill>
+                <a:latin typeface="DM Sans Bold" pitchFamily="34" charset="0"/>
+                <a:ea typeface="DM Sans Bold" pitchFamily="34" charset="-122"/>
+                <a:cs typeface="DM Sans Bold" pitchFamily="34" charset="-120"/>
+              </a:rPr>
+              <a:t>Quarantine recall 0/3</a:t>
+            </a:r>
+            <a:r>
+              <a:rPr lang="en-US" sz="1450" dirty="0">
+                <a:solidFill>
+                  <a:srgbClr val="FFFFFF"/>
+                </a:solidFill>
+                <a:latin typeface="DM Sans" pitchFamily="34" charset="0"/>
+                <a:ea typeface="DM Sans" pitchFamily="34" charset="-122"/>
+                <a:cs typeface="DM Sans" pitchFamily="34" charset="-120"/>
+              </a:rPr>
+              <a:t> 3 gold cases → report support counts</a:t>
+            </a:r>
+            <a:endParaRPr lang="en-US" sz="1450" dirty="0"/>
+          </a:p>
+        </p:txBody>
+      </p:sp>
+      <p:pic>
+        <p:nvPicPr>
+          <p:cNvPr id="9" name="Image 2" descr="preencoded.png"/>
+          <p:cNvPicPr>
+            <a:picLocks noChangeAspect="1"/>
+          </p:cNvPicPr>
+          <p:nvPr/>
+        </p:nvPicPr>
+        <p:blipFill>
+          <a:blip r:embed="rId1">
+            <a:extLst>
+              <a:ext uri="{96DAC541-7B7A-43D3-8B79-37D633B846F1}">
+                <asvg:svgBlip xmlns:asvg="http://schemas.microsoft.com/office/drawing/2016/SVG/main" r:embed="rId2"/>
+              </a:ext>
+            </a:extLst>
+          </a:blip>
+          <a:stretch>
+            <a:fillRect/>
+          </a:stretch>
+        </p:blipFill>
+        <p:spPr>
+          <a:xfrm>
+            <a:off x="785198" y="3897908"/>
+            <a:ext cx="283461" cy="283468"/>
+          </a:xfrm>
+          <a:prstGeom prst="rect">
+            <a:avLst/>
+          </a:prstGeom>
+        </p:spPr>
+      </p:pic>
+      <p:sp>
+        <p:nvSpPr>
+          <p:cNvPr id="10" name="Text 5"/>
+          <p:cNvSpPr/>
+          <p:nvPr/>
+        </p:nvSpPr>
+        <p:spPr>
+          <a:xfrm>
+            <a:off x="1328605" y="3888482"/>
+            <a:ext cx="4483782" cy="604838"/>
+          </a:xfrm>
+          <a:prstGeom prst="rect">
+            <a:avLst/>
+          </a:prstGeom>
+          <a:noFill/>
+        </p:spPr>
+        <p:txBody>
+          <a:bodyPr wrap="square" lIns="0" tIns="0" rIns="0" bIns="0" rtlCol="0" anchor="t">
+            <a:normAutofit/>
+          </a:bodyPr>
+          <a:lstStyle/>
+          <a:p>
+            <a:pPr marL="0" indent="0" algn="l">
+              <a:lnSpc>
+                <a:spcPct val="133000"/>
+              </a:lnSpc>
+              <a:buNone/>
+            </a:pPr>
+            <a:r>
+              <a:rPr lang="en-US" sz="1450" b="1" dirty="0">
+                <a:solidFill>
+                  <a:srgbClr val="FFFFFF"/>
+                </a:solidFill>
+                <a:latin typeface="DM Sans Bold" pitchFamily="34" charset="0"/>
+                <a:ea typeface="DM Sans Bold" pitchFamily="34" charset="-122"/>
+                <a:cs typeface="DM Sans Bold" pitchFamily="34" charset="-120"/>
+              </a:rPr>
+              <a:t>Synthetic data</a:t>
+            </a:r>
+            <a:r>
+              <a:rPr lang="en-US" sz="1450" dirty="0">
+                <a:solidFill>
+                  <a:srgbClr val="FFFFFF"/>
+                </a:solidFill>
+                <a:latin typeface="DM Sans" pitchFamily="34" charset="0"/>
+                <a:ea typeface="DM Sans" pitchFamily="34" charset="-122"/>
+                <a:cs typeface="DM Sans" pitchFamily="34" charset="-120"/>
+              </a:rPr>
+              <a:t> suspected-synthetic → disclose the limit</a:t>
+            </a:r>
+            <a:endParaRPr lang="en-US" sz="1450" dirty="0"/>
+          </a:p>
+        </p:txBody>
+      </p:sp>
+      <p:sp>
+        <p:nvSpPr>
+          <p:cNvPr id="11" name="Text 6"/>
+          <p:cNvSpPr/>
+          <p:nvPr/>
+        </p:nvSpPr>
+        <p:spPr>
+          <a:xfrm>
+            <a:off x="6332776" y="1792883"/>
+            <a:ext cx="5203794" cy="295275"/>
+          </a:xfrm>
+          <a:prstGeom prst="rect">
+            <a:avLst/>
+          </a:prstGeom>
+          <a:noFill/>
+        </p:spPr>
+        <p:txBody>
+          <a:bodyPr wrap="square" lIns="0" tIns="0" rIns="0" bIns="0" rtlCol="0" anchor="t">
+            <a:normAutofit/>
+          </a:bodyPr>
+          <a:lstStyle/>
+          <a:p>
+            <a:pPr marL="0" indent="0" algn="l">
+              <a:lnSpc>
+                <a:spcPct val="104000"/>
+              </a:lnSpc>
+              <a:buNone/>
+            </a:pPr>
+            <a:r>
+              <a:rPr lang="en-US" sz="1850" dirty="0">
+                <a:solidFill>
+                  <a:srgbClr val="5C4E3D"/>
+                </a:solidFill>
+                <a:latin typeface="Libre Baskerville" panose="02000000000000000000" pitchFamily="34" charset="0"/>
+                <a:ea typeface="Libre Baskerville" panose="02000000000000000000" pitchFamily="34" charset="-122"/>
+                <a:cs typeface="Libre Baskerville" panose="02000000000000000000" pitchFamily="34" charset="-120"/>
+              </a:rPr>
+              <a:t>Team Roles</a:t>
+            </a:r>
+            <a:endParaRPr lang="en-US" sz="1850" dirty="0"/>
+          </a:p>
+        </p:txBody>
+      </p:sp>
+      <p:sp>
+        <p:nvSpPr>
+          <p:cNvPr id="12" name="Shape 7"/>
+          <p:cNvSpPr/>
+          <p:nvPr/>
+        </p:nvSpPr>
+        <p:spPr>
+          <a:xfrm>
+            <a:off x="6332776" y="2348012"/>
+            <a:ext cx="5203794" cy="25400"/>
+          </a:xfrm>
+          <a:prstGeom prst="roundRect">
+            <a:avLst>
+              <a:gd name="adj" fmla="val 49999"/>
+            </a:avLst>
+          </a:prstGeom>
+          <a:solidFill>
+            <a:srgbClr val="454240">
+              <a:alpha val="50000"/>
+            </a:srgbClr>
+          </a:solidFill>
+        </p:spPr>
+        <p:txBody>
+          <a:bodyPr wrap="square">
+            <a:normAutofit/>
+          </a:bodyPr>
+          <a:p/>
+        </p:txBody>
+      </p:sp>
+      <p:sp>
+        <p:nvSpPr>
+          <p:cNvPr id="13" name="Text 8"/>
+          <p:cNvSpPr/>
+          <p:nvPr/>
+        </p:nvSpPr>
+        <p:spPr>
+          <a:xfrm>
+            <a:off x="6332776" y="2633266"/>
+            <a:ext cx="5203794" cy="295275"/>
+          </a:xfrm>
+          <a:prstGeom prst="rect">
+            <a:avLst/>
+          </a:prstGeom>
+          <a:noFill/>
+        </p:spPr>
+        <p:txBody>
+          <a:bodyPr wrap="square" lIns="0" tIns="0" rIns="0" bIns="0" rtlCol="0" anchor="t">
+            <a:normAutofit/>
+          </a:bodyPr>
+          <a:lstStyle/>
+          <a:p>
+            <a:pPr marL="0" indent="0" algn="l">
+              <a:lnSpc>
+                <a:spcPct val="104000"/>
+              </a:lnSpc>
+              <a:buNone/>
+            </a:pPr>
+            <a:r>
+              <a:rPr lang="en-US" sz="1850" dirty="0">
+                <a:solidFill>
+                  <a:srgbClr val="5C4E3D"/>
+                </a:solidFill>
+                <a:latin typeface="Libre Baskerville" panose="02000000000000000000" pitchFamily="34" charset="0"/>
+                <a:ea typeface="Libre Baskerville" panose="02000000000000000000" pitchFamily="34" charset="-122"/>
+                <a:cs typeface="Libre Baskerville" panose="02000000000000000000" pitchFamily="34" charset="-120"/>
+              </a:rPr>
+              <a:t>Immediate Next Steps</a:t>
+            </a:r>
+            <a:endParaRPr lang="en-US" sz="1850" dirty="0"/>
+          </a:p>
+        </p:txBody>
+      </p:sp>
+      <p:sp>
+        <p:nvSpPr>
+          <p:cNvPr id="14" name="Text 9"/>
+          <p:cNvSpPr/>
+          <p:nvPr/>
+        </p:nvSpPr>
+        <p:spPr>
+          <a:xfrm>
+            <a:off x="6332776" y="3117552"/>
+            <a:ext cx="5203794" cy="1039416"/>
+          </a:xfrm>
+          <a:prstGeom prst="rect">
+            <a:avLst/>
+          </a:prstGeom>
+          <a:noFill/>
+        </p:spPr>
+        <p:txBody>
+          <a:bodyPr wrap="square" lIns="0" tIns="0" rIns="0" bIns="0" rtlCol="0" anchor="t">
+            <a:normAutofit/>
+          </a:bodyPr>
+          <a:lstStyle/>
+          <a:p>
+            <a:pPr marL="294640" indent="-294640" algn="l">
+              <a:lnSpc>
+                <a:spcPct val="133000"/>
+              </a:lnSpc>
+              <a:buSzPct val="100000"/>
+              <a:buChar char="•"/>
+            </a:pPr>
+            <a:r>
+              <a:rPr lang="en-US" sz="1450" dirty="0">
+                <a:solidFill>
+                  <a:srgbClr val="454240"/>
+                </a:solidFill>
+                <a:latin typeface="DM Sans" pitchFamily="34" charset="0"/>
+                <a:ea typeface="DM Sans" pitchFamily="34" charset="-122"/>
+                <a:cs typeface="DM Sans" pitchFamily="34" charset="-120"/>
+              </a:rPr>
+              <a:t>W1: threshold review; multi-fold risk experiments</a:t>
+            </a:r>
+            <a:endParaRPr lang="en-US" sz="1450" dirty="0"/>
+          </a:p>
+          <a:p>
+            <a:pPr marL="294640" indent="-294640" algn="l">
+              <a:lnSpc>
+                <a:spcPct val="133000"/>
+              </a:lnSpc>
+              <a:buSzPct val="100000"/>
+              <a:buChar char="•"/>
+            </a:pPr>
+            <a:r>
+              <a:rPr lang="en-US" sz="1450" dirty="0">
+                <a:solidFill>
+                  <a:srgbClr val="454240"/>
+                </a:solidFill>
+                <a:latin typeface="DM Sans" pitchFamily="34" charset="0"/>
+                <a:ea typeface="DM Sans" pitchFamily="34" charset="-122"/>
+                <a:cs typeface="DM Sans" pitchFamily="34" charset="-120"/>
+              </a:rPr>
+              <a:t>W3: integrated acceptance and failure states</a:t>
+            </a:r>
+            <a:endParaRPr lang="en-US" sz="1450" dirty="0"/>
+          </a:p>
+          <a:p>
+            <a:pPr marL="294640" indent="-294640" algn="l">
+              <a:lnSpc>
+                <a:spcPct val="133000"/>
+              </a:lnSpc>
+              <a:buSzPct val="100000"/>
+              <a:buChar char="•"/>
+            </a:pPr>
+            <a:r>
+              <a:rPr lang="en-US" sz="1450" dirty="0">
+                <a:solidFill>
+                  <a:srgbClr val="454240"/>
+                </a:solidFill>
+                <a:latin typeface="DM Sans" pitchFamily="34" charset="0"/>
+                <a:ea typeface="DM Sans" pitchFamily="34" charset="-122"/>
+                <a:cs typeface="DM Sans" pitchFamily="34" charset="-120"/>
+              </a:rPr>
+              <a:t>W5: reproduce cleanly; videos by 25 Oct</a:t>
+            </a:r>
+            <a:endParaRPr lang="en-US" sz="1450" dirty="0"/>
+          </a:p>
+        </p:txBody>
+      </p:sp>
+      <p:pic>
+        <p:nvPicPr>
+          <p:cNvPr id="15" name="Image 3" descr="preencoded.png"/>
+          <p:cNvPicPr>
+            <a:picLocks noChangeAspect="1"/>
+          </p:cNvPicPr>
+          <p:nvPr/>
+        </p:nvPicPr>
+        <p:blipFill>
+          <a:blip r:embed="rId3">
+            <a:extLst>
+              <a:ext uri="{96DAC541-7B7A-43D3-8B79-37D633B846F1}">
+                <asvg:svgBlip xmlns:asvg="http://schemas.microsoft.com/office/drawing/2016/SVG/main" r:embed="rId4"/>
+              </a:ext>
+            </a:extLst>
+          </a:blip>
+          <a:stretch>
+            <a:fillRect/>
+          </a:stretch>
+        </p:blipFill>
+        <p:spPr>
+          <a:xfrm>
+            <a:off x="636075" y="4893171"/>
+            <a:ext cx="2565336" cy="1260475"/>
+          </a:xfrm>
+          <a:prstGeom prst="rect">
+            <a:avLst/>
+          </a:prstGeom>
+        </p:spPr>
+      </p:pic>
+      <p:sp>
+        <p:nvSpPr>
+          <p:cNvPr id="16" name="Text 10"/>
+          <p:cNvSpPr/>
+          <p:nvPr/>
+        </p:nvSpPr>
+        <p:spPr>
+          <a:xfrm>
+            <a:off x="901281" y="4918571"/>
+            <a:ext cx="2300131" cy="1209675"/>
+          </a:xfrm>
+          <a:prstGeom prst="rect">
+            <a:avLst/>
+          </a:prstGeom>
+          <a:noFill/>
+        </p:spPr>
+        <p:txBody>
+          <a:bodyPr wrap="square" lIns="0" tIns="0" rIns="0" bIns="0" rtlCol="0" anchor="t">
+            <a:normAutofit/>
+          </a:bodyPr>
+          <a:lstStyle/>
+          <a:p>
+            <a:pPr marL="0" indent="0" algn="l">
+              <a:lnSpc>
+                <a:spcPct val="133000"/>
+              </a:lnSpc>
+              <a:buNone/>
+            </a:pPr>
+            <a:r>
+              <a:rPr lang="en-US" sz="1450" b="1" dirty="0">
+                <a:solidFill>
+                  <a:srgbClr val="454240"/>
+                </a:solidFill>
+                <a:latin typeface="DM Sans Bold" pitchFamily="34" charset="0"/>
+                <a:ea typeface="DM Sans Bold" pitchFamily="34" charset="-122"/>
+                <a:cs typeface="DM Sans Bold" pitchFamily="34" charset="-120"/>
+              </a:rPr>
+              <a:t>Project Lead / Rules</a:t>
+            </a:r>
+            <a:r>
+              <a:rPr lang="en-US" sz="1450" dirty="0">
+                <a:solidFill>
+                  <a:srgbClr val="454240"/>
+                </a:solidFill>
+                <a:latin typeface="DM Sans" pitchFamily="34" charset="0"/>
+                <a:ea typeface="DM Sans" pitchFamily="34" charset="-122"/>
+                <a:cs typeface="DM Sans" pitchFamily="34" charset="-120"/>
+              </a:rPr>
+              <a:t> · Xu Wenzhe: rules, evidence, evaluation</a:t>
+            </a:r>
+            <a:endParaRPr lang="en-US" sz="1450" dirty="0"/>
+          </a:p>
+        </p:txBody>
+      </p:sp>
+      <p:pic>
+        <p:nvPicPr>
+          <p:cNvPr id="17" name="Image 4" descr="preencoded.png"/>
+          <p:cNvPicPr>
+            <a:picLocks noChangeAspect="1"/>
+          </p:cNvPicPr>
+          <p:nvPr/>
+        </p:nvPicPr>
+        <p:blipFill>
+          <a:blip r:embed="rId5">
+            <a:extLst>
+              <a:ext uri="{96DAC541-7B7A-43D3-8B79-37D633B846F1}">
+                <asvg:svgBlip xmlns:asvg="http://schemas.microsoft.com/office/drawing/2016/SVG/main" r:embed="rId6"/>
+              </a:ext>
+            </a:extLst>
+          </a:blip>
+          <a:stretch>
+            <a:fillRect/>
+          </a:stretch>
+        </p:blipFill>
+        <p:spPr>
+          <a:xfrm>
+            <a:off x="3412246" y="4893171"/>
+            <a:ext cx="2565435" cy="1260475"/>
+          </a:xfrm>
+          <a:prstGeom prst="rect">
+            <a:avLst/>
+          </a:prstGeom>
+        </p:spPr>
+      </p:pic>
+      <p:sp>
+        <p:nvSpPr>
+          <p:cNvPr id="18" name="Text 11"/>
+          <p:cNvSpPr/>
+          <p:nvPr/>
+        </p:nvSpPr>
+        <p:spPr>
+          <a:xfrm>
+            <a:off x="3677451" y="4918571"/>
+            <a:ext cx="2300230" cy="907256"/>
+          </a:xfrm>
+          <a:prstGeom prst="rect">
+            <a:avLst/>
+          </a:prstGeom>
+          <a:noFill/>
+        </p:spPr>
+        <p:txBody>
+          <a:bodyPr wrap="square" lIns="0" tIns="0" rIns="0" bIns="0" rtlCol="0" anchor="t">
+            <a:normAutofit/>
+          </a:bodyPr>
+          <a:lstStyle/>
+          <a:p>
+            <a:pPr marL="0" indent="0" algn="l">
+              <a:lnSpc>
+                <a:spcPct val="133000"/>
+              </a:lnSpc>
+              <a:buNone/>
+            </a:pPr>
+            <a:r>
+              <a:rPr lang="en-US" sz="1450" b="1" dirty="0">
+                <a:solidFill>
+                  <a:srgbClr val="454240"/>
+                </a:solidFill>
+                <a:latin typeface="DM Sans Bold" pitchFamily="34" charset="0"/>
+                <a:ea typeface="DM Sans Bold" pitchFamily="34" charset="-122"/>
+                <a:cs typeface="DM Sans Bold" pitchFamily="34" charset="-120"/>
+              </a:rPr>
+              <a:t>Data &amp; ML</a:t>
+            </a:r>
+            <a:r>
+              <a:rPr lang="en-US" sz="1450" dirty="0">
+                <a:solidFill>
+                  <a:srgbClr val="454240"/>
+                </a:solidFill>
+                <a:latin typeface="DM Sans" pitchFamily="34" charset="0"/>
+                <a:ea typeface="DM Sans" pitchFamily="34" charset="-122"/>
+                <a:cs typeface="DM Sans" pitchFamily="34" charset="-120"/>
+              </a:rPr>
+              <a:t> · Zhu Jianyu: data, risk, causes, SHAP</a:t>
+            </a:r>
+            <a:endParaRPr lang="en-US" sz="1450" dirty="0"/>
+          </a:p>
+        </p:txBody>
+      </p:sp>
+      <p:pic>
+        <p:nvPicPr>
+          <p:cNvPr id="19" name="Image 5" descr="preencoded.png"/>
+          <p:cNvPicPr>
+            <a:picLocks noChangeAspect="1"/>
+          </p:cNvPicPr>
+          <p:nvPr/>
+        </p:nvPicPr>
+        <p:blipFill>
+          <a:blip r:embed="rId5">
+            <a:extLst>
+              <a:ext uri="{96DAC541-7B7A-43D3-8B79-37D633B846F1}">
+                <asvg:svgBlip xmlns:asvg="http://schemas.microsoft.com/office/drawing/2016/SVG/main" r:embed="rId6"/>
+              </a:ext>
+            </a:extLst>
+          </a:blip>
+          <a:stretch>
+            <a:fillRect/>
+          </a:stretch>
+        </p:blipFill>
+        <p:spPr>
+          <a:xfrm>
+            <a:off x="6188515" y="4893171"/>
+            <a:ext cx="2565435" cy="1260475"/>
+          </a:xfrm>
+          <a:prstGeom prst="rect">
+            <a:avLst/>
+          </a:prstGeom>
+        </p:spPr>
+      </p:pic>
+      <p:sp>
+        <p:nvSpPr>
+          <p:cNvPr id="20" name="Text 12"/>
+          <p:cNvSpPr/>
+          <p:nvPr/>
+        </p:nvSpPr>
+        <p:spPr>
+          <a:xfrm>
+            <a:off x="6453721" y="4918571"/>
+            <a:ext cx="2300230" cy="907256"/>
+          </a:xfrm>
+          <a:prstGeom prst="rect">
+            <a:avLst/>
+          </a:prstGeom>
+          <a:noFill/>
+        </p:spPr>
+        <p:txBody>
+          <a:bodyPr wrap="square" lIns="0" tIns="0" rIns="0" bIns="0" rtlCol="0" anchor="t">
+            <a:normAutofit/>
+          </a:bodyPr>
+          <a:lstStyle/>
+          <a:p>
+            <a:pPr marL="0" indent="0" algn="l">
+              <a:lnSpc>
+                <a:spcPct val="133000"/>
+              </a:lnSpc>
+              <a:buNone/>
+            </a:pPr>
+            <a:r>
+              <a:rPr lang="en-US" sz="1450" b="1" dirty="0">
+                <a:solidFill>
+                  <a:srgbClr val="454240"/>
+                </a:solidFill>
+                <a:latin typeface="DM Sans Bold" pitchFamily="34" charset="0"/>
+                <a:ea typeface="DM Sans Bold" pitchFamily="34" charset="-122"/>
+                <a:cs typeface="DM Sans Bold" pitchFamily="34" charset="-120"/>
+              </a:rPr>
+              <a:t>Optimisation</a:t>
+            </a:r>
+            <a:r>
+              <a:rPr lang="en-US" sz="1450" dirty="0">
+                <a:solidFill>
+                  <a:srgbClr val="454240"/>
+                </a:solidFill>
+                <a:latin typeface="DM Sans" pitchFamily="34" charset="0"/>
+                <a:ea typeface="DM Sans" pitchFamily="34" charset="-122"/>
+                <a:cs typeface="DM Sans" pitchFamily="34" charset="-120"/>
+              </a:rPr>
+              <a:t> · Wang Lepeng: VRPTW, routes, dispatch</a:t>
+            </a:r>
+            <a:endParaRPr lang="en-US" sz="1450" dirty="0"/>
+          </a:p>
+        </p:txBody>
+      </p:sp>
+      <p:pic>
+        <p:nvPicPr>
+          <p:cNvPr id="21" name="Image 6" descr="preencoded.png"/>
+          <p:cNvPicPr>
+            <a:picLocks noChangeAspect="1"/>
+          </p:cNvPicPr>
+          <p:nvPr/>
+        </p:nvPicPr>
+        <p:blipFill>
+          <a:blip r:embed="rId5">
+            <a:extLst>
+              <a:ext uri="{96DAC541-7B7A-43D3-8B79-37D633B846F1}">
+                <asvg:svgBlip xmlns:asvg="http://schemas.microsoft.com/office/drawing/2016/SVG/main" r:embed="rId6"/>
+              </a:ext>
+            </a:extLst>
+          </a:blip>
+          <a:stretch>
+            <a:fillRect/>
+          </a:stretch>
+        </p:blipFill>
+        <p:spPr>
+          <a:xfrm>
+            <a:off x="8964785" y="4893171"/>
+            <a:ext cx="2565435" cy="1260475"/>
+          </a:xfrm>
+          <a:prstGeom prst="rect">
+            <a:avLst/>
+          </a:prstGeom>
+        </p:spPr>
+      </p:pic>
+      <p:sp>
+        <p:nvSpPr>
+          <p:cNvPr id="22" name="Text 13"/>
+          <p:cNvSpPr/>
+          <p:nvPr/>
+        </p:nvSpPr>
+        <p:spPr>
+          <a:xfrm>
+            <a:off x="9229990" y="4918571"/>
+            <a:ext cx="2300230" cy="1209675"/>
+          </a:xfrm>
+          <a:prstGeom prst="rect">
+            <a:avLst/>
+          </a:prstGeom>
+          <a:noFill/>
+        </p:spPr>
+        <p:txBody>
+          <a:bodyPr wrap="square" lIns="0" tIns="0" rIns="0" bIns="0" rtlCol="0" anchor="t">
+            <a:normAutofit/>
+          </a:bodyPr>
+          <a:lstStyle/>
+          <a:p>
+            <a:pPr marL="0" indent="0" algn="l">
+              <a:lnSpc>
+                <a:spcPct val="133000"/>
+              </a:lnSpc>
+              <a:buNone/>
+            </a:pPr>
+            <a:r>
+              <a:rPr lang="en-US" sz="1450" b="1" dirty="0">
+                <a:solidFill>
+                  <a:srgbClr val="454240"/>
+                </a:solidFill>
+                <a:latin typeface="DM Sans Bold" pitchFamily="34" charset="0"/>
+                <a:ea typeface="DM Sans Bold" pitchFamily="34" charset="-122"/>
+                <a:cs typeface="DM Sans Bold" pitchFamily="34" charset="-120"/>
+              </a:rPr>
+              <a:t>KG + QA + Frontend</a:t>
+            </a:r>
+            <a:r>
+              <a:rPr lang="en-US" sz="1450" dirty="0">
+                <a:solidFill>
+                  <a:srgbClr val="454240"/>
+                </a:solidFill>
+                <a:latin typeface="DM Sans" pitchFamily="34" charset="0"/>
+                <a:ea typeface="DM Sans" pitchFamily="34" charset="-122"/>
+                <a:cs typeface="DM Sans" pitchFamily="34" charset="-120"/>
+              </a:rPr>
+              <a:t> · Shen Ziyi: KG, QA, API, frontend</a:t>
+            </a:r>
+            <a:endParaRPr lang="en-US" sz="1450" dirty="0"/>
+          </a:p>
+        </p:txBody>
+      </p:sp>
+    </p:spTree>
+  </p:cSld>
+  <p:clrMapOvr>
+    <a:masterClrMapping/>
+  </p:clrMapOvr>
+</p:sld>
+</file>
+
+<file path=ppt/slides/slide13.xml><?xml version="1.0" encoding="utf-8"?>
+<p:sld xmlns:a="http://schemas.openxmlformats.org/drawingml/2006/main" xmlns:p="http://schemas.openxmlformats.org/presentationml/2006/main" xmlns:r="http://schemas.openxmlformats.org/officeDocument/2006/relationships">
+  <p:cSld>
+    <p:spTree>
+      <p:nvGrpSpPr>
+        <p:cNvPr id="1" name=""/>
+        <p:cNvGrpSpPr/>
+        <p:nvPr/>
+      </p:nvGrpSpPr>
+      <p:grpSpPr/>
+      <p:sp>
+        <p:nvSpPr>
+          <p:cNvPr id="2" name="TextBox 1"/>
+          <p:cNvSpPr txBox="1"/>
+          <p:nvPr/>
+        </p:nvSpPr>
+        <p:spPr>
+          <a:xfrm>
+            <a:off x="566928" y="365760"/>
+            <a:ext cx="11064240" cy="868680"/>
+          </a:xfrm>
+          <a:prstGeom prst="rect">
+            <a:avLst/>
+          </a:prstGeom>
+          <a:noFill/>
+        </p:spPr>
+        <p:txBody>
+          <a:bodyPr wrap="square" anchor="t">
+            <a:normAutofit/>
+          </a:bodyPr>
+          <a:lstStyle/>
+          <a:p>
+            <a:r>
+              <a:rPr sz="3700" b="0" i="0">
+                <a:solidFill>
+                  <a:srgbClr val="454240"/>
+                </a:solidFill>
+                <a:latin typeface="Libre Baskerville"/>
+                <a:ea typeface="Libre Baskerville"/>
+                <a:cs typeface="Libre Baskerville"/>
+              </a:rPr>
+              <a:t>Where PharmaColdOps Sits</a:t>
+            </a:r>
+          </a:p>
+        </p:txBody>
+      </p:sp>
+      <p:sp>
+        <p:nvSpPr>
+          <p:cNvPr id="3" name="TextBox 2"/>
+          <p:cNvSpPr txBox="1"/>
+          <p:nvPr/>
+        </p:nvSpPr>
+        <p:spPr>
+          <a:xfrm>
+            <a:off x="603504" y="1170432"/>
+            <a:ext cx="11064240" cy="365760"/>
+          </a:xfrm>
+          <a:prstGeom prst="rect">
+            <a:avLst/>
+          </a:prstGeom>
+          <a:noFill/>
+        </p:spPr>
+        <p:txBody>
+          <a:bodyPr wrap="square" anchor="t">
+            <a:normAutofit/>
+          </a:bodyPr>
+          <a:lstStyle/>
+          <a:p>
+            <a:r>
+              <a:rPr sz="1150" b="0" i="0">
+                <a:solidFill>
+                  <a:srgbClr val="5C4E3D"/>
+                </a:solidFill>
+                <a:latin typeface="DM Sans"/>
+                <a:ea typeface="DM Sans"/>
+                <a:cs typeface="DM Sans"/>
+              </a:rPr>
+              <a:t>Positioning · market context and related work</a:t>
+            </a:r>
+          </a:p>
+        </p:txBody>
+      </p:sp>
+      <p:sp>
+        <p:nvSpPr>
+          <p:cNvPr id="4" name="Rectangle 3"/>
+          <p:cNvSpPr/>
+          <p:nvPr/>
+        </p:nvSpPr>
+        <p:spPr>
+          <a:xfrm>
+            <a:off x="566928" y="1097280"/>
+            <a:ext cx="2011680" cy="20320"/>
+          </a:xfrm>
+          <a:prstGeom prst="rect">
+            <a:avLst/>
+          </a:prstGeom>
+          <a:solidFill>
+            <a:srgbClr val="B88E23"/>
+          </a:solidFill>
+          <a:ln>
+            <a:noFill/>
+          </a:ln>
+          <a:effectLst/>
+        </p:spPr>
+        <p:style>
+          <a:lnRef idx="1">
+            <a:schemeClr val="accent1"/>
+          </a:lnRef>
+          <a:fillRef idx="3">
+            <a:schemeClr val="accent1"/>
+          </a:fillRef>
+          <a:effectRef idx="2">
+            <a:schemeClr val="accent1"/>
+          </a:effectRef>
+          <a:fontRef idx="minor">
+            <a:schemeClr val="lt1"/>
+          </a:fontRef>
+        </p:style>
+        <p:txBody>
+          <a:bodyPr rtlCol="0" anchor="ctr" wrap="square">
+            <a:normAutofit/>
+          </a:bodyPr>
+          <a:lstStyle/>
+          <a:p>
+            <a:pPr algn="ctr"/>
+          </a:p>
+        </p:txBody>
+      </p:sp>
+      <p:sp>
+        <p:nvSpPr>
+          <p:cNvPr id="5" name="TextBox 3"/>
+          <p:cNvSpPr txBox="1"/>
+          <p:nvPr/>
+        </p:nvSpPr>
+        <p:spPr>
+          <a:xfrm>
+            <a:off x="566928" y="1600200"/>
+            <a:ext cx="11064240" cy="4572000"/>
+          </a:xfrm>
+          <a:prstGeom prst="rect">
+            <a:avLst/>
+          </a:prstGeom>
+          <a:noFill/>
+        </p:spPr>
+        <p:txBody>
+          <a:bodyPr wrap="square" anchor="t">
+            <a:normAutofit/>
+          </a:bodyPr>
+          <a:lstStyle/>
+          <a:p>
+            <a:pPr>
+              <a:spcAft>
+                <a:spcPts val="1400"/>
+              </a:spcAft>
+            </a:pPr>
+            <a:r>
+              <a:rPr sz="1700" b="0" i="0">
+                <a:solidFill>
+                  <a:srgbClr val="454240"/>
+                </a:solidFill>
+                <a:latin typeface="DM Sans"/>
+                <a:ea typeface="DM Sans"/>
+                <a:cs typeface="DM Sans"/>
+              </a:rPr>
+              <a:t>● Commercial platforms already monitor temperature and automate parts of the quality process — we do not claim to be first.</a:t>
+            </a:r>
+          </a:p>
+          <a:p>
+            <a:pPr>
+              <a:spcAft>
+                <a:spcPts val="1400"/>
+              </a:spcAft>
+            </a:pPr>
+            <a:r>
+              <a:rPr sz="1700" b="0" i="0">
+                <a:solidFill>
+                  <a:srgbClr val="454240"/>
+                </a:solidFill>
+                <a:latin typeface="DM Sans"/>
+                <a:ea typeface="DM Sans"/>
+                <a:cs typeface="DM Sans"/>
+              </a:rPr>
+              <a:t>● We build on existing foundations: Solomon's VRPTW benchmark, OR-Tools, gradient-boosted trees, SHAP.</a:t>
+            </a:r>
+          </a:p>
+          <a:p>
+            <a:pPr>
+              <a:spcAft>
+                <a:spcPts val="1400"/>
+              </a:spcAft>
+            </a:pPr>
+            <a:r>
+              <a:rPr sz="1700" b="0" i="0">
+                <a:solidFill>
+                  <a:srgbClr val="454240"/>
+                </a:solidFill>
+                <a:latin typeface="DM Sans"/>
+                <a:ea typeface="DM Sans"/>
+                <a:cs typeface="DM Sans"/>
+              </a:rPr>
+              <a:t>● The gap we address is the unbroken, inspectable chain from event to disposition to order to route to cited evidence.</a:t>
+            </a:r>
+          </a:p>
+        </p:txBody>
+      </p:sp>
+      <p:sp>
+        <p:nvSpPr>
+          <p:cNvPr id="6" name="TextBox 4"/>
+          <p:cNvSpPr txBox="1"/>
+          <p:nvPr/>
+        </p:nvSpPr>
+        <p:spPr>
+          <a:xfrm>
+            <a:off x="566928" y="6263640"/>
+            <a:ext cx="11064240" cy="365760"/>
+          </a:xfrm>
+          <a:prstGeom prst="rect">
+            <a:avLst/>
+          </a:prstGeom>
+          <a:noFill/>
+        </p:spPr>
+        <p:txBody>
+          <a:bodyPr wrap="square" anchor="t">
+            <a:normAutofit/>
+          </a:bodyPr>
+          <a:lstStyle/>
+          <a:p>
+            <a:r>
+              <a:rPr sz="1050" b="0" i="1">
+                <a:solidFill>
+                  <a:srgbClr val="5C4E3D"/>
+                </a:solidFill>
+                <a:latin typeface="DM Sans"/>
+                <a:ea typeface="DM Sans"/>
+                <a:cs typeface="DM Sans"/>
+              </a:rPr>
+              <a:t>Proposal §3.2–3.3 · Figure 1. Market value still requires user interviews and operational data.</a:t>
+            </a:r>
+          </a:p>
+        </p:txBody>
+      </p:sp>
+    </p:spTree>
+  </p:cSld>
+  <p:clrMapOvr>
+    <a:masterClrMapping/>
+  </p:clrMapOvr>
+</p:sld>
+</file>
+
+<file path=ppt/slides/slide14.xml><?xml version="1.0" encoding="utf-8"?>
+<p:sld xmlns:a="http://schemas.openxmlformats.org/drawingml/2006/main" xmlns:p="http://schemas.openxmlformats.org/presentationml/2006/main" xmlns:r="http://schemas.openxmlformats.org/officeDocument/2006/relationships">
+  <p:cSld>
+    <p:spTree>
+      <p:nvGrpSpPr>
+        <p:cNvPr id="1" name=""/>
+        <p:cNvGrpSpPr/>
+        <p:nvPr/>
+      </p:nvGrpSpPr>
+      <p:grpSpPr/>
+      <p:sp>
+        <p:nvSpPr>
+          <p:cNvPr id="2" name="TextBox 1"/>
+          <p:cNvSpPr txBox="1"/>
+          <p:nvPr/>
+        </p:nvSpPr>
+        <p:spPr>
+          <a:xfrm>
+            <a:off x="566928" y="365760"/>
+            <a:ext cx="11064240" cy="868680"/>
+          </a:xfrm>
+          <a:prstGeom prst="rect">
+            <a:avLst/>
+          </a:prstGeom>
+          <a:noFill/>
+        </p:spPr>
+        <p:txBody>
+          <a:bodyPr wrap="square" anchor="t">
+            <a:normAutofit/>
+          </a:bodyPr>
+          <a:lstStyle/>
+          <a:p>
+            <a:r>
+              <a:rPr sz="3700" b="0" i="0">
+                <a:solidFill>
+                  <a:srgbClr val="454240"/>
+                </a:solidFill>
+                <a:latin typeface="Libre Baskerville"/>
+                <a:ea typeface="Libre Baskerville"/>
+                <a:cs typeface="Libre Baskerville"/>
+              </a:rPr>
+              <a:t>Built and Running Today</a:t>
+            </a:r>
+          </a:p>
+        </p:txBody>
+      </p:sp>
+      <p:sp>
+        <p:nvSpPr>
+          <p:cNvPr id="3" name="TextBox 2"/>
+          <p:cNvSpPr txBox="1"/>
+          <p:nvPr/>
+        </p:nvSpPr>
+        <p:spPr>
+          <a:xfrm>
+            <a:off x="603504" y="1170432"/>
+            <a:ext cx="11064240" cy="365760"/>
+          </a:xfrm>
+          <a:prstGeom prst="rect">
+            <a:avLst/>
+          </a:prstGeom>
+          <a:noFill/>
+        </p:spPr>
+        <p:txBody>
+          <a:bodyPr wrap="square" anchor="t">
+            <a:normAutofit/>
+          </a:bodyPr>
+          <a:lstStyle/>
+          <a:p>
+            <a:r>
+              <a:rPr sz="1150" b="0" i="0">
+                <a:solidFill>
+                  <a:srgbClr val="5C4E3D"/>
+                </a:solidFill>
+                <a:latin typeface="DM Sans"/>
+                <a:ea typeface="DM Sans"/>
+                <a:cs typeface="DM Sans"/>
+              </a:rPr>
+              <a:t>Measured from the repository, 2026-09-27</a:t>
+            </a:r>
+          </a:p>
+        </p:txBody>
+      </p:sp>
+      <p:sp>
+        <p:nvSpPr>
+          <p:cNvPr id="4" name="Rectangle 3"/>
+          <p:cNvSpPr/>
+          <p:nvPr/>
+        </p:nvSpPr>
+        <p:spPr>
+          <a:xfrm>
+            <a:off x="566928" y="1097280"/>
+            <a:ext cx="2011680" cy="20320"/>
+          </a:xfrm>
+          <a:prstGeom prst="rect">
+            <a:avLst/>
+          </a:prstGeom>
+          <a:solidFill>
+            <a:srgbClr val="B88E23"/>
+          </a:solidFill>
+          <a:ln>
+            <a:noFill/>
+          </a:ln>
+          <a:effectLst/>
+        </p:spPr>
+        <p:style>
+          <a:lnRef idx="1">
+            <a:schemeClr val="accent1"/>
+          </a:lnRef>
+          <a:fillRef idx="3">
+            <a:schemeClr val="accent1"/>
+          </a:fillRef>
+          <a:effectRef idx="2">
+            <a:schemeClr val="accent1"/>
+          </a:effectRef>
+          <a:fontRef idx="minor">
+            <a:schemeClr val="lt1"/>
+          </a:fontRef>
+        </p:style>
+        <p:txBody>
+          <a:bodyPr rtlCol="0" anchor="ctr" wrap="square">
+            <a:normAutofit/>
+          </a:bodyPr>
+          <a:lstStyle/>
+          <a:p>
+            <a:pPr algn="ctr"/>
+          </a:p>
+        </p:txBody>
+      </p:sp>
+      <p:pic>
+        <p:nvPicPr>
+          <p:cNvPr id="5" name="Picture 4" descr="frontend_demo.png"/>
+          <p:cNvPicPr>
+            <a:picLocks noChangeAspect="1"/>
+          </p:cNvPicPr>
+          <p:nvPr/>
+        </p:nvPicPr>
+        <p:blipFill>
+          <a:blip r:embed="rId2"/>
+          <a:stretch>
+            <a:fillRect/>
+          </a:stretch>
+        </p:blipFill>
+        <p:spPr>
+          <a:xfrm>
+            <a:off x="566928" y="1600200"/>
+            <a:ext cx="6766560" cy="4954379"/>
+          </a:xfrm>
+          <a:prstGeom prst="rect">
+            <a:avLst/>
+          </a:prstGeom>
+        </p:spPr>
+      </p:pic>
+      <p:sp>
+        <p:nvSpPr>
+          <p:cNvPr id="7" name="TextBox 6"/>
+          <p:cNvSpPr txBox="1"/>
+          <p:nvPr/>
+        </p:nvSpPr>
+        <p:spPr>
+          <a:xfrm>
+            <a:off x="566928" y="6263640"/>
+            <a:ext cx="11064240" cy="365760"/>
+          </a:xfrm>
+          <a:prstGeom prst="rect">
+            <a:avLst/>
+          </a:prstGeom>
+          <a:noFill/>
+        </p:spPr>
+        <p:txBody>
+          <a:bodyPr wrap="square" anchor="t">
+            <a:normAutofit/>
+          </a:bodyPr>
+          <a:lstStyle/>
+          <a:p>
+            <a:r>
+              <a:rPr sz="1050" b="0" i="1">
+                <a:solidFill>
+                  <a:srgbClr val="5C4E3D"/>
+                </a:solidFill>
+                <a:latin typeface="DM Sans"/>
+                <a:ea typeface="DM Sans"/>
+                <a:cs typeface="DM Sans"/>
+              </a:rPr>
+              <a:t>Screenshot: Vue client in API mode (2026-09-27; route and evidence computed live by the backend, not mocked).</a:t>
+            </a:r>
+          </a:p>
+        </p:txBody>
+      </p:sp>
+      <p:sp>
+        <p:nvSpPr>
+          <p:cNvPr id="8" name="TextBox 5"/>
+          <p:cNvSpPr txBox="1"/>
+          <p:nvPr/>
+        </p:nvSpPr>
+        <p:spPr>
+          <a:xfrm>
+            <a:off x="566928" y="6263640"/>
+            <a:ext cx="11064240" cy="365760"/>
+          </a:xfrm>
+          <a:prstGeom prst="rect">
+            <a:avLst/>
+          </a:prstGeom>
+          <a:noFill/>
+        </p:spPr>
+        <p:txBody>
+          <a:bodyPr wrap="square" anchor="t">
+            <a:normAutofit/>
+          </a:bodyPr>
+          <a:lstStyle/>
+          <a:p>
+            <a:r>
+              <a:rPr sz="1050" b="0" i="1">
+                <a:solidFill>
+                  <a:srgbClr val="5C4E3D"/>
+                </a:solidFill>
+                <a:latin typeface="DM Sans"/>
+                <a:ea typeface="DM Sans"/>
+                <a:cs typeface="DM Sans"/>
+              </a:rPr>
+              <a:t>Screenshot: the Vue client in API mode, 2026-09-27.</a:t>
+            </a:r>
+          </a:p>
+        </p:txBody>
+      </p:sp>
+      <p:sp>
+        <p:nvSpPr>
+          <p:cNvPr id="9" name="TextBox 4"/>
+          <p:cNvSpPr txBox="1"/>
+          <p:nvPr/>
+        </p:nvSpPr>
+        <p:spPr>
+          <a:xfrm>
+            <a:off x="7543800" y="1600200"/>
+            <a:ext cx="4114800" cy="4572000"/>
+          </a:xfrm>
+          <a:prstGeom prst="rect">
+            <a:avLst/>
+          </a:prstGeom>
+          <a:noFill/>
+        </p:spPr>
+        <p:txBody>
+          <a:bodyPr wrap="square" anchor="t">
+            <a:normAutofit/>
+          </a:bodyPr>
+          <a:lstStyle/>
+          <a:p>
+            <a:pPr>
+              <a:spcAft>
+                <a:spcPts val="900"/>
+              </a:spcAft>
+            </a:pPr>
+            <a:r>
+              <a:rPr sz="1300" b="0" i="0">
+                <a:solidFill>
+                  <a:srgbClr val="454240"/>
+                </a:solidFill>
+                <a:latin typeface="DM Sans"/>
+                <a:ea typeface="DM Sans"/>
+                <a:cs typeface="DM Sans"/>
+              </a:rPr>
+              <a:t>● 23 HTTP endpoints, 13 of them dispatch operations.</a:t>
+            </a:r>
+          </a:p>
+          <a:p>
+            <a:pPr>
+              <a:spcAft>
+                <a:spcPts val="900"/>
+              </a:spcAft>
+            </a:pPr>
+            <a:r>
+              <a:rPr sz="1300" b="0" i="0">
+                <a:solidFill>
+                  <a:srgbClr val="454240"/>
+                </a:solidFill>
+                <a:latin typeface="DM Sans"/>
+                <a:ea typeface="DM Sans"/>
+                <a:cs typeface="DM Sans"/>
+              </a:rPr>
+              <a:t>● One Vue 3 client, 23 components; EN/ZH and offline mode.</a:t>
+            </a:r>
+          </a:p>
+          <a:p>
+            <a:pPr>
+              <a:spcAft>
+                <a:spcPts val="900"/>
+              </a:spcAft>
+            </a:pPr>
+            <a:r>
+              <a:rPr sz="1300" b="0" i="0">
+                <a:solidFill>
+                  <a:srgbClr val="454240"/>
+                </a:solidFill>
+                <a:latin typeface="DM Sans"/>
+                <a:ea typeface="DM Sans"/>
+                <a:cs typeface="DM Sans"/>
+              </a:rPr>
+              <a:t>● 25 archived cases; 56 dispatch operations persisted.</a:t>
+            </a:r>
+          </a:p>
+          <a:p>
+            <a:pPr>
+              <a:spcAft>
+                <a:spcPts val="900"/>
+              </a:spcAft>
+            </a:pPr>
+            <a:r>
+              <a:rPr sz="1300" b="0" i="0">
+                <a:solidFill>
+                  <a:srgbClr val="454240"/>
+                </a:solidFill>
+                <a:latin typeface="DM Sans"/>
+                <a:ea typeface="DM Sans"/>
+                <a:cs typeface="DM Sans"/>
+              </a:rPr>
+              <a:t>● 305 test functions across 35 files.</a:t>
+            </a:r>
+          </a:p>
+          <a:p>
+            <a:pPr>
+              <a:spcAft>
+                <a:spcPts val="900"/>
+              </a:spcAft>
+            </a:pPr>
+            <a:r>
+              <a:rPr sz="1300" b="0" i="0">
+                <a:solidFill>
+                  <a:srgbClr val="454240"/>
+                </a:solidFill>
+                <a:latin typeface="DM Sans"/>
+                <a:ea typeface="DM Sans"/>
+                <a:cs typeface="DM Sans"/>
+              </a:rPr>
+              <a:t>● Still missing: cloud deploy, de-duplication, destination pool.</a:t>
+            </a:r>
+          </a:p>
+        </p:txBody>
+      </p:sp>
+    </p:spTree>
+  </p:cSld>
+  <p:clrMapOvr>
+    <a:masterClrMapping/>
+  </p:clrMapOvr>
+</p:sld>
+</file>
+
+<file path=ppt/slides/slide15.xml><?xml version="1.0" encoding="utf-8"?>
+<p:sld xmlns:a="http://schemas.openxmlformats.org/drawingml/2006/main" xmlns:p="http://schemas.openxmlformats.org/presentationml/2006/main" xmlns:r="http://schemas.openxmlformats.org/officeDocument/2006/relationships">
+  <p:cSld>
+    <p:spTree>
+      <p:nvGrpSpPr>
+        <p:cNvPr id="1" name=""/>
+        <p:cNvGrpSpPr/>
+        <p:nvPr/>
+      </p:nvGrpSpPr>
+      <p:grpSpPr/>
+      <p:sp>
+        <p:nvSpPr>
+          <p:cNvPr id="2" name="TextBox 1"/>
+          <p:cNvSpPr txBox="1"/>
+          <p:nvPr/>
+        </p:nvSpPr>
+        <p:spPr>
+          <a:xfrm>
+            <a:off x="566928" y="365760"/>
+            <a:ext cx="11064240" cy="868680"/>
+          </a:xfrm>
+          <a:prstGeom prst="rect">
+            <a:avLst/>
+          </a:prstGeom>
+          <a:noFill/>
+        </p:spPr>
+        <p:txBody>
+          <a:bodyPr wrap="square" anchor="t">
+            <a:normAutofit/>
+          </a:bodyPr>
+          <a:lstStyle/>
+          <a:p>
+            <a:r>
+              <a:rPr sz="3700" b="0" i="0">
+                <a:solidFill>
+                  <a:srgbClr val="454240"/>
+                </a:solidFill>
+                <a:latin typeface="Libre Baskerville"/>
+                <a:ea typeface="Libre Baskerville"/>
+                <a:cs typeface="Libre Baskerville"/>
+              </a:rPr>
+              <a:t>Results So Far</a:t>
+            </a:r>
+          </a:p>
+        </p:txBody>
+      </p:sp>
+      <p:sp>
+        <p:nvSpPr>
+          <p:cNvPr id="3" name="TextBox 2"/>
+          <p:cNvSpPr txBox="1"/>
+          <p:nvPr/>
+        </p:nvSpPr>
+        <p:spPr>
+          <a:xfrm>
+            <a:off x="603504" y="1170432"/>
+            <a:ext cx="11064240" cy="365760"/>
+          </a:xfrm>
+          <a:prstGeom prst="rect">
+            <a:avLst/>
+          </a:prstGeom>
+          <a:noFill/>
+        </p:spPr>
+        <p:txBody>
+          <a:bodyPr wrap="square" anchor="t">
+            <a:normAutofit/>
+          </a:bodyPr>
+          <a:lstStyle/>
+          <a:p>
+            <a:r>
+              <a:rPr sz="1150" b="0" i="0">
+                <a:solidFill>
+                  <a:srgbClr val="5C4E3D"/>
+                </a:solidFill>
+                <a:latin typeface="DM Sans"/>
+                <a:ea typeface="DM Sans"/>
+                <a:cs typeface="DM Sans"/>
+              </a:rPr>
+              <a:t>Every number reproducible in the repo</a:t>
+            </a:r>
+          </a:p>
+        </p:txBody>
+      </p:sp>
+      <p:sp>
+        <p:nvSpPr>
+          <p:cNvPr id="4" name="Rectangle 3"/>
+          <p:cNvSpPr/>
+          <p:nvPr/>
+        </p:nvSpPr>
+        <p:spPr>
+          <a:xfrm>
+            <a:off x="566928" y="1097280"/>
+            <a:ext cx="2011680" cy="20320"/>
+          </a:xfrm>
+          <a:prstGeom prst="rect">
+            <a:avLst/>
+          </a:prstGeom>
+          <a:solidFill>
+            <a:srgbClr val="B88E23"/>
+          </a:solidFill>
+          <a:ln>
+            <a:noFill/>
+          </a:ln>
+          <a:effectLst/>
+        </p:spPr>
+        <p:style>
+          <a:lnRef idx="1">
+            <a:schemeClr val="accent1"/>
+          </a:lnRef>
+          <a:fillRef idx="3">
+            <a:schemeClr val="accent1"/>
+          </a:fillRef>
+          <a:effectRef idx="2">
+            <a:schemeClr val="accent1"/>
+          </a:effectRef>
+          <a:fontRef idx="minor">
+            <a:schemeClr val="lt1"/>
+          </a:fontRef>
+        </p:style>
+        <p:txBody>
+          <a:bodyPr rtlCol="0" anchor="ctr" wrap="square">
+            <a:normAutofit/>
+          </a:bodyPr>
+          <a:lstStyle/>
+          <a:p>
+            <a:pPr algn="ctr"/>
+          </a:p>
+        </p:txBody>
+      </p:sp>
+      <p:sp>
+        <p:nvSpPr>
+          <p:cNvPr id="6" name="TextBox 4"/>
+          <p:cNvSpPr txBox="1"/>
+          <p:nvPr/>
+        </p:nvSpPr>
+        <p:spPr>
+          <a:xfrm>
+            <a:off x="566928" y="6263640"/>
+            <a:ext cx="11064240" cy="365760"/>
+          </a:xfrm>
+          <a:prstGeom prst="rect">
+            <a:avLst/>
+          </a:prstGeom>
+          <a:noFill/>
+        </p:spPr>
+        <p:txBody>
+          <a:bodyPr wrap="square" anchor="t">
+            <a:normAutofit/>
+          </a:bodyPr>
+          <a:lstStyle/>
+          <a:p>
+            <a:r>
+              <a:rPr sz="1050" b="0" i="1">
+                <a:solidFill>
+                  <a:srgbClr val="5C4E3D"/>
+                </a:solidFill>
+                <a:latin typeface="DM Sans"/>
+                <a:ea typeface="DM Sans"/>
+                <a:cs typeface="DM Sans"/>
+              </a:rPr>
+              <a:t>Boundaries: suspected-synthetic data, single random split, time-bounded solver — these do not establish real-world or operational savings.</a:t>
+            </a:r>
+          </a:p>
+        </p:txBody>
+      </p:sp>
+      <p:sp>
+        <p:nvSpPr>
+          <p:cNvPr id="7" name="TextBox 6"/>
+          <p:cNvSpPr txBox="1"/>
+          <p:nvPr/>
+        </p:nvSpPr>
+        <p:spPr>
+          <a:xfrm>
+            <a:off x="566928" y="1828800"/>
+            <a:ext cx="11064240" cy="4023360"/>
+          </a:xfrm>
+          <a:prstGeom prst="rect">
+            <a:avLst/>
+          </a:prstGeom>
+          <a:noFill/>
+        </p:spPr>
+        <p:txBody>
+          <a:bodyPr wrap="square" anchor="t">
+            <a:normAutofit/>
+          </a:bodyPr>
+          <a:lstStyle/>
+          <a:p>
+            <a:pPr>
+              <a:spcAft>
+                <a:spcPts val="1600"/>
+              </a:spcAft>
+            </a:pPr>
+            <a:r>
+              <a:rPr sz="1700" b="0" i="0">
+                <a:solidFill>
+                  <a:srgbClr val="454240"/>
+                </a:solidFill>
+                <a:latin typeface="DM Sans"/>
+                <a:ea typeface="DM Sans"/>
+                <a:cs typeface="DM Sans"/>
+              </a:rPr>
+              <a:t>● Engine vs human gold: 54/57 = 94.7%; scrap recall 33/33.</a:t>
+            </a:r>
+          </a:p>
+          <a:p>
+            <a:pPr>
+              <a:spcAft>
+                <a:spcPts val="1600"/>
+              </a:spcAft>
+            </a:pPr>
+            <a:r>
+              <a:rPr sz="1700" b="0" i="0">
+                <a:solidFill>
+                  <a:srgbClr val="454240"/>
+                </a:solidFill>
+                <a:latin typeface="DM Sans"/>
+                <a:ea typeface="DM Sans"/>
+                <a:cs typeface="DM Sans"/>
+              </a:rPr>
+              <a:t>● Annotator agreement κ = 0.6434 — below our 0.80 target.</a:t>
+            </a:r>
+          </a:p>
+          <a:p>
+            <a:pPr>
+              <a:spcAft>
+                <a:spcPts val="1600"/>
+              </a:spcAft>
+            </a:pPr>
+            <a:r>
+              <a:rPr sz="1700" b="0" i="0">
+                <a:solidFill>
+                  <a:srgbClr val="454240"/>
+                </a:solidFill>
+                <a:latin typeface="DM Sans"/>
+                <a:ea typeface="DM Sans"/>
+                <a:cs typeface="DM Sans"/>
+              </a:rPr>
+              <a:t>● Routing: 142.63 → 133.81 km (−6.19%, 0 violations); Solomon optima reached in 10 s.</a:t>
+            </a:r>
+          </a:p>
+          <a:p>
+            <a:pPr>
+              <a:spcAft>
+                <a:spcPts val="1600"/>
+              </a:spcAft>
+            </a:pPr>
+            <a:r>
+              <a:rPr sz="1700" b="0" i="0">
+                <a:solidFill>
+                  <a:srgbClr val="454240"/>
+                </a:solidFill>
+                <a:latin typeface="DM Sans"/>
+                <a:ea typeface="DM Sans"/>
+                <a:cs typeface="DM Sans"/>
+              </a:rPr>
+              <a:t>● Risk model: F1 0.691 / ROC-AUC 0.925; cause Top-1 0.143 is below the majority baseline and reported as such.</a:t>
+            </a:r>
+          </a:p>
+        </p:txBody>
+      </p:sp>
+    </p:spTree>
+  </p:cSld>
+  <p:clrMapOvr>
+    <a:masterClrMapping/>
+  </p:clrMapOvr>
+</p:sld>
+</file>
+
+<file path=ppt/slides/slide16.xml><?xml version="1.0" encoding="utf-8"?>
 <p:sld xmlns:a="http://schemas.openxmlformats.org/drawingml/2006/main" xmlns:p="http://schemas.openxmlformats.org/presentationml/2006/main" xmlns:r="http://schemas.openxmlformats.org/officeDocument/2006/relationships">
   <p:cSld>
     <p:spTree>
@@ -2326,7 +4114,7 @@
 </p:sld>
 </file>
 
-<file path=ppt/slides/slide3.xml><?xml version="1.0" encoding="utf-8"?>
+<file path=ppt/slides/slide4.xml><?xml version="1.0" encoding="utf-8"?>
 <p:sld xmlns:a="http://schemas.openxmlformats.org/drawingml/2006/main" xmlns:r="http://schemas.openxmlformats.org/officeDocument/2006/relationships" xmlns:p="http://schemas.openxmlformats.org/presentationml/2006/main">
   <p:cSld>
     <p:spTree>
@@ -2836,7 +4624,7 @@
 </p:sld>
 </file>
 
-<file path=ppt/slides/slide4.xml><?xml version="1.0" encoding="utf-8"?>
+<file path=ppt/slides/slide5.xml><?xml version="1.0" encoding="utf-8"?>
 <p:sld xmlns:a="http://schemas.openxmlformats.org/drawingml/2006/main" xmlns:r="http://schemas.openxmlformats.org/officeDocument/2006/relationships" xmlns:p="http://schemas.openxmlformats.org/presentationml/2006/main">
   <p:cSld>
     <p:spTree>
@@ -3577,1515 +5365,6 @@
 </p:sld>
 </file>
 
-<file path=ppt/slides/slide5.xml><?xml version="1.0" encoding="utf-8"?>
-<p:sld xmlns:a="http://schemas.openxmlformats.org/drawingml/2006/main" xmlns:p="http://schemas.openxmlformats.org/presentationml/2006/main" xmlns:r="http://schemas.openxmlformats.org/officeDocument/2006/relationships">
-  <p:cSld>
-    <p:spTree>
-      <p:nvGrpSpPr>
-        <p:cNvPr id="1" name=""/>
-        <p:cNvGrpSpPr/>
-        <p:nvPr/>
-      </p:nvGrpSpPr>
-      <p:grpSpPr/>
-      <p:sp>
-        <p:nvSpPr>
-          <p:cNvPr id="2" name="TextBox 1"/>
-          <p:cNvSpPr txBox="1"/>
-          <p:nvPr/>
-        </p:nvSpPr>
-        <p:spPr>
-          <a:xfrm>
-            <a:off x="566928" y="365760"/>
-            <a:ext cx="11064240" cy="868680"/>
-          </a:xfrm>
-          <a:prstGeom prst="rect">
-            <a:avLst/>
-          </a:prstGeom>
-          <a:noFill/>
-        </p:spPr>
-        <p:txBody>
-          <a:bodyPr wrap="square" anchor="t">
-            <a:normAutofit/>
-          </a:bodyPr>
-          <a:lstStyle/>
-          <a:p>
-            <a:r>
-              <a:rPr sz="3700" b="0" i="0">
-                <a:solidFill>
-                  <a:srgbClr val="454240"/>
-                </a:solidFill>
-                <a:latin typeface="Libre Baskerville"/>
-                <a:ea typeface="Libre Baskerville"/>
-                <a:cs typeface="Libre Baskerville"/>
-              </a:rPr>
-              <a:t>Where PharmaColdOps Sits</a:t>
-            </a:r>
-          </a:p>
-        </p:txBody>
-      </p:sp>
-      <p:sp>
-        <p:nvSpPr>
-          <p:cNvPr id="3" name="TextBox 2"/>
-          <p:cNvSpPr txBox="1"/>
-          <p:nvPr/>
-        </p:nvSpPr>
-        <p:spPr>
-          <a:xfrm>
-            <a:off x="603504" y="1170432"/>
-            <a:ext cx="11064240" cy="365760"/>
-          </a:xfrm>
-          <a:prstGeom prst="rect">
-            <a:avLst/>
-          </a:prstGeom>
-          <a:noFill/>
-        </p:spPr>
-        <p:txBody>
-          <a:bodyPr wrap="square" anchor="t">
-            <a:normAutofit/>
-          </a:bodyPr>
-          <a:lstStyle/>
-          <a:p>
-            <a:r>
-              <a:rPr sz="1150" b="0" i="0">
-                <a:solidFill>
-                  <a:srgbClr val="5C4E3D"/>
-                </a:solidFill>
-                <a:latin typeface="DM Sans"/>
-                <a:ea typeface="DM Sans"/>
-                <a:cs typeface="DM Sans"/>
-              </a:rPr>
-              <a:t>Positioning · market context and related work</a:t>
-            </a:r>
-          </a:p>
-        </p:txBody>
-      </p:sp>
-      <p:sp>
-        <p:nvSpPr>
-          <p:cNvPr id="4" name="Rectangle 3"/>
-          <p:cNvSpPr/>
-          <p:nvPr/>
-        </p:nvSpPr>
-        <p:spPr>
-          <a:xfrm>
-            <a:off x="566928" y="1097280"/>
-            <a:ext cx="2011680" cy="20320"/>
-          </a:xfrm>
-          <a:prstGeom prst="rect">
-            <a:avLst/>
-          </a:prstGeom>
-          <a:solidFill>
-            <a:srgbClr val="B88E23"/>
-          </a:solidFill>
-          <a:ln>
-            <a:noFill/>
-          </a:ln>
-          <a:effectLst/>
-        </p:spPr>
-        <p:style>
-          <a:lnRef idx="1">
-            <a:schemeClr val="accent1"/>
-          </a:lnRef>
-          <a:fillRef idx="3">
-            <a:schemeClr val="accent1"/>
-          </a:fillRef>
-          <a:effectRef idx="2">
-            <a:schemeClr val="accent1"/>
-          </a:effectRef>
-          <a:fontRef idx="minor">
-            <a:schemeClr val="lt1"/>
-          </a:fontRef>
-        </p:style>
-        <p:txBody>
-          <a:bodyPr rtlCol="0" anchor="ctr" wrap="square">
-            <a:normAutofit/>
-          </a:bodyPr>
-          <a:lstStyle/>
-          <a:p>
-            <a:pPr algn="ctr"/>
-          </a:p>
-        </p:txBody>
-      </p:sp>
-      <p:sp>
-        <p:nvSpPr>
-          <p:cNvPr id="5" name="TextBox 3"/>
-          <p:cNvSpPr txBox="1"/>
-          <p:nvPr/>
-        </p:nvSpPr>
-        <p:spPr>
-          <a:xfrm>
-            <a:off x="566928" y="1600200"/>
-            <a:ext cx="11064240" cy="4572000"/>
-          </a:xfrm>
-          <a:prstGeom prst="rect">
-            <a:avLst/>
-          </a:prstGeom>
-          <a:noFill/>
-        </p:spPr>
-        <p:txBody>
-          <a:bodyPr wrap="square" anchor="t">
-            <a:normAutofit/>
-          </a:bodyPr>
-          <a:lstStyle/>
-          <a:p>
-            <a:pPr>
-              <a:spcAft>
-                <a:spcPts val="1400"/>
-              </a:spcAft>
-            </a:pPr>
-            <a:r>
-              <a:rPr sz="1700" b="0" i="0">
-                <a:solidFill>
-                  <a:srgbClr val="454240"/>
-                </a:solidFill>
-                <a:latin typeface="DM Sans"/>
-                <a:ea typeface="DM Sans"/>
-                <a:cs typeface="DM Sans"/>
-              </a:rPr>
-              <a:t>● Commercial platforms already monitor temperature and automate parts of the quality process — we do not claim to be first.</a:t>
-            </a:r>
-          </a:p>
-          <a:p>
-            <a:pPr>
-              <a:spcAft>
-                <a:spcPts val="1400"/>
-              </a:spcAft>
-            </a:pPr>
-            <a:r>
-              <a:rPr sz="1700" b="0" i="0">
-                <a:solidFill>
-                  <a:srgbClr val="454240"/>
-                </a:solidFill>
-                <a:latin typeface="DM Sans"/>
-                <a:ea typeface="DM Sans"/>
-                <a:cs typeface="DM Sans"/>
-              </a:rPr>
-              <a:t>● We build on existing foundations: Solomon's VRPTW benchmark, OR-Tools, gradient-boosted trees, SHAP.</a:t>
-            </a:r>
-          </a:p>
-          <a:p>
-            <a:pPr>
-              <a:spcAft>
-                <a:spcPts val="1400"/>
-              </a:spcAft>
-            </a:pPr>
-            <a:r>
-              <a:rPr sz="1700" b="0" i="0">
-                <a:solidFill>
-                  <a:srgbClr val="454240"/>
-                </a:solidFill>
-                <a:latin typeface="DM Sans"/>
-                <a:ea typeface="DM Sans"/>
-                <a:cs typeface="DM Sans"/>
-              </a:rPr>
-              <a:t>● The gap we address is the unbroken, inspectable chain from event to disposition to order to route to cited evidence.</a:t>
-            </a:r>
-          </a:p>
-        </p:txBody>
-      </p:sp>
-      <p:sp>
-        <p:nvSpPr>
-          <p:cNvPr id="6" name="TextBox 4"/>
-          <p:cNvSpPr txBox="1"/>
-          <p:nvPr/>
-        </p:nvSpPr>
-        <p:spPr>
-          <a:xfrm>
-            <a:off x="566928" y="6263640"/>
-            <a:ext cx="11064240" cy="365760"/>
-          </a:xfrm>
-          <a:prstGeom prst="rect">
-            <a:avLst/>
-          </a:prstGeom>
-          <a:noFill/>
-        </p:spPr>
-        <p:txBody>
-          <a:bodyPr wrap="square" anchor="t">
-            <a:normAutofit/>
-          </a:bodyPr>
-          <a:lstStyle/>
-          <a:p>
-            <a:r>
-              <a:rPr sz="1050" b="0" i="1">
-                <a:solidFill>
-                  <a:srgbClr val="5C4E3D"/>
-                </a:solidFill>
-                <a:latin typeface="DM Sans"/>
-                <a:ea typeface="DM Sans"/>
-                <a:cs typeface="DM Sans"/>
-              </a:rPr>
-              <a:t>Proposal §3.2–3.3 · Figure 1. Market value still requires user interviews and operational data.</a:t>
-            </a:r>
-          </a:p>
-        </p:txBody>
-      </p:sp>
-    </p:spTree>
-  </p:cSld>
-  <p:clrMapOvr>
-    <a:masterClrMapping/>
-  </p:clrMapOvr>
-</p:sld>
-</file>
-
-<file path=ppt/slides/slide6.xml><?xml version="1.0" encoding="utf-8"?>
-<p:sld xmlns:a="http://schemas.openxmlformats.org/drawingml/2006/main" xmlns:r="http://schemas.openxmlformats.org/officeDocument/2006/relationships" xmlns:p="http://schemas.openxmlformats.org/presentationml/2006/main">
-  <p:cSld>
-    <p:spTree>
-      <p:nvGrpSpPr>
-        <p:cNvPr id="1" name=""/>
-        <p:cNvGrpSpPr/>
-        <p:nvPr/>
-      </p:nvGrpSpPr>
-      <p:grpSpPr>
-        <a:xfrm>
-          <a:off x="0" y="0"/>
-          <a:ext cx="0" cy="0"/>
-          <a:chOff x="0" y="0"/>
-          <a:chExt cx="0" cy="0"/>
-        </a:xfrm>
-      </p:grpSpPr>
-      <p:sp>
-        <p:nvSpPr>
-          <p:cNvPr id="2" name="Text 0"/>
-          <p:cNvSpPr/>
-          <p:nvPr/>
-        </p:nvSpPr>
-        <p:spPr>
-          <a:xfrm>
-            <a:off x="661475" y="841970"/>
-            <a:ext cx="10868745" cy="590649"/>
-          </a:xfrm>
-          <a:prstGeom prst="rect">
-            <a:avLst/>
-          </a:prstGeom>
-          <a:noFill/>
-        </p:spPr>
-        <p:txBody>
-          <a:bodyPr wrap="square" lIns="0" tIns="0" rIns="0" bIns="0" rtlCol="0" anchor="t">
-            <a:normAutofit/>
-          </a:bodyPr>
-          <a:lstStyle/>
-          <a:p>
-            <a:pPr marL="0" indent="0" algn="l">
-              <a:lnSpc>
-                <a:spcPct val="104000"/>
-              </a:lnSpc>
-              <a:buNone/>
-            </a:pPr>
-            <a:r>
-              <a:rPr lang="en-US" sz="3700" dirty="0">
-                <a:solidFill>
-                  <a:srgbClr val="5C4E3D"/>
-                </a:solidFill>
-                <a:latin typeface="Libre Baskerville" panose="02000000000000000000" pitchFamily="34" charset="0"/>
-                <a:ea typeface="Libre Baskerville" panose="02000000000000000000" pitchFamily="34" charset="-122"/>
-                <a:cs typeface="Libre Baskerville" panose="02000000000000000000" pitchFamily="34" charset="-120"/>
-              </a:rPr>
-              <a:t>Data: Verifiable, Disclosed Provenance</a:t>
-            </a:r>
-            <a:endParaRPr lang="en-US" sz="3700" dirty="0"/>
-          </a:p>
-        </p:txBody>
-      </p:sp>
-      <p:pic>
-        <p:nvPicPr>
-          <p:cNvPr id="3" name="Image 0" descr="preencoded.png"/>
-          <p:cNvPicPr>
-            <a:picLocks noChangeAspect="1"/>
-          </p:cNvPicPr>
-          <p:nvPr/>
-        </p:nvPicPr>
-        <p:blipFill>
-          <a:blip r:embed="rId1">
-            <a:extLst>
-              <a:ext uri="{96DAC541-7B7A-43D3-8B79-37D633B846F1}">
-                <asvg:svgBlip xmlns:asvg="http://schemas.microsoft.com/office/drawing/2016/SVG/main" r:embed="rId2"/>
-              </a:ext>
-            </a:extLst>
-          </a:blip>
-          <a:stretch>
-            <a:fillRect/>
-          </a:stretch>
-        </p:blipFill>
-        <p:spPr>
-          <a:xfrm>
-            <a:off x="661475" y="1810643"/>
-            <a:ext cx="472468" cy="472480"/>
-          </a:xfrm>
-          <a:prstGeom prst="rect">
-            <a:avLst/>
-          </a:prstGeom>
-        </p:spPr>
-      </p:pic>
-      <p:sp>
-        <p:nvSpPr>
-          <p:cNvPr id="4" name="Text 1"/>
-          <p:cNvSpPr/>
-          <p:nvPr/>
-        </p:nvSpPr>
-        <p:spPr>
-          <a:xfrm>
-            <a:off x="1370177" y="1810643"/>
-            <a:ext cx="2756724" cy="590550"/>
-          </a:xfrm>
-          <a:prstGeom prst="rect">
-            <a:avLst/>
-          </a:prstGeom>
-          <a:noFill/>
-        </p:spPr>
-        <p:txBody>
-          <a:bodyPr wrap="square" lIns="0" tIns="0" rIns="0" bIns="0" rtlCol="0" anchor="t">
-            <a:normAutofit/>
-          </a:bodyPr>
-          <a:lstStyle/>
-          <a:p>
-            <a:pPr marL="0" indent="0" algn="l">
-              <a:lnSpc>
-                <a:spcPct val="104000"/>
-              </a:lnSpc>
-              <a:buNone/>
-            </a:pPr>
-            <a:r>
-              <a:rPr lang="en-US" sz="1850" dirty="0">
-                <a:solidFill>
-                  <a:srgbClr val="454240"/>
-                </a:solidFill>
-                <a:latin typeface="Libre Baskerville" panose="02000000000000000000" pitchFamily="34" charset="0"/>
-                <a:ea typeface="Libre Baskerville" panose="02000000000000000000" pitchFamily="34" charset="-122"/>
-                <a:cs typeface="Libre Baskerville" panose="02000000000000000000" pitchFamily="34" charset="-120"/>
-              </a:rPr>
-              <a:t>Cold Chain Silent Failure (Kaggle)</a:t>
-            </a:r>
-            <a:endParaRPr lang="en-US" sz="1850" dirty="0"/>
-          </a:p>
-        </p:txBody>
-      </p:sp>
-      <p:sp>
-        <p:nvSpPr>
-          <p:cNvPr id="5" name="Text 2"/>
-          <p:cNvSpPr/>
-          <p:nvPr/>
-        </p:nvSpPr>
-        <p:spPr>
-          <a:xfrm>
-            <a:off x="1370177" y="2514600"/>
-            <a:ext cx="2756724" cy="907256"/>
-          </a:xfrm>
-          <a:prstGeom prst="rect">
-            <a:avLst/>
-          </a:prstGeom>
-          <a:noFill/>
-        </p:spPr>
-        <p:txBody>
-          <a:bodyPr wrap="square" lIns="0" tIns="0" rIns="0" bIns="0" rtlCol="0" anchor="t">
-            <a:normAutofit/>
-          </a:bodyPr>
-          <a:lstStyle/>
-          <a:p>
-            <a:pPr marL="0" indent="0" algn="l">
-              <a:lnSpc>
-                <a:spcPct val="133000"/>
-              </a:lnSpc>
-              <a:buNone/>
-            </a:pPr>
-            <a:r>
-              <a:rPr lang="en-US" sz="1450" dirty="0">
-                <a:solidFill>
-                  <a:srgbClr val="454240"/>
-                </a:solidFill>
-                <a:latin typeface="DM Sans" pitchFamily="34" charset="0"/>
-                <a:ea typeface="DM Sans" pitchFamily="34" charset="-122"/>
-                <a:cs typeface="DM Sans" pitchFamily="34" charset="-120"/>
-              </a:rPr>
-              <a:t>≈8,000 rows — failure classification.</a:t>
-            </a:r>
-            <a:endParaRPr lang="en-US" sz="1450" dirty="0"/>
-          </a:p>
-        </p:txBody>
-      </p:sp>
-      <p:pic>
-        <p:nvPicPr>
-          <p:cNvPr id="6" name="Image 1" descr="preencoded.png"/>
-          <p:cNvPicPr>
-            <a:picLocks noChangeAspect="1"/>
-          </p:cNvPicPr>
-          <p:nvPr/>
-        </p:nvPicPr>
-        <p:blipFill>
-          <a:blip r:embed="rId3">
-            <a:extLst>
-              <a:ext uri="{96DAC541-7B7A-43D3-8B79-37D633B846F1}">
-                <asvg:svgBlip xmlns:asvg="http://schemas.microsoft.com/office/drawing/2016/SVG/main" r:embed="rId4"/>
-              </a:ext>
-            </a:extLst>
-          </a:blip>
-          <a:stretch>
-            <a:fillRect/>
-          </a:stretch>
-        </p:blipFill>
-        <p:spPr>
-          <a:xfrm>
-            <a:off x="4363135" y="1810643"/>
-            <a:ext cx="472468" cy="472480"/>
-          </a:xfrm>
-          <a:prstGeom prst="rect">
-            <a:avLst/>
-          </a:prstGeom>
-        </p:spPr>
-      </p:pic>
-      <p:sp>
-        <p:nvSpPr>
-          <p:cNvPr id="7" name="Text 3"/>
-          <p:cNvSpPr/>
-          <p:nvPr/>
-        </p:nvSpPr>
-        <p:spPr>
-          <a:xfrm>
-            <a:off x="5071836" y="1810643"/>
-            <a:ext cx="2756724" cy="590550"/>
-          </a:xfrm>
-          <a:prstGeom prst="rect">
-            <a:avLst/>
-          </a:prstGeom>
-          <a:noFill/>
-        </p:spPr>
-        <p:txBody>
-          <a:bodyPr wrap="square" lIns="0" tIns="0" rIns="0" bIns="0" rtlCol="0" anchor="t">
-            <a:normAutofit/>
-          </a:bodyPr>
-          <a:lstStyle/>
-          <a:p>
-            <a:pPr marL="0" indent="0" algn="l">
-              <a:lnSpc>
-                <a:spcPct val="104000"/>
-              </a:lnSpc>
-              <a:buNone/>
-            </a:pPr>
-            <a:r>
-              <a:rPr lang="en-US" sz="1850" dirty="0">
-                <a:solidFill>
-                  <a:srgbClr val="454240"/>
-                </a:solidFill>
-                <a:latin typeface="Libre Baskerville" panose="02000000000000000000" pitchFamily="34" charset="0"/>
-                <a:ea typeface="Libre Baskerville" panose="02000000000000000000" pitchFamily="34" charset="-122"/>
-                <a:cs typeface="Libre Baskerville" panose="02000000000000000000" pitchFamily="34" charset="-120"/>
-              </a:rPr>
-              <a:t>Vaccine Distribution w/ Temp Logging (Kaggle)</a:t>
-            </a:r>
-            <a:endParaRPr lang="en-US" sz="1850" dirty="0"/>
-          </a:p>
-        </p:txBody>
-      </p:sp>
-      <p:sp>
-        <p:nvSpPr>
-          <p:cNvPr id="8" name="Text 4"/>
-          <p:cNvSpPr/>
-          <p:nvPr/>
-        </p:nvSpPr>
-        <p:spPr>
-          <a:xfrm>
-            <a:off x="5071836" y="2514600"/>
-            <a:ext cx="2756724" cy="1209675"/>
-          </a:xfrm>
-          <a:prstGeom prst="rect">
-            <a:avLst/>
-          </a:prstGeom>
-          <a:noFill/>
-        </p:spPr>
-        <p:txBody>
-          <a:bodyPr wrap="square" lIns="0" tIns="0" rIns="0" bIns="0" rtlCol="0" anchor="t">
-            <a:normAutofit/>
-          </a:bodyPr>
-          <a:lstStyle/>
-          <a:p>
-            <a:pPr marL="0" indent="0" algn="l">
-              <a:lnSpc>
-                <a:spcPct val="133000"/>
-              </a:lnSpc>
-              <a:buNone/>
-            </a:pPr>
-            <a:r>
-              <a:rPr lang="en-US" sz="1450" dirty="0">
-                <a:solidFill>
-                  <a:srgbClr val="454240"/>
-                </a:solidFill>
-                <a:latin typeface="DM Sans" pitchFamily="34" charset="0"/>
-                <a:ea typeface="DM Sans" pitchFamily="34" charset="-122"/>
-                <a:cs typeface="DM Sans" pitchFamily="34" charset="-120"/>
-              </a:rPr>
-              <a:t>≈26,700 rows — sequence and MKT work.</a:t>
-            </a:r>
-            <a:endParaRPr lang="en-US" sz="1450" dirty="0"/>
-          </a:p>
-        </p:txBody>
-      </p:sp>
-      <p:pic>
-        <p:nvPicPr>
-          <p:cNvPr id="9" name="Image 2" descr="preencoded.png"/>
-          <p:cNvPicPr>
-            <a:picLocks noChangeAspect="1"/>
-          </p:cNvPicPr>
-          <p:nvPr/>
-        </p:nvPicPr>
-        <p:blipFill>
-          <a:blip r:embed="rId5">
-            <a:extLst>
-              <a:ext uri="{96DAC541-7B7A-43D3-8B79-37D633B846F1}">
-                <asvg:svgBlip xmlns:asvg="http://schemas.microsoft.com/office/drawing/2016/SVG/main" r:embed="rId6"/>
-              </a:ext>
-            </a:extLst>
-          </a:blip>
-          <a:stretch>
-            <a:fillRect/>
-          </a:stretch>
-        </p:blipFill>
-        <p:spPr>
-          <a:xfrm>
-            <a:off x="8064794" y="1810643"/>
-            <a:ext cx="472468" cy="472480"/>
-          </a:xfrm>
-          <a:prstGeom prst="rect">
-            <a:avLst/>
-          </a:prstGeom>
-        </p:spPr>
-      </p:pic>
-      <p:sp>
-        <p:nvSpPr>
-          <p:cNvPr id="10" name="Text 5"/>
-          <p:cNvSpPr/>
-          <p:nvPr/>
-        </p:nvSpPr>
-        <p:spPr>
-          <a:xfrm>
-            <a:off x="8773496" y="1810643"/>
-            <a:ext cx="2756724" cy="590550"/>
-          </a:xfrm>
-          <a:prstGeom prst="rect">
-            <a:avLst/>
-          </a:prstGeom>
-          <a:noFill/>
-        </p:spPr>
-        <p:txBody>
-          <a:bodyPr wrap="square" lIns="0" tIns="0" rIns="0" bIns="0" rtlCol="0" anchor="t">
-            <a:normAutofit/>
-          </a:bodyPr>
-          <a:lstStyle/>
-          <a:p>
-            <a:pPr marL="0" indent="0" algn="l">
-              <a:lnSpc>
-                <a:spcPct val="104000"/>
-              </a:lnSpc>
-              <a:buNone/>
-            </a:pPr>
-            <a:r>
-              <a:rPr lang="en-US" sz="1850" dirty="0">
-                <a:solidFill>
-                  <a:srgbClr val="454240"/>
-                </a:solidFill>
-                <a:latin typeface="Libre Baskerville" panose="02000000000000000000" pitchFamily="34" charset="0"/>
-                <a:ea typeface="Libre Baskerville" panose="02000000000000000000" pitchFamily="34" charset="-122"/>
-                <a:cs typeface="Libre Baskerville" panose="02000000000000000000" pitchFamily="34" charset="-120"/>
-              </a:rPr>
-              <a:t>Electric Sheep Africa Dataset</a:t>
-            </a:r>
-            <a:endParaRPr lang="en-US" sz="1850" dirty="0"/>
-          </a:p>
-        </p:txBody>
-      </p:sp>
-      <p:sp>
-        <p:nvSpPr>
-          <p:cNvPr id="11" name="Text 6"/>
-          <p:cNvSpPr/>
-          <p:nvPr/>
-        </p:nvSpPr>
-        <p:spPr>
-          <a:xfrm>
-            <a:off x="8773496" y="2514600"/>
-            <a:ext cx="2756724" cy="1209675"/>
-          </a:xfrm>
-          <a:prstGeom prst="rect">
-            <a:avLst/>
-          </a:prstGeom>
-          <a:noFill/>
-        </p:spPr>
-        <p:txBody>
-          <a:bodyPr wrap="square" lIns="0" tIns="0" rIns="0" bIns="0" rtlCol="0" anchor="t">
-            <a:normAutofit/>
-          </a:bodyPr>
-          <a:lstStyle/>
-          <a:p>
-            <a:pPr marL="0" indent="0" algn="l">
-              <a:lnSpc>
-                <a:spcPct val="133000"/>
-              </a:lnSpc>
-              <a:buNone/>
-            </a:pPr>
-            <a:r>
-              <a:rPr lang="en-US" sz="1450" dirty="0">
-                <a:solidFill>
-                  <a:srgbClr val="454240"/>
-                </a:solidFill>
-                <a:latin typeface="DM Sans" pitchFamily="34" charset="0"/>
-                <a:ea typeface="DM Sans" pitchFamily="34" charset="-122"/>
-                <a:cs typeface="DM Sans" pitchFamily="34" charset="-120"/>
-              </a:rPr>
-              <a:t>Simulated facility-monthly records.</a:t>
-            </a:r>
-            <a:endParaRPr lang="en-US" sz="1450" dirty="0"/>
-          </a:p>
-        </p:txBody>
-      </p:sp>
-      <p:pic>
-        <p:nvPicPr>
-          <p:cNvPr id="12" name="Image 3" descr="preencoded.png"/>
-          <p:cNvPicPr>
-            <a:picLocks noChangeAspect="1"/>
-          </p:cNvPicPr>
-          <p:nvPr/>
-        </p:nvPicPr>
-        <p:blipFill>
-          <a:blip r:embed="rId7">
-            <a:extLst>
-              <a:ext uri="{96DAC541-7B7A-43D3-8B79-37D633B846F1}">
-                <asvg:svgBlip xmlns:asvg="http://schemas.microsoft.com/office/drawing/2016/SVG/main" r:embed="rId8"/>
-              </a:ext>
-            </a:extLst>
-          </a:blip>
-          <a:stretch>
-            <a:fillRect/>
-          </a:stretch>
-        </p:blipFill>
-        <p:spPr>
-          <a:xfrm>
-            <a:off x="661475" y="4102298"/>
-            <a:ext cx="472468" cy="472480"/>
-          </a:xfrm>
-          <a:prstGeom prst="rect">
-            <a:avLst/>
-          </a:prstGeom>
-        </p:spPr>
-      </p:pic>
-      <p:sp>
-        <p:nvSpPr>
-          <p:cNvPr id="13" name="Text 7"/>
-          <p:cNvSpPr/>
-          <p:nvPr/>
-        </p:nvSpPr>
-        <p:spPr>
-          <a:xfrm>
-            <a:off x="1370177" y="4102298"/>
-            <a:ext cx="2756724" cy="590550"/>
-          </a:xfrm>
-          <a:prstGeom prst="rect">
-            <a:avLst/>
-          </a:prstGeom>
-          <a:noFill/>
-        </p:spPr>
-        <p:txBody>
-          <a:bodyPr wrap="square" lIns="0" tIns="0" rIns="0" bIns="0" rtlCol="0" anchor="t">
-            <a:normAutofit/>
-          </a:bodyPr>
-          <a:lstStyle/>
-          <a:p>
-            <a:pPr marL="0" indent="0" algn="l">
-              <a:lnSpc>
-                <a:spcPct val="104000"/>
-              </a:lnSpc>
-              <a:buNone/>
-            </a:pPr>
-            <a:r>
-              <a:rPr lang="en-US" sz="1850" dirty="0">
-                <a:solidFill>
-                  <a:srgbClr val="454240"/>
-                </a:solidFill>
-                <a:latin typeface="Libre Baskerville" panose="02000000000000000000" pitchFamily="34" charset="0"/>
-                <a:ea typeface="Libre Baskerville" panose="02000000000000000000" pitchFamily="34" charset="-122"/>
-                <a:cs typeface="Libre Baskerville" panose="02000000000000000000" pitchFamily="34" charset="-120"/>
-              </a:rPr>
-              <a:t>CVRPLIB Benchmarks</a:t>
-            </a:r>
-            <a:endParaRPr lang="en-US" sz="1850" dirty="0"/>
-          </a:p>
-        </p:txBody>
-      </p:sp>
-      <p:sp>
-        <p:nvSpPr>
-          <p:cNvPr id="14" name="Text 8"/>
-          <p:cNvSpPr/>
-          <p:nvPr/>
-        </p:nvSpPr>
-        <p:spPr>
-          <a:xfrm>
-            <a:off x="1370177" y="4806255"/>
-            <a:ext cx="2756724" cy="1209675"/>
-          </a:xfrm>
-          <a:prstGeom prst="rect">
-            <a:avLst/>
-          </a:prstGeom>
-          <a:noFill/>
-        </p:spPr>
-        <p:txBody>
-          <a:bodyPr wrap="square" lIns="0" tIns="0" rIns="0" bIns="0" rtlCol="0" anchor="t">
-            <a:normAutofit/>
-          </a:bodyPr>
-          <a:lstStyle/>
-          <a:p>
-            <a:pPr marL="0" indent="0" algn="l">
-              <a:lnSpc>
-                <a:spcPct val="133000"/>
-              </a:lnSpc>
-              <a:buNone/>
-            </a:pPr>
-            <a:r>
-              <a:rPr lang="en-US" sz="1450" dirty="0">
-                <a:solidFill>
-                  <a:srgbClr val="454240"/>
-                </a:solidFill>
-                <a:latin typeface="DM Sans" pitchFamily="34" charset="0"/>
-                <a:ea typeface="DM Sans" pitchFamily="34" charset="-122"/>
-                <a:cs typeface="DM Sans" pitchFamily="34" charset="-120"/>
-              </a:rPr>
-              <a:t>Six Solomon instances + OSM road network.</a:t>
-            </a:r>
-            <a:endParaRPr lang="en-US" sz="1450" dirty="0"/>
-          </a:p>
-        </p:txBody>
-      </p:sp>
-      <p:pic>
-        <p:nvPicPr>
-          <p:cNvPr id="15" name="Image 4" descr="preencoded.png"/>
-          <p:cNvPicPr>
-            <a:picLocks noChangeAspect="1"/>
-          </p:cNvPicPr>
-          <p:nvPr/>
-        </p:nvPicPr>
-        <p:blipFill>
-          <a:blip r:embed="rId9">
-            <a:extLst>
-              <a:ext uri="{96DAC541-7B7A-43D3-8B79-37D633B846F1}">
-                <asvg:svgBlip xmlns:asvg="http://schemas.microsoft.com/office/drawing/2016/SVG/main" r:embed="rId10"/>
-              </a:ext>
-            </a:extLst>
-          </a:blip>
-          <a:stretch>
-            <a:fillRect/>
-          </a:stretch>
-        </p:blipFill>
-        <p:spPr>
-          <a:xfrm>
-            <a:off x="4363135" y="4102298"/>
-            <a:ext cx="472468" cy="472480"/>
-          </a:xfrm>
-          <a:prstGeom prst="rect">
-            <a:avLst/>
-          </a:prstGeom>
-        </p:spPr>
-      </p:pic>
-      <p:sp>
-        <p:nvSpPr>
-          <p:cNvPr id="16" name="Text 9"/>
-          <p:cNvSpPr/>
-          <p:nvPr/>
-        </p:nvSpPr>
-        <p:spPr>
-          <a:xfrm>
-            <a:off x="5071836" y="4102298"/>
-            <a:ext cx="2756724" cy="295275"/>
-          </a:xfrm>
-          <a:prstGeom prst="rect">
-            <a:avLst/>
-          </a:prstGeom>
-          <a:noFill/>
-        </p:spPr>
-        <p:txBody>
-          <a:bodyPr wrap="square" lIns="0" tIns="0" rIns="0" bIns="0" rtlCol="0" anchor="t">
-            <a:normAutofit/>
-          </a:bodyPr>
-          <a:lstStyle/>
-          <a:p>
-            <a:pPr marL="0" indent="0" algn="l">
-              <a:lnSpc>
-                <a:spcPct val="104000"/>
-              </a:lnSpc>
-              <a:buNone/>
-            </a:pPr>
-            <a:r>
-              <a:rPr lang="en-US" sz="1850" dirty="0">
-                <a:solidFill>
-                  <a:srgbClr val="454240"/>
-                </a:solidFill>
-                <a:latin typeface="Libre Baskerville" panose="02000000000000000000" pitchFamily="34" charset="0"/>
-                <a:ea typeface="Libre Baskerville" panose="02000000000000000000" pitchFamily="34" charset="-122"/>
-                <a:cs typeface="Libre Baskerville" panose="02000000000000000000" pitchFamily="34" charset="-120"/>
-              </a:rPr>
-              <a:t>Domain Rules</a:t>
-            </a:r>
-            <a:endParaRPr lang="en-US" sz="1850" dirty="0"/>
-          </a:p>
-        </p:txBody>
-      </p:sp>
-      <p:sp>
-        <p:nvSpPr>
-          <p:cNvPr id="17" name="Text 10"/>
-          <p:cNvSpPr/>
-          <p:nvPr/>
-        </p:nvSpPr>
-        <p:spPr>
-          <a:xfrm>
-            <a:off x="5071836" y="4510980"/>
-            <a:ext cx="2756724" cy="1209675"/>
-          </a:xfrm>
-          <a:prstGeom prst="rect">
-            <a:avLst/>
-          </a:prstGeom>
-          <a:noFill/>
-        </p:spPr>
-        <p:txBody>
-          <a:bodyPr wrap="square" lIns="0" tIns="0" rIns="0" bIns="0" rtlCol="0" anchor="t">
-            <a:normAutofit/>
-          </a:bodyPr>
-          <a:lstStyle/>
-          <a:p>
-            <a:pPr marL="0" indent="0" algn="l">
-              <a:lnSpc>
-                <a:spcPct val="133000"/>
-              </a:lnSpc>
-              <a:buNone/>
-            </a:pPr>
-            <a:r>
-              <a:rPr lang="en-US" sz="1450" dirty="0">
-                <a:solidFill>
-                  <a:srgbClr val="454240"/>
-                </a:solidFill>
-                <a:latin typeface="DM Sans" pitchFamily="34" charset="0"/>
-                <a:ea typeface="DM Sans" pitchFamily="34" charset="-122"/>
-                <a:cs typeface="DM Sans" pitchFamily="34" charset="-120"/>
-              </a:rPr>
-              <a:t>WHO / EU GDP / ICH · CDC. Thresholds are prototype assumptions.</a:t>
-            </a:r>
-            <a:endParaRPr lang="en-US" sz="1450" dirty="0"/>
-          </a:p>
-        </p:txBody>
-      </p:sp>
-    </p:spTree>
-  </p:cSld>
-  <p:clrMapOvr>
-    <a:masterClrMapping/>
-  </p:clrMapOvr>
-</p:sld>
-</file>
-
-<file path=ppt/slides/slide7.xml><?xml version="1.0" encoding="utf-8"?>
-<p:sld xmlns:a="http://schemas.openxmlformats.org/drawingml/2006/main" xmlns:p="http://schemas.openxmlformats.org/presentationml/2006/main" xmlns:r="http://schemas.openxmlformats.org/officeDocument/2006/relationships">
-  <p:cSld>
-    <p:spTree>
-      <p:nvGrpSpPr>
-        <p:cNvPr id="1" name=""/>
-        <p:cNvGrpSpPr/>
-        <p:nvPr/>
-      </p:nvGrpSpPr>
-      <p:grpSpPr/>
-      <p:sp>
-        <p:nvSpPr>
-          <p:cNvPr id="2" name="TextBox 1"/>
-          <p:cNvSpPr txBox="1"/>
-          <p:nvPr/>
-        </p:nvSpPr>
-        <p:spPr>
-          <a:xfrm>
-            <a:off x="566928" y="365760"/>
-            <a:ext cx="11064240" cy="868680"/>
-          </a:xfrm>
-          <a:prstGeom prst="rect">
-            <a:avLst/>
-          </a:prstGeom>
-          <a:noFill/>
-        </p:spPr>
-        <p:txBody>
-          <a:bodyPr wrap="square" anchor="t">
-            <a:normAutofit/>
-          </a:bodyPr>
-          <a:lstStyle/>
-          <a:p>
-            <a:r>
-              <a:rPr sz="3700" b="0" i="0">
-                <a:solidFill>
-                  <a:srgbClr val="454240"/>
-                </a:solidFill>
-                <a:latin typeface="Libre Baskerville"/>
-                <a:ea typeface="Libre Baskerville"/>
-                <a:cs typeface="Libre Baskerville"/>
-              </a:rPr>
-              <a:t>Built and Running Today</a:t>
-            </a:r>
-          </a:p>
-        </p:txBody>
-      </p:sp>
-      <p:sp>
-        <p:nvSpPr>
-          <p:cNvPr id="3" name="TextBox 2"/>
-          <p:cNvSpPr txBox="1"/>
-          <p:nvPr/>
-        </p:nvSpPr>
-        <p:spPr>
-          <a:xfrm>
-            <a:off x="603504" y="1170432"/>
-            <a:ext cx="11064240" cy="365760"/>
-          </a:xfrm>
-          <a:prstGeom prst="rect">
-            <a:avLst/>
-          </a:prstGeom>
-          <a:noFill/>
-        </p:spPr>
-        <p:txBody>
-          <a:bodyPr wrap="square" anchor="t">
-            <a:normAutofit/>
-          </a:bodyPr>
-          <a:lstStyle/>
-          <a:p>
-            <a:r>
-              <a:rPr sz="1150" b="0" i="0">
-                <a:solidFill>
-                  <a:srgbClr val="5C4E3D"/>
-                </a:solidFill>
-                <a:latin typeface="DM Sans"/>
-                <a:ea typeface="DM Sans"/>
-                <a:cs typeface="DM Sans"/>
-              </a:rPr>
-              <a:t>Measured from the repository, 2026-09-27</a:t>
-            </a:r>
-          </a:p>
-        </p:txBody>
-      </p:sp>
-      <p:sp>
-        <p:nvSpPr>
-          <p:cNvPr id="4" name="Rectangle 3"/>
-          <p:cNvSpPr/>
-          <p:nvPr/>
-        </p:nvSpPr>
-        <p:spPr>
-          <a:xfrm>
-            <a:off x="566928" y="1097280"/>
-            <a:ext cx="2011680" cy="20320"/>
-          </a:xfrm>
-          <a:prstGeom prst="rect">
-            <a:avLst/>
-          </a:prstGeom>
-          <a:solidFill>
-            <a:srgbClr val="B88E23"/>
-          </a:solidFill>
-          <a:ln>
-            <a:noFill/>
-          </a:ln>
-          <a:effectLst/>
-        </p:spPr>
-        <p:style>
-          <a:lnRef idx="1">
-            <a:schemeClr val="accent1"/>
-          </a:lnRef>
-          <a:fillRef idx="3">
-            <a:schemeClr val="accent1"/>
-          </a:fillRef>
-          <a:effectRef idx="2">
-            <a:schemeClr val="accent1"/>
-          </a:effectRef>
-          <a:fontRef idx="minor">
-            <a:schemeClr val="lt1"/>
-          </a:fontRef>
-        </p:style>
-        <p:txBody>
-          <a:bodyPr rtlCol="0" anchor="ctr" wrap="square">
-            <a:normAutofit/>
-          </a:bodyPr>
-          <a:lstStyle/>
-          <a:p>
-            <a:pPr algn="ctr"/>
-          </a:p>
-        </p:txBody>
-      </p:sp>
-      <p:pic>
-        <p:nvPicPr>
-          <p:cNvPr id="5" name="Picture 4" descr="frontend_demo.png"/>
-          <p:cNvPicPr>
-            <a:picLocks noChangeAspect="1"/>
-          </p:cNvPicPr>
-          <p:nvPr/>
-        </p:nvPicPr>
-        <p:blipFill>
-          <a:blip r:embed="rId2"/>
-          <a:stretch>
-            <a:fillRect/>
-          </a:stretch>
-        </p:blipFill>
-        <p:spPr>
-          <a:xfrm>
-            <a:off x="566928" y="1600200"/>
-            <a:ext cx="6766560" cy="4954379"/>
-          </a:xfrm>
-          <a:prstGeom prst="rect">
-            <a:avLst/>
-          </a:prstGeom>
-        </p:spPr>
-      </p:pic>
-      <p:sp>
-        <p:nvSpPr>
-          <p:cNvPr id="7" name="TextBox 6"/>
-          <p:cNvSpPr txBox="1"/>
-          <p:nvPr/>
-        </p:nvSpPr>
-        <p:spPr>
-          <a:xfrm>
-            <a:off x="566928" y="6263640"/>
-            <a:ext cx="11064240" cy="365760"/>
-          </a:xfrm>
-          <a:prstGeom prst="rect">
-            <a:avLst/>
-          </a:prstGeom>
-          <a:noFill/>
-        </p:spPr>
-        <p:txBody>
-          <a:bodyPr wrap="square" anchor="t">
-            <a:normAutofit/>
-          </a:bodyPr>
-          <a:lstStyle/>
-          <a:p>
-            <a:r>
-              <a:rPr sz="1050" b="0" i="1">
-                <a:solidFill>
-                  <a:srgbClr val="5C4E3D"/>
-                </a:solidFill>
-                <a:latin typeface="DM Sans"/>
-                <a:ea typeface="DM Sans"/>
-                <a:cs typeface="DM Sans"/>
-              </a:rPr>
-              <a:t>Screenshot: Vue client in API mode (2026-09-27; route and evidence computed live by the backend, not mocked).</a:t>
-            </a:r>
-          </a:p>
-        </p:txBody>
-      </p:sp>
-      <p:sp>
-        <p:nvSpPr>
-          <p:cNvPr id="8" name="TextBox 5"/>
-          <p:cNvSpPr txBox="1"/>
-          <p:nvPr/>
-        </p:nvSpPr>
-        <p:spPr>
-          <a:xfrm>
-            <a:off x="566928" y="6263640"/>
-            <a:ext cx="11064240" cy="365760"/>
-          </a:xfrm>
-          <a:prstGeom prst="rect">
-            <a:avLst/>
-          </a:prstGeom>
-          <a:noFill/>
-        </p:spPr>
-        <p:txBody>
-          <a:bodyPr wrap="square" anchor="t">
-            <a:normAutofit/>
-          </a:bodyPr>
-          <a:lstStyle/>
-          <a:p>
-            <a:r>
-              <a:rPr sz="1050" b="0" i="1">
-                <a:solidFill>
-                  <a:srgbClr val="5C4E3D"/>
-                </a:solidFill>
-                <a:latin typeface="DM Sans"/>
-                <a:ea typeface="DM Sans"/>
-                <a:cs typeface="DM Sans"/>
-              </a:rPr>
-              <a:t>Screenshot: the Vue client in API mode, 2026-09-27.</a:t>
-            </a:r>
-          </a:p>
-        </p:txBody>
-      </p:sp>
-      <p:sp>
-        <p:nvSpPr>
-          <p:cNvPr id="9" name="TextBox 4"/>
-          <p:cNvSpPr txBox="1"/>
-          <p:nvPr/>
-        </p:nvSpPr>
-        <p:spPr>
-          <a:xfrm>
-            <a:off x="7543800" y="1600200"/>
-            <a:ext cx="4114800" cy="4572000"/>
-          </a:xfrm>
-          <a:prstGeom prst="rect">
-            <a:avLst/>
-          </a:prstGeom>
-          <a:noFill/>
-        </p:spPr>
-        <p:txBody>
-          <a:bodyPr wrap="square" anchor="t">
-            <a:normAutofit/>
-          </a:bodyPr>
-          <a:lstStyle/>
-          <a:p>
-            <a:pPr>
-              <a:spcAft>
-                <a:spcPts val="900"/>
-              </a:spcAft>
-            </a:pPr>
-            <a:r>
-              <a:rPr sz="1300" b="0" i="0">
-                <a:solidFill>
-                  <a:srgbClr val="454240"/>
-                </a:solidFill>
-                <a:latin typeface="DM Sans"/>
-                <a:ea typeface="DM Sans"/>
-                <a:cs typeface="DM Sans"/>
-              </a:rPr>
-              <a:t>● 23 HTTP endpoints, 13 of them dispatch operations.</a:t>
-            </a:r>
-          </a:p>
-          <a:p>
-            <a:pPr>
-              <a:spcAft>
-                <a:spcPts val="900"/>
-              </a:spcAft>
-            </a:pPr>
-            <a:r>
-              <a:rPr sz="1300" b="0" i="0">
-                <a:solidFill>
-                  <a:srgbClr val="454240"/>
-                </a:solidFill>
-                <a:latin typeface="DM Sans"/>
-                <a:ea typeface="DM Sans"/>
-                <a:cs typeface="DM Sans"/>
-              </a:rPr>
-              <a:t>● One Vue 3 client, 23 components; EN/ZH and offline mode.</a:t>
-            </a:r>
-          </a:p>
-          <a:p>
-            <a:pPr>
-              <a:spcAft>
-                <a:spcPts val="900"/>
-              </a:spcAft>
-            </a:pPr>
-            <a:r>
-              <a:rPr sz="1300" b="0" i="0">
-                <a:solidFill>
-                  <a:srgbClr val="454240"/>
-                </a:solidFill>
-                <a:latin typeface="DM Sans"/>
-                <a:ea typeface="DM Sans"/>
-                <a:cs typeface="DM Sans"/>
-              </a:rPr>
-              <a:t>● 25 archived cases; 56 dispatch operations persisted.</a:t>
-            </a:r>
-          </a:p>
-          <a:p>
-            <a:pPr>
-              <a:spcAft>
-                <a:spcPts val="900"/>
-              </a:spcAft>
-            </a:pPr>
-            <a:r>
-              <a:rPr sz="1300" b="0" i="0">
-                <a:solidFill>
-                  <a:srgbClr val="454240"/>
-                </a:solidFill>
-                <a:latin typeface="DM Sans"/>
-                <a:ea typeface="DM Sans"/>
-                <a:cs typeface="DM Sans"/>
-              </a:rPr>
-              <a:t>● 305 test functions across 35 files.</a:t>
-            </a:r>
-          </a:p>
-          <a:p>
-            <a:pPr>
-              <a:spcAft>
-                <a:spcPts val="900"/>
-              </a:spcAft>
-            </a:pPr>
-            <a:r>
-              <a:rPr sz="1300" b="0" i="0">
-                <a:solidFill>
-                  <a:srgbClr val="454240"/>
-                </a:solidFill>
-                <a:latin typeface="DM Sans"/>
-                <a:ea typeface="DM Sans"/>
-                <a:cs typeface="DM Sans"/>
-              </a:rPr>
-              <a:t>● Still missing: cloud deploy, de-duplication, destination pool.</a:t>
-            </a:r>
-          </a:p>
-        </p:txBody>
-      </p:sp>
-    </p:spTree>
-  </p:cSld>
-  <p:clrMapOvr>
-    <a:masterClrMapping/>
-  </p:clrMapOvr>
-</p:sld>
-</file>
-
-<file path=ppt/slides/slide8.xml><?xml version="1.0" encoding="utf-8"?>
-<p:sld xmlns:a="http://schemas.openxmlformats.org/drawingml/2006/main" xmlns:p="http://schemas.openxmlformats.org/presentationml/2006/main" xmlns:r="http://schemas.openxmlformats.org/officeDocument/2006/relationships">
-  <p:cSld>
-    <p:spTree>
-      <p:nvGrpSpPr>
-        <p:cNvPr id="1" name=""/>
-        <p:cNvGrpSpPr/>
-        <p:nvPr/>
-      </p:nvGrpSpPr>
-      <p:grpSpPr/>
-      <p:sp>
-        <p:nvSpPr>
-          <p:cNvPr id="2" name="TextBox 1"/>
-          <p:cNvSpPr txBox="1"/>
-          <p:nvPr/>
-        </p:nvSpPr>
-        <p:spPr>
-          <a:xfrm>
-            <a:off x="566928" y="365760"/>
-            <a:ext cx="11064240" cy="868680"/>
-          </a:xfrm>
-          <a:prstGeom prst="rect">
-            <a:avLst/>
-          </a:prstGeom>
-          <a:noFill/>
-        </p:spPr>
-        <p:txBody>
-          <a:bodyPr wrap="square" anchor="t">
-            <a:normAutofit/>
-          </a:bodyPr>
-          <a:lstStyle/>
-          <a:p>
-            <a:r>
-              <a:rPr sz="3700" b="0" i="0">
-                <a:solidFill>
-                  <a:srgbClr val="454240"/>
-                </a:solidFill>
-                <a:latin typeface="Libre Baskerville"/>
-                <a:ea typeface="Libre Baskerville"/>
-                <a:cs typeface="Libre Baskerville"/>
-              </a:rPr>
-              <a:t>Results So Far</a:t>
-            </a:r>
-          </a:p>
-        </p:txBody>
-      </p:sp>
-      <p:sp>
-        <p:nvSpPr>
-          <p:cNvPr id="3" name="TextBox 2"/>
-          <p:cNvSpPr txBox="1"/>
-          <p:nvPr/>
-        </p:nvSpPr>
-        <p:spPr>
-          <a:xfrm>
-            <a:off x="603504" y="1170432"/>
-            <a:ext cx="11064240" cy="365760"/>
-          </a:xfrm>
-          <a:prstGeom prst="rect">
-            <a:avLst/>
-          </a:prstGeom>
-          <a:noFill/>
-        </p:spPr>
-        <p:txBody>
-          <a:bodyPr wrap="square" anchor="t">
-            <a:normAutofit/>
-          </a:bodyPr>
-          <a:lstStyle/>
-          <a:p>
-            <a:r>
-              <a:rPr sz="1150" b="0" i="0">
-                <a:solidFill>
-                  <a:srgbClr val="5C4E3D"/>
-                </a:solidFill>
-                <a:latin typeface="DM Sans"/>
-                <a:ea typeface="DM Sans"/>
-                <a:cs typeface="DM Sans"/>
-              </a:rPr>
-              <a:t>Every number reproducible in the repo</a:t>
-            </a:r>
-          </a:p>
-        </p:txBody>
-      </p:sp>
-      <p:sp>
-        <p:nvSpPr>
-          <p:cNvPr id="4" name="Rectangle 3"/>
-          <p:cNvSpPr/>
-          <p:nvPr/>
-        </p:nvSpPr>
-        <p:spPr>
-          <a:xfrm>
-            <a:off x="566928" y="1097280"/>
-            <a:ext cx="2011680" cy="20320"/>
-          </a:xfrm>
-          <a:prstGeom prst="rect">
-            <a:avLst/>
-          </a:prstGeom>
-          <a:solidFill>
-            <a:srgbClr val="B88E23"/>
-          </a:solidFill>
-          <a:ln>
-            <a:noFill/>
-          </a:ln>
-          <a:effectLst/>
-        </p:spPr>
-        <p:style>
-          <a:lnRef idx="1">
-            <a:schemeClr val="accent1"/>
-          </a:lnRef>
-          <a:fillRef idx="3">
-            <a:schemeClr val="accent1"/>
-          </a:fillRef>
-          <a:effectRef idx="2">
-            <a:schemeClr val="accent1"/>
-          </a:effectRef>
-          <a:fontRef idx="minor">
-            <a:schemeClr val="lt1"/>
-          </a:fontRef>
-        </p:style>
-        <p:txBody>
-          <a:bodyPr rtlCol="0" anchor="ctr" wrap="square">
-            <a:normAutofit/>
-          </a:bodyPr>
-          <a:lstStyle/>
-          <a:p>
-            <a:pPr algn="ctr"/>
-          </a:p>
-        </p:txBody>
-      </p:sp>
-      <p:sp>
-        <p:nvSpPr>
-          <p:cNvPr id="6" name="TextBox 4"/>
-          <p:cNvSpPr txBox="1"/>
-          <p:nvPr/>
-        </p:nvSpPr>
-        <p:spPr>
-          <a:xfrm>
-            <a:off x="566928" y="6263640"/>
-            <a:ext cx="11064240" cy="365760"/>
-          </a:xfrm>
-          <a:prstGeom prst="rect">
-            <a:avLst/>
-          </a:prstGeom>
-          <a:noFill/>
-        </p:spPr>
-        <p:txBody>
-          <a:bodyPr wrap="square" anchor="t">
-            <a:normAutofit/>
-          </a:bodyPr>
-          <a:lstStyle/>
-          <a:p>
-            <a:r>
-              <a:rPr sz="1050" b="0" i="1">
-                <a:solidFill>
-                  <a:srgbClr val="5C4E3D"/>
-                </a:solidFill>
-                <a:latin typeface="DM Sans"/>
-                <a:ea typeface="DM Sans"/>
-                <a:cs typeface="DM Sans"/>
-              </a:rPr>
-              <a:t>Boundaries: suspected-synthetic data, single random split, time-bounded solver — these do not establish real-world or operational savings.</a:t>
-            </a:r>
-          </a:p>
-        </p:txBody>
-      </p:sp>
-      <p:sp>
-        <p:nvSpPr>
-          <p:cNvPr id="7" name="TextBox 6"/>
-          <p:cNvSpPr txBox="1"/>
-          <p:nvPr/>
-        </p:nvSpPr>
-        <p:spPr>
-          <a:xfrm>
-            <a:off x="566928" y="1828800"/>
-            <a:ext cx="11064240" cy="4023360"/>
-          </a:xfrm>
-          <a:prstGeom prst="rect">
-            <a:avLst/>
-          </a:prstGeom>
-          <a:noFill/>
-        </p:spPr>
-        <p:txBody>
-          <a:bodyPr wrap="square" anchor="t">
-            <a:normAutofit/>
-          </a:bodyPr>
-          <a:lstStyle/>
-          <a:p>
-            <a:pPr>
-              <a:spcAft>
-                <a:spcPts val="1600"/>
-              </a:spcAft>
-            </a:pPr>
-            <a:r>
-              <a:rPr sz="1700" b="0" i="0">
-                <a:solidFill>
-                  <a:srgbClr val="454240"/>
-                </a:solidFill>
-                <a:latin typeface="DM Sans"/>
-                <a:ea typeface="DM Sans"/>
-                <a:cs typeface="DM Sans"/>
-              </a:rPr>
-              <a:t>● Engine vs human gold: 54/57 = 94.7%; scrap recall 33/33.</a:t>
-            </a:r>
-          </a:p>
-          <a:p>
-            <a:pPr>
-              <a:spcAft>
-                <a:spcPts val="1600"/>
-              </a:spcAft>
-            </a:pPr>
-            <a:r>
-              <a:rPr sz="1700" b="0" i="0">
-                <a:solidFill>
-                  <a:srgbClr val="454240"/>
-                </a:solidFill>
-                <a:latin typeface="DM Sans"/>
-                <a:ea typeface="DM Sans"/>
-                <a:cs typeface="DM Sans"/>
-              </a:rPr>
-              <a:t>● Annotator agreement κ = 0.6434 — below our 0.80 target.</a:t>
-            </a:r>
-          </a:p>
-          <a:p>
-            <a:pPr>
-              <a:spcAft>
-                <a:spcPts val="1600"/>
-              </a:spcAft>
-            </a:pPr>
-            <a:r>
-              <a:rPr sz="1700" b="0" i="0">
-                <a:solidFill>
-                  <a:srgbClr val="454240"/>
-                </a:solidFill>
-                <a:latin typeface="DM Sans"/>
-                <a:ea typeface="DM Sans"/>
-                <a:cs typeface="DM Sans"/>
-              </a:rPr>
-              <a:t>● Routing: 142.63 → 133.81 km (−6.19%, 0 violations); Solomon optima reached in 10 s.</a:t>
-            </a:r>
-          </a:p>
-          <a:p>
-            <a:pPr>
-              <a:spcAft>
-                <a:spcPts val="1600"/>
-              </a:spcAft>
-            </a:pPr>
-            <a:r>
-              <a:rPr sz="1700" b="0" i="0">
-                <a:solidFill>
-                  <a:srgbClr val="454240"/>
-                </a:solidFill>
-                <a:latin typeface="DM Sans"/>
-                <a:ea typeface="DM Sans"/>
-                <a:cs typeface="DM Sans"/>
-              </a:rPr>
-              <a:t>● Risk model: F1 0.691 / ROC-AUC 0.925; cause Top-1 0.143 is below the majority baseline and reported as such.</a:t>
-            </a:r>
-          </a:p>
-        </p:txBody>
-      </p:sp>
-    </p:spTree>
-  </p:cSld>
-  <p:clrMapOvr>
-    <a:masterClrMapping/>
-  </p:clrMapOvr>
-</p:sld>
-</file>
-
 <file path=ppt/slides/slide9.xml><?xml version="1.0" encoding="utf-8"?>
 <p:sld xmlns:a="http://schemas.openxmlformats.org/drawingml/2006/main" xmlns:r="http://schemas.openxmlformats.org/officeDocument/2006/relationships" xmlns:p="http://schemas.openxmlformats.org/presentationml/2006/main">
   <p:cSld>
@@ -5111,7 +5390,7 @@
         </p:nvSpPr>
         <p:spPr>
           <a:xfrm>
-            <a:off x="661475" y="729754"/>
+            <a:off x="661475" y="841970"/>
             <a:ext cx="10868745" cy="590649"/>
           </a:xfrm>
           <a:prstGeom prst="rect">
@@ -5140,85 +5419,15 @@
                 <a:ea typeface="Libre Baskerville" panose="02000000000000000000" pitchFamily="34" charset="-122"/>
                 <a:cs typeface="Libre Baskerville" panose="02000000000000000000" pitchFamily="34" charset="-120"/>
               </a:rPr>
-              <a:t>Risks, Team &amp; Next Steps</a:t>
+              <a:t>Data: Verifiable, Disclosed Provenance</a:t>
             </a:r>
             <a:endParaRPr lang="en-US" sz="3700" dirty="0"/>
-          </a:p>
-        </p:txBody>
-      </p:sp>
-      <p:sp>
-        <p:nvSpPr>
-          <p:cNvPr id="3" name="Shape 1"/>
-          <p:cNvSpPr/>
-          <p:nvPr/>
-        </p:nvSpPr>
-        <p:spPr>
-          <a:xfrm>
-            <a:off x="525350" y="1603871"/>
-            <a:ext cx="5476043" cy="3102074"/>
-          </a:xfrm>
-          <a:prstGeom prst="roundRect">
-            <a:avLst>
-              <a:gd name="adj" fmla="val 4387"/>
-            </a:avLst>
-          </a:prstGeom>
-          <a:solidFill>
-            <a:srgbClr val="063E5F"/>
-          </a:solidFill>
-        </p:spPr>
-        <p:txBody>
-          <a:bodyPr wrap="square">
-            <a:normAutofit/>
-          </a:bodyPr>
-          <a:p/>
-        </p:txBody>
-      </p:sp>
-      <p:sp>
-        <p:nvSpPr>
-          <p:cNvPr id="4" name="Text 2"/>
-          <p:cNvSpPr/>
-          <p:nvPr/>
-        </p:nvSpPr>
-        <p:spPr>
-          <a:xfrm>
-            <a:off x="714357" y="1792883"/>
-            <a:ext cx="5098029" cy="295275"/>
-          </a:xfrm>
-          <a:prstGeom prst="rect">
-            <a:avLst/>
-          </a:prstGeom>
-          <a:noFill/>
-        </p:spPr>
-        <p:txBody>
-          <a:bodyPr wrap="square" lIns="0" tIns="0" rIns="0" bIns="0" rtlCol="0" anchor="t">
-            <a:normAutofit/>
-          </a:bodyPr>
-          <a:lstStyle/>
-          <a:p>
-            <a:pPr marL="0" indent="0" algn="l">
-              <a:lnSpc>
-                <a:spcPct val="104000"/>
-              </a:lnSpc>
-              <a:buNone/>
-            </a:pPr>
-            <a:r>
-              <a:rPr lang="en-US" sz="1850" dirty="0">
-                <a:solidFill>
-                  <a:srgbClr val="FFFFFF"/>
-                </a:solidFill>
-                <a:latin typeface="Libre Baskerville" panose="02000000000000000000" pitchFamily="34" charset="0"/>
-                <a:ea typeface="Libre Baskerville" panose="02000000000000000000" pitchFamily="34" charset="-122"/>
-                <a:cs typeface="Libre Baskerville" panose="02000000000000000000" pitchFamily="34" charset="-120"/>
-              </a:rPr>
-              <a:t>Risk Mitigations</a:t>
-            </a:r>
-            <a:endParaRPr lang="en-US" sz="1850" dirty="0"/>
           </a:p>
         </p:txBody>
       </p:sp>
       <p:pic>
         <p:nvPicPr>
-          <p:cNvPr id="5" name="Image 0" descr="preencoded.png"/>
+          <p:cNvPr id="3" name="Image 0" descr="preencoded.png"/>
           <p:cNvPicPr>
             <a:picLocks noChangeAspect="1"/>
           </p:cNvPicPr>
@@ -5238,8 +5447,8 @@
         </p:blipFill>
         <p:spPr>
           <a:xfrm>
-            <a:off x="785198" y="2310209"/>
-            <a:ext cx="283461" cy="283468"/>
+            <a:off x="661475" y="1810643"/>
+            <a:ext cx="472468" cy="472480"/>
           </a:xfrm>
           <a:prstGeom prst="rect">
             <a:avLst/>
@@ -5248,14 +5457,57 @@
       </p:pic>
       <p:sp>
         <p:nvSpPr>
-          <p:cNvPr id="6" name="Text 3"/>
-          <p:cNvSpPr/>
-          <p:nvPr/>
-        </p:nvSpPr>
-        <p:spPr>
-          <a:xfrm>
-            <a:off x="1328605" y="2300784"/>
-            <a:ext cx="1816650" cy="1209675"/>
+          <p:cNvPr id="4" name="Text 1"/>
+          <p:cNvSpPr/>
+          <p:nvPr/>
+        </p:nvSpPr>
+        <p:spPr>
+          <a:xfrm>
+            <a:off x="1370177" y="1810643"/>
+            <a:ext cx="2756724" cy="590550"/>
+          </a:xfrm>
+          <a:prstGeom prst="rect">
+            <a:avLst/>
+          </a:prstGeom>
+          <a:noFill/>
+        </p:spPr>
+        <p:txBody>
+          <a:bodyPr wrap="square" lIns="0" tIns="0" rIns="0" bIns="0" rtlCol="0" anchor="t">
+            <a:normAutofit/>
+          </a:bodyPr>
+          <a:lstStyle/>
+          <a:p>
+            <a:pPr marL="0" indent="0" algn="l">
+              <a:lnSpc>
+                <a:spcPct val="104000"/>
+              </a:lnSpc>
+              <a:buNone/>
+            </a:pPr>
+            <a:r>
+              <a:rPr lang="en-US" sz="1850" dirty="0">
+                <a:solidFill>
+                  <a:srgbClr val="454240"/>
+                </a:solidFill>
+                <a:latin typeface="Libre Baskerville" panose="02000000000000000000" pitchFamily="34" charset="0"/>
+                <a:ea typeface="Libre Baskerville" panose="02000000000000000000" pitchFamily="34" charset="-122"/>
+                <a:cs typeface="Libre Baskerville" panose="02000000000000000000" pitchFamily="34" charset="-120"/>
+              </a:rPr>
+              <a:t>Cold Chain Silent Failure (Kaggle)</a:t>
+            </a:r>
+            <a:endParaRPr lang="en-US" sz="1850" dirty="0"/>
+          </a:p>
+        </p:txBody>
+      </p:sp>
+      <p:sp>
+        <p:nvSpPr>
+          <p:cNvPr id="5" name="Text 2"/>
+          <p:cNvSpPr/>
+          <p:nvPr/>
+        </p:nvSpPr>
+        <p:spPr>
+          <a:xfrm>
+            <a:off x="1370177" y="2514600"/>
+            <a:ext cx="2756724" cy="907256"/>
           </a:xfrm>
           <a:prstGeom prst="rect">
             <a:avLst/>
@@ -5275,26 +5527,15 @@
               <a:buNone/>
             </a:pPr>
             <a:r>
-              <a:rPr lang="en-US" sz="1450" b="1" dirty="0">
-                <a:solidFill>
-                  <a:srgbClr val="FFFFFF"/>
-                </a:solidFill>
-                <a:latin typeface="DM Sans Bold" pitchFamily="34" charset="0"/>
-                <a:ea typeface="DM Sans Bold" pitchFamily="34" charset="-122"/>
-                <a:cs typeface="DM Sans Bold" pitchFamily="34" charset="-120"/>
-              </a:rPr>
-              <a:t>Annotator agreement</a:t>
-            </a:r>
-            <a:r>
               <a:rPr lang="en-US" sz="1450" dirty="0">
                 <a:solidFill>
-                  <a:srgbClr val="FFFFFF"/>
+                  <a:srgbClr val="454240"/>
                 </a:solidFill>
                 <a:latin typeface="DM Sans" pitchFamily="34" charset="0"/>
                 <a:ea typeface="DM Sans" pitchFamily="34" charset="-122"/>
                 <a:cs typeface="DM Sans" pitchFamily="34" charset="-120"/>
               </a:rPr>
-              <a:t> κ = 0.6434 vs our 0.80 target → report it</a:t>
+              <a:t>≈8,000 rows — failure classification.</a:t>
             </a:r>
             <a:endParaRPr lang="en-US" sz="1450" dirty="0"/>
           </a:p>
@@ -5302,376 +5543,7 @@
       </p:sp>
       <p:pic>
         <p:nvPicPr>
-          <p:cNvPr id="7" name="Image 1" descr="preencoded.png"/>
-          <p:cNvPicPr>
-            <a:picLocks noChangeAspect="1"/>
-          </p:cNvPicPr>
-          <p:nvPr/>
-        </p:nvPicPr>
-        <p:blipFill>
-          <a:blip r:embed="rId1">
-            <a:extLst>
-              <a:ext uri="{96DAC541-7B7A-43D3-8B79-37D633B846F1}">
-                <asvg:svgBlip xmlns:asvg="http://schemas.microsoft.com/office/drawing/2016/SVG/main" r:embed="rId2"/>
-              </a:ext>
-            </a:extLst>
-          </a:blip>
-          <a:stretch>
-            <a:fillRect/>
-          </a:stretch>
-        </p:blipFill>
-        <p:spPr>
-          <a:xfrm>
-            <a:off x="3452329" y="2310209"/>
-            <a:ext cx="283461" cy="283468"/>
-          </a:xfrm>
-          <a:prstGeom prst="rect">
-            <a:avLst/>
-          </a:prstGeom>
-        </p:spPr>
-      </p:pic>
-      <p:sp>
-        <p:nvSpPr>
-          <p:cNvPr id="8" name="Text 4"/>
-          <p:cNvSpPr/>
-          <p:nvPr/>
-        </p:nvSpPr>
-        <p:spPr>
-          <a:xfrm>
-            <a:off x="3995737" y="2300784"/>
-            <a:ext cx="1816650" cy="1209675"/>
-          </a:xfrm>
-          <a:prstGeom prst="rect">
-            <a:avLst/>
-          </a:prstGeom>
-          <a:noFill/>
-        </p:spPr>
-        <p:txBody>
-          <a:bodyPr wrap="square" lIns="0" tIns="0" rIns="0" bIns="0" rtlCol="0" anchor="t">
-            <a:normAutofit/>
-          </a:bodyPr>
-          <a:lstStyle/>
-          <a:p>
-            <a:pPr marL="0" indent="0" algn="l">
-              <a:lnSpc>
-                <a:spcPct val="133000"/>
-              </a:lnSpc>
-              <a:buNone/>
-            </a:pPr>
-            <a:r>
-              <a:rPr lang="en-US" sz="1450" b="1" dirty="0">
-                <a:solidFill>
-                  <a:srgbClr val="FFFFFF"/>
-                </a:solidFill>
-                <a:latin typeface="DM Sans Bold" pitchFamily="34" charset="0"/>
-                <a:ea typeface="DM Sans Bold" pitchFamily="34" charset="-122"/>
-                <a:cs typeface="DM Sans Bold" pitchFamily="34" charset="-120"/>
-              </a:rPr>
-              <a:t>Quarantine recall 0/3</a:t>
-            </a:r>
-            <a:r>
-              <a:rPr lang="en-US" sz="1450" dirty="0">
-                <a:solidFill>
-                  <a:srgbClr val="FFFFFF"/>
-                </a:solidFill>
-                <a:latin typeface="DM Sans" pitchFamily="34" charset="0"/>
-                <a:ea typeface="DM Sans" pitchFamily="34" charset="-122"/>
-                <a:cs typeface="DM Sans" pitchFamily="34" charset="-120"/>
-              </a:rPr>
-              <a:t> 3 gold cases → report support counts</a:t>
-            </a:r>
-            <a:endParaRPr lang="en-US" sz="1450" dirty="0"/>
-          </a:p>
-        </p:txBody>
-      </p:sp>
-      <p:pic>
-        <p:nvPicPr>
-          <p:cNvPr id="9" name="Image 2" descr="preencoded.png"/>
-          <p:cNvPicPr>
-            <a:picLocks noChangeAspect="1"/>
-          </p:cNvPicPr>
-          <p:nvPr/>
-        </p:nvPicPr>
-        <p:blipFill>
-          <a:blip r:embed="rId1">
-            <a:extLst>
-              <a:ext uri="{96DAC541-7B7A-43D3-8B79-37D633B846F1}">
-                <asvg:svgBlip xmlns:asvg="http://schemas.microsoft.com/office/drawing/2016/SVG/main" r:embed="rId2"/>
-              </a:ext>
-            </a:extLst>
-          </a:blip>
-          <a:stretch>
-            <a:fillRect/>
-          </a:stretch>
-        </p:blipFill>
-        <p:spPr>
-          <a:xfrm>
-            <a:off x="785198" y="3897908"/>
-            <a:ext cx="283461" cy="283468"/>
-          </a:xfrm>
-          <a:prstGeom prst="rect">
-            <a:avLst/>
-          </a:prstGeom>
-        </p:spPr>
-      </p:pic>
-      <p:sp>
-        <p:nvSpPr>
-          <p:cNvPr id="10" name="Text 5"/>
-          <p:cNvSpPr/>
-          <p:nvPr/>
-        </p:nvSpPr>
-        <p:spPr>
-          <a:xfrm>
-            <a:off x="1328605" y="3888482"/>
-            <a:ext cx="4483782" cy="604838"/>
-          </a:xfrm>
-          <a:prstGeom prst="rect">
-            <a:avLst/>
-          </a:prstGeom>
-          <a:noFill/>
-        </p:spPr>
-        <p:txBody>
-          <a:bodyPr wrap="square" lIns="0" tIns="0" rIns="0" bIns="0" rtlCol="0" anchor="t">
-            <a:normAutofit/>
-          </a:bodyPr>
-          <a:lstStyle/>
-          <a:p>
-            <a:pPr marL="0" indent="0" algn="l">
-              <a:lnSpc>
-                <a:spcPct val="133000"/>
-              </a:lnSpc>
-              <a:buNone/>
-            </a:pPr>
-            <a:r>
-              <a:rPr lang="en-US" sz="1450" b="1" dirty="0">
-                <a:solidFill>
-                  <a:srgbClr val="FFFFFF"/>
-                </a:solidFill>
-                <a:latin typeface="DM Sans Bold" pitchFamily="34" charset="0"/>
-                <a:ea typeface="DM Sans Bold" pitchFamily="34" charset="-122"/>
-                <a:cs typeface="DM Sans Bold" pitchFamily="34" charset="-120"/>
-              </a:rPr>
-              <a:t>Synthetic data</a:t>
-            </a:r>
-            <a:r>
-              <a:rPr lang="en-US" sz="1450" dirty="0">
-                <a:solidFill>
-                  <a:srgbClr val="FFFFFF"/>
-                </a:solidFill>
-                <a:latin typeface="DM Sans" pitchFamily="34" charset="0"/>
-                <a:ea typeface="DM Sans" pitchFamily="34" charset="-122"/>
-                <a:cs typeface="DM Sans" pitchFamily="34" charset="-120"/>
-              </a:rPr>
-              <a:t> suspected-synthetic → disclose the limit</a:t>
-            </a:r>
-            <a:endParaRPr lang="en-US" sz="1450" dirty="0"/>
-          </a:p>
-        </p:txBody>
-      </p:sp>
-      <p:sp>
-        <p:nvSpPr>
-          <p:cNvPr id="11" name="Text 6"/>
-          <p:cNvSpPr/>
-          <p:nvPr/>
-        </p:nvSpPr>
-        <p:spPr>
-          <a:xfrm>
-            <a:off x="6332776" y="1792883"/>
-            <a:ext cx="5203794" cy="295275"/>
-          </a:xfrm>
-          <a:prstGeom prst="rect">
-            <a:avLst/>
-          </a:prstGeom>
-          <a:noFill/>
-        </p:spPr>
-        <p:txBody>
-          <a:bodyPr wrap="square" lIns="0" tIns="0" rIns="0" bIns="0" rtlCol="0" anchor="t">
-            <a:normAutofit/>
-          </a:bodyPr>
-          <a:lstStyle/>
-          <a:p>
-            <a:pPr marL="0" indent="0" algn="l">
-              <a:lnSpc>
-                <a:spcPct val="104000"/>
-              </a:lnSpc>
-              <a:buNone/>
-            </a:pPr>
-            <a:r>
-              <a:rPr lang="en-US" sz="1850" dirty="0">
-                <a:solidFill>
-                  <a:srgbClr val="5C4E3D"/>
-                </a:solidFill>
-                <a:latin typeface="Libre Baskerville" panose="02000000000000000000" pitchFamily="34" charset="0"/>
-                <a:ea typeface="Libre Baskerville" panose="02000000000000000000" pitchFamily="34" charset="-122"/>
-                <a:cs typeface="Libre Baskerville" panose="02000000000000000000" pitchFamily="34" charset="-120"/>
-              </a:rPr>
-              <a:t>Team Roles</a:t>
-            </a:r>
-            <a:endParaRPr lang="en-US" sz="1850" dirty="0"/>
-          </a:p>
-        </p:txBody>
-      </p:sp>
-      <p:sp>
-        <p:nvSpPr>
-          <p:cNvPr id="12" name="Shape 7"/>
-          <p:cNvSpPr/>
-          <p:nvPr/>
-        </p:nvSpPr>
-        <p:spPr>
-          <a:xfrm>
-            <a:off x="6332776" y="2348012"/>
-            <a:ext cx="5203794" cy="25400"/>
-          </a:xfrm>
-          <a:prstGeom prst="roundRect">
-            <a:avLst>
-              <a:gd name="adj" fmla="val 49999"/>
-            </a:avLst>
-          </a:prstGeom>
-          <a:solidFill>
-            <a:srgbClr val="454240">
-              <a:alpha val="50000"/>
-            </a:srgbClr>
-          </a:solidFill>
-        </p:spPr>
-        <p:txBody>
-          <a:bodyPr wrap="square">
-            <a:normAutofit/>
-          </a:bodyPr>
-          <a:p/>
-        </p:txBody>
-      </p:sp>
-      <p:sp>
-        <p:nvSpPr>
-          <p:cNvPr id="13" name="Text 8"/>
-          <p:cNvSpPr/>
-          <p:nvPr/>
-        </p:nvSpPr>
-        <p:spPr>
-          <a:xfrm>
-            <a:off x="6332776" y="2633266"/>
-            <a:ext cx="5203794" cy="295275"/>
-          </a:xfrm>
-          <a:prstGeom prst="rect">
-            <a:avLst/>
-          </a:prstGeom>
-          <a:noFill/>
-        </p:spPr>
-        <p:txBody>
-          <a:bodyPr wrap="square" lIns="0" tIns="0" rIns="0" bIns="0" rtlCol="0" anchor="t">
-            <a:normAutofit/>
-          </a:bodyPr>
-          <a:lstStyle/>
-          <a:p>
-            <a:pPr marL="0" indent="0" algn="l">
-              <a:lnSpc>
-                <a:spcPct val="104000"/>
-              </a:lnSpc>
-              <a:buNone/>
-            </a:pPr>
-            <a:r>
-              <a:rPr lang="en-US" sz="1850" dirty="0">
-                <a:solidFill>
-                  <a:srgbClr val="5C4E3D"/>
-                </a:solidFill>
-                <a:latin typeface="Libre Baskerville" panose="02000000000000000000" pitchFamily="34" charset="0"/>
-                <a:ea typeface="Libre Baskerville" panose="02000000000000000000" pitchFamily="34" charset="-122"/>
-                <a:cs typeface="Libre Baskerville" panose="02000000000000000000" pitchFamily="34" charset="-120"/>
-              </a:rPr>
-              <a:t>Immediate Next Steps</a:t>
-            </a:r>
-            <a:endParaRPr lang="en-US" sz="1850" dirty="0"/>
-          </a:p>
-        </p:txBody>
-      </p:sp>
-      <p:sp>
-        <p:nvSpPr>
-          <p:cNvPr id="14" name="Text 9"/>
-          <p:cNvSpPr/>
-          <p:nvPr/>
-        </p:nvSpPr>
-        <p:spPr>
-          <a:xfrm>
-            <a:off x="6332776" y="3117552"/>
-            <a:ext cx="5203794" cy="1039416"/>
-          </a:xfrm>
-          <a:prstGeom prst="rect">
-            <a:avLst/>
-          </a:prstGeom>
-          <a:noFill/>
-        </p:spPr>
-        <p:txBody>
-          <a:bodyPr wrap="square" lIns="0" tIns="0" rIns="0" bIns="0" rtlCol="0" anchor="t">
-            <a:normAutofit/>
-          </a:bodyPr>
-          <a:lstStyle/>
-          <a:p>
-            <a:pPr marL="294640" indent="-294640" algn="l">
-              <a:lnSpc>
-                <a:spcPct val="133000"/>
-              </a:lnSpc>
-              <a:buSzPct val="100000"/>
-              <a:buChar char="•"/>
-            </a:pPr>
-            <a:r>
-              <a:rPr lang="en-US" sz="1450" dirty="0">
-                <a:solidFill>
-                  <a:srgbClr val="454240"/>
-                </a:solidFill>
-                <a:latin typeface="DM Sans" pitchFamily="34" charset="0"/>
-                <a:ea typeface="DM Sans" pitchFamily="34" charset="-122"/>
-                <a:cs typeface="DM Sans" pitchFamily="34" charset="-120"/>
-              </a:rPr>
-              <a:t>W1: threshold review; multi-fold risk experiments</a:t>
-            </a:r>
-            <a:endParaRPr lang="en-US" sz="1450" dirty="0"/>
-          </a:p>
-          <a:p>
-            <a:pPr marL="294640" indent="-294640" algn="l">
-              <a:lnSpc>
-                <a:spcPct val="133000"/>
-              </a:lnSpc>
-              <a:buSzPct val="100000"/>
-              <a:buChar char="•"/>
-            </a:pPr>
-            <a:r>
-              <a:rPr lang="en-US" sz="1450" dirty="0">
-                <a:solidFill>
-                  <a:srgbClr val="454240"/>
-                </a:solidFill>
-                <a:latin typeface="DM Sans" pitchFamily="34" charset="0"/>
-                <a:ea typeface="DM Sans" pitchFamily="34" charset="-122"/>
-                <a:cs typeface="DM Sans" pitchFamily="34" charset="-120"/>
-              </a:rPr>
-              <a:t>W3: integrated acceptance and failure states</a:t>
-            </a:r>
-            <a:endParaRPr lang="en-US" sz="1450" dirty="0"/>
-          </a:p>
-          <a:p>
-            <a:pPr marL="294640" indent="-294640" algn="l">
-              <a:lnSpc>
-                <a:spcPct val="133000"/>
-              </a:lnSpc>
-              <a:buSzPct val="100000"/>
-              <a:buChar char="•"/>
-            </a:pPr>
-            <a:r>
-              <a:rPr lang="en-US" sz="1450" dirty="0">
-                <a:solidFill>
-                  <a:srgbClr val="454240"/>
-                </a:solidFill>
-                <a:latin typeface="DM Sans" pitchFamily="34" charset="0"/>
-                <a:ea typeface="DM Sans" pitchFamily="34" charset="-122"/>
-                <a:cs typeface="DM Sans" pitchFamily="34" charset="-120"/>
-              </a:rPr>
-              <a:t>W5: reproduce cleanly; videos by 25 Oct</a:t>
-            </a:r>
-            <a:endParaRPr lang="en-US" sz="1450" dirty="0"/>
-          </a:p>
-        </p:txBody>
-      </p:sp>
-      <p:pic>
-        <p:nvPicPr>
-          <p:cNvPr id="15" name="Image 3" descr="preencoded.png"/>
+          <p:cNvPr id="6" name="Image 1" descr="preencoded.png"/>
           <p:cNvPicPr>
             <a:picLocks noChangeAspect="1"/>
           </p:cNvPicPr>
@@ -5691,8 +5563,8 @@
         </p:blipFill>
         <p:spPr>
           <a:xfrm>
-            <a:off x="636075" y="4893171"/>
-            <a:ext cx="2565336" cy="1260475"/>
+            <a:off x="4363135" y="1810643"/>
+            <a:ext cx="472468" cy="472480"/>
           </a:xfrm>
           <a:prstGeom prst="rect">
             <a:avLst/>
@@ -5701,14 +5573,57 @@
       </p:pic>
       <p:sp>
         <p:nvSpPr>
-          <p:cNvPr id="16" name="Text 10"/>
-          <p:cNvSpPr/>
-          <p:nvPr/>
-        </p:nvSpPr>
-        <p:spPr>
-          <a:xfrm>
-            <a:off x="901281" y="4918571"/>
-            <a:ext cx="2300131" cy="1209675"/>
+          <p:cNvPr id="7" name="Text 3"/>
+          <p:cNvSpPr/>
+          <p:nvPr/>
+        </p:nvSpPr>
+        <p:spPr>
+          <a:xfrm>
+            <a:off x="5071836" y="1810643"/>
+            <a:ext cx="2756724" cy="590550"/>
+          </a:xfrm>
+          <a:prstGeom prst="rect">
+            <a:avLst/>
+          </a:prstGeom>
+          <a:noFill/>
+        </p:spPr>
+        <p:txBody>
+          <a:bodyPr wrap="square" lIns="0" tIns="0" rIns="0" bIns="0" rtlCol="0" anchor="t">
+            <a:normAutofit/>
+          </a:bodyPr>
+          <a:lstStyle/>
+          <a:p>
+            <a:pPr marL="0" indent="0" algn="l">
+              <a:lnSpc>
+                <a:spcPct val="104000"/>
+              </a:lnSpc>
+              <a:buNone/>
+            </a:pPr>
+            <a:r>
+              <a:rPr lang="en-US" sz="1850" dirty="0">
+                <a:solidFill>
+                  <a:srgbClr val="454240"/>
+                </a:solidFill>
+                <a:latin typeface="Libre Baskerville" panose="02000000000000000000" pitchFamily="34" charset="0"/>
+                <a:ea typeface="Libre Baskerville" panose="02000000000000000000" pitchFamily="34" charset="-122"/>
+                <a:cs typeface="Libre Baskerville" panose="02000000000000000000" pitchFamily="34" charset="-120"/>
+              </a:rPr>
+              <a:t>Vaccine Distribution w/ Temp Logging (Kaggle)</a:t>
+            </a:r>
+            <a:endParaRPr lang="en-US" sz="1850" dirty="0"/>
+          </a:p>
+        </p:txBody>
+      </p:sp>
+      <p:sp>
+        <p:nvSpPr>
+          <p:cNvPr id="8" name="Text 4"/>
+          <p:cNvSpPr/>
+          <p:nvPr/>
+        </p:nvSpPr>
+        <p:spPr>
+          <a:xfrm>
+            <a:off x="5071836" y="2514600"/>
+            <a:ext cx="2756724" cy="1209675"/>
           </a:xfrm>
           <a:prstGeom prst="rect">
             <a:avLst/>
@@ -5728,17 +5643,6 @@
               <a:buNone/>
             </a:pPr>
             <a:r>
-              <a:rPr lang="en-US" sz="1450" b="1" dirty="0">
-                <a:solidFill>
-                  <a:srgbClr val="454240"/>
-                </a:solidFill>
-                <a:latin typeface="DM Sans Bold" pitchFamily="34" charset="0"/>
-                <a:ea typeface="DM Sans Bold" pitchFamily="34" charset="-122"/>
-                <a:cs typeface="DM Sans Bold" pitchFamily="34" charset="-120"/>
-              </a:rPr>
-              <a:t>Project Lead / Rules</a:t>
-            </a:r>
-            <a:r>
               <a:rPr lang="en-US" sz="1450" dirty="0">
                 <a:solidFill>
                   <a:srgbClr val="454240"/>
@@ -5747,7 +5651,7 @@
                 <a:ea typeface="DM Sans" pitchFamily="34" charset="-122"/>
                 <a:cs typeface="DM Sans" pitchFamily="34" charset="-120"/>
               </a:rPr>
-              <a:t> · Xu Wenzhe: rules, evidence, evaluation</a:t>
+              <a:t>≈26,700 rows — sequence and MKT work.</a:t>
             </a:r>
             <a:endParaRPr lang="en-US" sz="1450" dirty="0"/>
           </a:p>
@@ -5755,7 +5659,7 @@
       </p:sp>
       <p:pic>
         <p:nvPicPr>
-          <p:cNvPr id="17" name="Image 4" descr="preencoded.png"/>
+          <p:cNvPr id="9" name="Image 2" descr="preencoded.png"/>
           <p:cNvPicPr>
             <a:picLocks noChangeAspect="1"/>
           </p:cNvPicPr>
@@ -5775,8 +5679,8 @@
         </p:blipFill>
         <p:spPr>
           <a:xfrm>
-            <a:off x="3412246" y="4893171"/>
-            <a:ext cx="2565435" cy="1260475"/>
+            <a:off x="8064794" y="1810643"/>
+            <a:ext cx="472468" cy="472480"/>
           </a:xfrm>
           <a:prstGeom prst="rect">
             <a:avLst/>
@@ -5785,14 +5689,57 @@
       </p:pic>
       <p:sp>
         <p:nvSpPr>
-          <p:cNvPr id="18" name="Text 11"/>
-          <p:cNvSpPr/>
-          <p:nvPr/>
-        </p:nvSpPr>
-        <p:spPr>
-          <a:xfrm>
-            <a:off x="3677451" y="4918571"/>
-            <a:ext cx="2300230" cy="907256"/>
+          <p:cNvPr id="10" name="Text 5"/>
+          <p:cNvSpPr/>
+          <p:nvPr/>
+        </p:nvSpPr>
+        <p:spPr>
+          <a:xfrm>
+            <a:off x="8773496" y="1810643"/>
+            <a:ext cx="2756724" cy="590550"/>
+          </a:xfrm>
+          <a:prstGeom prst="rect">
+            <a:avLst/>
+          </a:prstGeom>
+          <a:noFill/>
+        </p:spPr>
+        <p:txBody>
+          <a:bodyPr wrap="square" lIns="0" tIns="0" rIns="0" bIns="0" rtlCol="0" anchor="t">
+            <a:normAutofit/>
+          </a:bodyPr>
+          <a:lstStyle/>
+          <a:p>
+            <a:pPr marL="0" indent="0" algn="l">
+              <a:lnSpc>
+                <a:spcPct val="104000"/>
+              </a:lnSpc>
+              <a:buNone/>
+            </a:pPr>
+            <a:r>
+              <a:rPr lang="en-US" sz="1850" dirty="0">
+                <a:solidFill>
+                  <a:srgbClr val="454240"/>
+                </a:solidFill>
+                <a:latin typeface="Libre Baskerville" panose="02000000000000000000" pitchFamily="34" charset="0"/>
+                <a:ea typeface="Libre Baskerville" panose="02000000000000000000" pitchFamily="34" charset="-122"/>
+                <a:cs typeface="Libre Baskerville" panose="02000000000000000000" pitchFamily="34" charset="-120"/>
+              </a:rPr>
+              <a:t>Electric Sheep Africa Dataset</a:t>
+            </a:r>
+            <a:endParaRPr lang="en-US" sz="1850" dirty="0"/>
+          </a:p>
+        </p:txBody>
+      </p:sp>
+      <p:sp>
+        <p:nvSpPr>
+          <p:cNvPr id="11" name="Text 6"/>
+          <p:cNvSpPr/>
+          <p:nvPr/>
+        </p:nvSpPr>
+        <p:spPr>
+          <a:xfrm>
+            <a:off x="8773496" y="2514600"/>
+            <a:ext cx="2756724" cy="1209675"/>
           </a:xfrm>
           <a:prstGeom prst="rect">
             <a:avLst/>
@@ -5812,17 +5759,6 @@
               <a:buNone/>
             </a:pPr>
             <a:r>
-              <a:rPr lang="en-US" sz="1450" b="1" dirty="0">
-                <a:solidFill>
-                  <a:srgbClr val="454240"/>
-                </a:solidFill>
-                <a:latin typeface="DM Sans Bold" pitchFamily="34" charset="0"/>
-                <a:ea typeface="DM Sans Bold" pitchFamily="34" charset="-122"/>
-                <a:cs typeface="DM Sans Bold" pitchFamily="34" charset="-120"/>
-              </a:rPr>
-              <a:t>Data &amp; ML</a:t>
-            </a:r>
-            <a:r>
               <a:rPr lang="en-US" sz="1450" dirty="0">
                 <a:solidFill>
                   <a:srgbClr val="454240"/>
@@ -5831,7 +5767,7 @@
                 <a:ea typeface="DM Sans" pitchFamily="34" charset="-122"/>
                 <a:cs typeface="DM Sans" pitchFamily="34" charset="-120"/>
               </a:rPr>
-              <a:t> · Zhu Jianyu: data, risk, causes, SHAP</a:t>
+              <a:t>Simulated facility-monthly records.</a:t>
             </a:r>
             <a:endParaRPr lang="en-US" sz="1450" dirty="0"/>
           </a:p>
@@ -5839,17 +5775,17 @@
       </p:sp>
       <p:pic>
         <p:nvPicPr>
-          <p:cNvPr id="19" name="Image 5" descr="preencoded.png"/>
+          <p:cNvPr id="12" name="Image 3" descr="preencoded.png"/>
           <p:cNvPicPr>
             <a:picLocks noChangeAspect="1"/>
           </p:cNvPicPr>
           <p:nvPr/>
         </p:nvPicPr>
         <p:blipFill>
-          <a:blip r:embed="rId5">
+          <a:blip r:embed="rId7">
             <a:extLst>
               <a:ext uri="{96DAC541-7B7A-43D3-8B79-37D633B846F1}">
-                <asvg:svgBlip xmlns:asvg="http://schemas.microsoft.com/office/drawing/2016/SVG/main" r:embed="rId6"/>
+                <asvg:svgBlip xmlns:asvg="http://schemas.microsoft.com/office/drawing/2016/SVG/main" r:embed="rId8"/>
               </a:ext>
             </a:extLst>
           </a:blip>
@@ -5859,8 +5795,8 @@
         </p:blipFill>
         <p:spPr>
           <a:xfrm>
-            <a:off x="6188515" y="4893171"/>
-            <a:ext cx="2565435" cy="1260475"/>
+            <a:off x="661475" y="4102298"/>
+            <a:ext cx="472468" cy="472480"/>
           </a:xfrm>
           <a:prstGeom prst="rect">
             <a:avLst/>
@@ -5869,14 +5805,57 @@
       </p:pic>
       <p:sp>
         <p:nvSpPr>
-          <p:cNvPr id="20" name="Text 12"/>
-          <p:cNvSpPr/>
-          <p:nvPr/>
-        </p:nvSpPr>
-        <p:spPr>
-          <a:xfrm>
-            <a:off x="6453721" y="4918571"/>
-            <a:ext cx="2300230" cy="907256"/>
+          <p:cNvPr id="13" name="Text 7"/>
+          <p:cNvSpPr/>
+          <p:nvPr/>
+        </p:nvSpPr>
+        <p:spPr>
+          <a:xfrm>
+            <a:off x="1370177" y="4102298"/>
+            <a:ext cx="2756724" cy="590550"/>
+          </a:xfrm>
+          <a:prstGeom prst="rect">
+            <a:avLst/>
+          </a:prstGeom>
+          <a:noFill/>
+        </p:spPr>
+        <p:txBody>
+          <a:bodyPr wrap="square" lIns="0" tIns="0" rIns="0" bIns="0" rtlCol="0" anchor="t">
+            <a:normAutofit/>
+          </a:bodyPr>
+          <a:lstStyle/>
+          <a:p>
+            <a:pPr marL="0" indent="0" algn="l">
+              <a:lnSpc>
+                <a:spcPct val="104000"/>
+              </a:lnSpc>
+              <a:buNone/>
+            </a:pPr>
+            <a:r>
+              <a:rPr lang="en-US" sz="1850" dirty="0">
+                <a:solidFill>
+                  <a:srgbClr val="454240"/>
+                </a:solidFill>
+                <a:latin typeface="Libre Baskerville" panose="02000000000000000000" pitchFamily="34" charset="0"/>
+                <a:ea typeface="Libre Baskerville" panose="02000000000000000000" pitchFamily="34" charset="-122"/>
+                <a:cs typeface="Libre Baskerville" panose="02000000000000000000" pitchFamily="34" charset="-120"/>
+              </a:rPr>
+              <a:t>CVRPLIB Benchmarks</a:t>
+            </a:r>
+            <a:endParaRPr lang="en-US" sz="1850" dirty="0"/>
+          </a:p>
+        </p:txBody>
+      </p:sp>
+      <p:sp>
+        <p:nvSpPr>
+          <p:cNvPr id="14" name="Text 8"/>
+          <p:cNvSpPr/>
+          <p:nvPr/>
+        </p:nvSpPr>
+        <p:spPr>
+          <a:xfrm>
+            <a:off x="1370177" y="4806255"/>
+            <a:ext cx="2756724" cy="1209675"/>
           </a:xfrm>
           <a:prstGeom prst="rect">
             <a:avLst/>
@@ -5896,17 +5875,6 @@
               <a:buNone/>
             </a:pPr>
             <a:r>
-              <a:rPr lang="en-US" sz="1450" b="1" dirty="0">
-                <a:solidFill>
-                  <a:srgbClr val="454240"/>
-                </a:solidFill>
-                <a:latin typeface="DM Sans Bold" pitchFamily="34" charset="0"/>
-                <a:ea typeface="DM Sans Bold" pitchFamily="34" charset="-122"/>
-                <a:cs typeface="DM Sans Bold" pitchFamily="34" charset="-120"/>
-              </a:rPr>
-              <a:t>Optimisation</a:t>
-            </a:r>
-            <a:r>
               <a:rPr lang="en-US" sz="1450" dirty="0">
                 <a:solidFill>
                   <a:srgbClr val="454240"/>
@@ -5915,7 +5883,7 @@
                 <a:ea typeface="DM Sans" pitchFamily="34" charset="-122"/>
                 <a:cs typeface="DM Sans" pitchFamily="34" charset="-120"/>
               </a:rPr>
-              <a:t> · Wang Lepeng: VRPTW, routes, dispatch</a:t>
+              <a:t>Six Solomon instances + OSM road network.</a:t>
             </a:r>
             <a:endParaRPr lang="en-US" sz="1450" dirty="0"/>
           </a:p>
@@ -5923,17 +5891,17 @@
       </p:sp>
       <p:pic>
         <p:nvPicPr>
-          <p:cNvPr id="21" name="Image 6" descr="preencoded.png"/>
+          <p:cNvPr id="15" name="Image 4" descr="preencoded.png"/>
           <p:cNvPicPr>
             <a:picLocks noChangeAspect="1"/>
           </p:cNvPicPr>
           <p:nvPr/>
         </p:nvPicPr>
         <p:blipFill>
-          <a:blip r:embed="rId5">
+          <a:blip r:embed="rId9">
             <a:extLst>
               <a:ext uri="{96DAC541-7B7A-43D3-8B79-37D633B846F1}">
-                <asvg:svgBlip xmlns:asvg="http://schemas.microsoft.com/office/drawing/2016/SVG/main" r:embed="rId6"/>
+                <asvg:svgBlip xmlns:asvg="http://schemas.microsoft.com/office/drawing/2016/SVG/main" r:embed="rId10"/>
               </a:ext>
             </a:extLst>
           </a:blip>
@@ -5943,8 +5911,8 @@
         </p:blipFill>
         <p:spPr>
           <a:xfrm>
-            <a:off x="8964785" y="4893171"/>
-            <a:ext cx="2565435" cy="1260475"/>
+            <a:off x="4363135" y="4102298"/>
+            <a:ext cx="472468" cy="472480"/>
           </a:xfrm>
           <a:prstGeom prst="rect">
             <a:avLst/>
@@ -5953,14 +5921,57 @@
       </p:pic>
       <p:sp>
         <p:nvSpPr>
-          <p:cNvPr id="22" name="Text 13"/>
-          <p:cNvSpPr/>
-          <p:nvPr/>
-        </p:nvSpPr>
-        <p:spPr>
-          <a:xfrm>
-            <a:off x="9229990" y="4918571"/>
-            <a:ext cx="2300230" cy="1209675"/>
+          <p:cNvPr id="16" name="Text 9"/>
+          <p:cNvSpPr/>
+          <p:nvPr/>
+        </p:nvSpPr>
+        <p:spPr>
+          <a:xfrm>
+            <a:off x="5071836" y="4102298"/>
+            <a:ext cx="2756724" cy="295275"/>
+          </a:xfrm>
+          <a:prstGeom prst="rect">
+            <a:avLst/>
+          </a:prstGeom>
+          <a:noFill/>
+        </p:spPr>
+        <p:txBody>
+          <a:bodyPr wrap="square" lIns="0" tIns="0" rIns="0" bIns="0" rtlCol="0" anchor="t">
+            <a:normAutofit/>
+          </a:bodyPr>
+          <a:lstStyle/>
+          <a:p>
+            <a:pPr marL="0" indent="0" algn="l">
+              <a:lnSpc>
+                <a:spcPct val="104000"/>
+              </a:lnSpc>
+              <a:buNone/>
+            </a:pPr>
+            <a:r>
+              <a:rPr lang="en-US" sz="1850" dirty="0">
+                <a:solidFill>
+                  <a:srgbClr val="454240"/>
+                </a:solidFill>
+                <a:latin typeface="Libre Baskerville" panose="02000000000000000000" pitchFamily="34" charset="0"/>
+                <a:ea typeface="Libre Baskerville" panose="02000000000000000000" pitchFamily="34" charset="-122"/>
+                <a:cs typeface="Libre Baskerville" panose="02000000000000000000" pitchFamily="34" charset="-120"/>
+              </a:rPr>
+              <a:t>Domain Rules</a:t>
+            </a:r>
+            <a:endParaRPr lang="en-US" sz="1850" dirty="0"/>
+          </a:p>
+        </p:txBody>
+      </p:sp>
+      <p:sp>
+        <p:nvSpPr>
+          <p:cNvPr id="17" name="Text 10"/>
+          <p:cNvSpPr/>
+          <p:nvPr/>
+        </p:nvSpPr>
+        <p:spPr>
+          <a:xfrm>
+            <a:off x="5071836" y="4510980"/>
+            <a:ext cx="2756724" cy="1209675"/>
           </a:xfrm>
           <a:prstGeom prst="rect">
             <a:avLst/>
@@ -5980,17 +5991,6 @@
               <a:buNone/>
             </a:pPr>
             <a:r>
-              <a:rPr lang="en-US" sz="1450" b="1" dirty="0">
-                <a:solidFill>
-                  <a:srgbClr val="454240"/>
-                </a:solidFill>
-                <a:latin typeface="DM Sans Bold" pitchFamily="34" charset="0"/>
-                <a:ea typeface="DM Sans Bold" pitchFamily="34" charset="-122"/>
-                <a:cs typeface="DM Sans Bold" pitchFamily="34" charset="-120"/>
-              </a:rPr>
-              <a:t>KG + QA + Frontend</a:t>
-            </a:r>
-            <a:r>
               <a:rPr lang="en-US" sz="1450" dirty="0">
                 <a:solidFill>
                   <a:srgbClr val="454240"/>
@@ -5999,7 +5999,7 @@
                 <a:ea typeface="DM Sans" pitchFamily="34" charset="-122"/>
                 <a:cs typeface="DM Sans" pitchFamily="34" charset="-120"/>
               </a:rPr>
-              <a:t> · Shen Ziyi: KG, QA, API, frontend</a:t>
+              <a:t>WHO / EU GDP / ICH · CDC. Thresholds are prototype assumptions.</a:t>
             </a:r>
             <a:endParaRPr lang="en-US" sz="1450" dirty="0"/>
           </a:p>
